--- a/docs/110122127-TruongNguyenToNguyen-Báo cáo-Khóa luận TN.pptx
+++ b/docs/110122127-TruongNguyenToNguyen-Báo cáo-Khóa luận TN.pptx
@@ -4,19 +4,26 @@
   <p:sldMasterIdLst>
     <p:sldMasterId id="2147483648" r:id="rId1"/>
   </p:sldMasterIdLst>
+  <p:notesMasterIdLst>
+    <p:notesMasterId r:id="rId18"/>
+  </p:notesMasterIdLst>
   <p:sldIdLst>
     <p:sldId id="256" r:id="rId2"/>
     <p:sldId id="257" r:id="rId3"/>
-    <p:sldId id="258" r:id="rId4"/>
-    <p:sldId id="259" r:id="rId5"/>
-    <p:sldId id="260" r:id="rId6"/>
-    <p:sldId id="261" r:id="rId7"/>
+    <p:sldId id="273" r:id="rId4"/>
+    <p:sldId id="258" r:id="rId5"/>
+    <p:sldId id="259" r:id="rId6"/>
+    <p:sldId id="260" r:id="rId7"/>
     <p:sldId id="262" r:id="rId8"/>
-    <p:sldId id="263" r:id="rId9"/>
-    <p:sldId id="264" r:id="rId10"/>
-    <p:sldId id="265" r:id="rId11"/>
-    <p:sldId id="266" r:id="rId12"/>
-    <p:sldId id="269" r:id="rId13"/>
+    <p:sldId id="264" r:id="rId9"/>
+    <p:sldId id="261" r:id="rId10"/>
+    <p:sldId id="270" r:id="rId11"/>
+    <p:sldId id="271" r:id="rId12"/>
+    <p:sldId id="272" r:id="rId13"/>
+    <p:sldId id="274" r:id="rId14"/>
+    <p:sldId id="275" r:id="rId15"/>
+    <p:sldId id="265" r:id="rId16"/>
+    <p:sldId id="269" r:id="rId17"/>
   </p:sldIdLst>
   <p:sldSz cx="9144000" cy="5143500" type="screen16x9"/>
   <p:notesSz cx="6858000" cy="9144000"/>
@@ -116,11 +123,553 @@
     </a:lvl9pPr>
   </p:defaultTextStyle>
   <p:extLst>
+    <p:ext uri="{521415D9-36F7-43E2-AB2F-B90AF26B5E84}">
+      <p14:sectionLst xmlns:p14="http://schemas.microsoft.com/office/powerpoint/2010/main">
+        <p14:section name="Default Section" id="{848C11F8-D3E3-410E-9333-5D40EB1C1B15}">
+          <p14:sldIdLst>
+            <p14:sldId id="256"/>
+            <p14:sldId id="257"/>
+            <p14:sldId id="273"/>
+            <p14:sldId id="258"/>
+            <p14:sldId id="259"/>
+            <p14:sldId id="260"/>
+            <p14:sldId id="262"/>
+            <p14:sldId id="264"/>
+            <p14:sldId id="261"/>
+            <p14:sldId id="270"/>
+            <p14:sldId id="271"/>
+            <p14:sldId id="272"/>
+            <p14:sldId id="274"/>
+            <p14:sldId id="275"/>
+            <p14:sldId id="265"/>
+            <p14:sldId id="269"/>
+          </p14:sldIdLst>
+        </p14:section>
+      </p14:sectionLst>
+    </p:ext>
     <p:ext uri="{EFAFB233-063F-42B5-8137-9DF3F51BA10A}">
       <p15:sldGuideLst xmlns:p15="http://schemas.microsoft.com/office/powerpoint/2012/main"/>
     </p:ext>
   </p:extLst>
 </p:presentation>
+</file>
+
+<file path=ppt/notesMasters/notesMaster1.xml><?xml version="1.0" encoding="utf-8"?>
+<p:notesMaster xmlns:a="http://schemas.openxmlformats.org/drawingml/2006/main" xmlns:r="http://schemas.openxmlformats.org/officeDocument/2006/relationships" xmlns:p="http://schemas.openxmlformats.org/presentationml/2006/main">
+  <p:cSld>
+    <p:bg>
+      <p:bgRef idx="1001">
+        <a:schemeClr val="bg1"/>
+      </p:bgRef>
+    </p:bg>
+    <p:spTree>
+      <p:nvGrpSpPr>
+        <p:cNvPr id="1" name=""/>
+        <p:cNvGrpSpPr/>
+        <p:nvPr/>
+      </p:nvGrpSpPr>
+      <p:grpSpPr>
+        <a:xfrm>
+          <a:off x="0" y="0"/>
+          <a:ext cx="0" cy="0"/>
+          <a:chOff x="0" y="0"/>
+          <a:chExt cx="0" cy="0"/>
+        </a:xfrm>
+      </p:grpSpPr>
+      <p:sp>
+        <p:nvSpPr>
+          <p:cNvPr id="2" name="Header Placeholder 1"/>
+          <p:cNvSpPr>
+            <a:spLocks noGrp="1"/>
+          </p:cNvSpPr>
+          <p:nvPr>
+            <p:ph type="hdr" sz="quarter"/>
+          </p:nvPr>
+        </p:nvSpPr>
+        <p:spPr>
+          <a:xfrm>
+            <a:off x="0" y="0"/>
+            <a:ext cx="2971800" cy="458788"/>
+          </a:xfrm>
+          <a:prstGeom prst="rect">
+            <a:avLst/>
+          </a:prstGeom>
+        </p:spPr>
+        <p:txBody>
+          <a:bodyPr vert="horz" lIns="91440" tIns="45720" rIns="91440" bIns="45720" rtlCol="0"/>
+          <a:lstStyle>
+            <a:lvl1pPr algn="l">
+              <a:defRPr sz="1200"/>
+            </a:lvl1pPr>
+          </a:lstStyle>
+          <a:p>
+            <a:endParaRPr lang="vi-VN"/>
+          </a:p>
+        </p:txBody>
+      </p:sp>
+      <p:sp>
+        <p:nvSpPr>
+          <p:cNvPr id="3" name="Date Placeholder 2"/>
+          <p:cNvSpPr>
+            <a:spLocks noGrp="1"/>
+          </p:cNvSpPr>
+          <p:nvPr>
+            <p:ph type="dt" idx="1"/>
+          </p:nvPr>
+        </p:nvSpPr>
+        <p:spPr>
+          <a:xfrm>
+            <a:off x="3884613" y="0"/>
+            <a:ext cx="2971800" cy="458788"/>
+          </a:xfrm>
+          <a:prstGeom prst="rect">
+            <a:avLst/>
+          </a:prstGeom>
+        </p:spPr>
+        <p:txBody>
+          <a:bodyPr vert="horz" lIns="91440" tIns="45720" rIns="91440" bIns="45720" rtlCol="0"/>
+          <a:lstStyle>
+            <a:lvl1pPr algn="r">
+              <a:defRPr sz="1200"/>
+            </a:lvl1pPr>
+          </a:lstStyle>
+          <a:p>
+            <a:fld id="{D48BCE06-DC01-4404-BB88-82118F689A3E}" type="datetimeFigureOut">
+              <a:rPr lang="vi-VN" smtClean="0"/>
+              <a:t>06/07/2026</a:t>
+            </a:fld>
+            <a:endParaRPr lang="vi-VN"/>
+          </a:p>
+        </p:txBody>
+      </p:sp>
+      <p:sp>
+        <p:nvSpPr>
+          <p:cNvPr id="4" name="Slide Image Placeholder 3"/>
+          <p:cNvSpPr>
+            <a:spLocks noGrp="1" noRot="1" noChangeAspect="1"/>
+          </p:cNvSpPr>
+          <p:nvPr>
+            <p:ph type="sldImg" idx="2"/>
+          </p:nvPr>
+        </p:nvSpPr>
+        <p:spPr>
+          <a:xfrm>
+            <a:off x="685800" y="1143000"/>
+            <a:ext cx="5486400" cy="3086100"/>
+          </a:xfrm>
+          <a:prstGeom prst="rect">
+            <a:avLst/>
+          </a:prstGeom>
+          <a:noFill/>
+          <a:ln w="12700">
+            <a:solidFill>
+              <a:prstClr val="black"/>
+            </a:solidFill>
+          </a:ln>
+        </p:spPr>
+        <p:txBody>
+          <a:bodyPr vert="horz" lIns="91440" tIns="45720" rIns="91440" bIns="45720" rtlCol="0" anchor="ctr"/>
+          <a:lstStyle/>
+          <a:p>
+            <a:endParaRPr lang="vi-VN"/>
+          </a:p>
+        </p:txBody>
+      </p:sp>
+      <p:sp>
+        <p:nvSpPr>
+          <p:cNvPr id="5" name="Notes Placeholder 4"/>
+          <p:cNvSpPr>
+            <a:spLocks noGrp="1"/>
+          </p:cNvSpPr>
+          <p:nvPr>
+            <p:ph type="body" sz="quarter" idx="3"/>
+          </p:nvPr>
+        </p:nvSpPr>
+        <p:spPr>
+          <a:xfrm>
+            <a:off x="685800" y="4400550"/>
+            <a:ext cx="5486400" cy="3600450"/>
+          </a:xfrm>
+          <a:prstGeom prst="rect">
+            <a:avLst/>
+          </a:prstGeom>
+        </p:spPr>
+        <p:txBody>
+          <a:bodyPr vert="horz" lIns="91440" tIns="45720" rIns="91440" bIns="45720" rtlCol="0"/>
+          <a:lstStyle/>
+          <a:p>
+            <a:pPr lvl="0"/>
+            <a:r>
+              <a:rPr lang="en-US"/>
+              <a:t>Click to edit Master text styles</a:t>
+            </a:r>
+          </a:p>
+          <a:p>
+            <a:pPr lvl="1"/>
+            <a:r>
+              <a:rPr lang="en-US"/>
+              <a:t>Second level</a:t>
+            </a:r>
+          </a:p>
+          <a:p>
+            <a:pPr lvl="2"/>
+            <a:r>
+              <a:rPr lang="en-US"/>
+              <a:t>Third level</a:t>
+            </a:r>
+          </a:p>
+          <a:p>
+            <a:pPr lvl="3"/>
+            <a:r>
+              <a:rPr lang="en-US"/>
+              <a:t>Fourth level</a:t>
+            </a:r>
+          </a:p>
+          <a:p>
+            <a:pPr lvl="4"/>
+            <a:r>
+              <a:rPr lang="en-US"/>
+              <a:t>Fifth level</a:t>
+            </a:r>
+            <a:endParaRPr lang="vi-VN"/>
+          </a:p>
+        </p:txBody>
+      </p:sp>
+      <p:sp>
+        <p:nvSpPr>
+          <p:cNvPr id="6" name="Footer Placeholder 5"/>
+          <p:cNvSpPr>
+            <a:spLocks noGrp="1"/>
+          </p:cNvSpPr>
+          <p:nvPr>
+            <p:ph type="ftr" sz="quarter" idx="4"/>
+          </p:nvPr>
+        </p:nvSpPr>
+        <p:spPr>
+          <a:xfrm>
+            <a:off x="0" y="8685213"/>
+            <a:ext cx="2971800" cy="458787"/>
+          </a:xfrm>
+          <a:prstGeom prst="rect">
+            <a:avLst/>
+          </a:prstGeom>
+        </p:spPr>
+        <p:txBody>
+          <a:bodyPr vert="horz" lIns="91440" tIns="45720" rIns="91440" bIns="45720" rtlCol="0" anchor="b"/>
+          <a:lstStyle>
+            <a:lvl1pPr algn="l">
+              <a:defRPr sz="1200"/>
+            </a:lvl1pPr>
+          </a:lstStyle>
+          <a:p>
+            <a:endParaRPr lang="vi-VN"/>
+          </a:p>
+        </p:txBody>
+      </p:sp>
+      <p:sp>
+        <p:nvSpPr>
+          <p:cNvPr id="7" name="Slide Number Placeholder 6"/>
+          <p:cNvSpPr>
+            <a:spLocks noGrp="1"/>
+          </p:cNvSpPr>
+          <p:nvPr>
+            <p:ph type="sldNum" sz="quarter" idx="5"/>
+          </p:nvPr>
+        </p:nvSpPr>
+        <p:spPr>
+          <a:xfrm>
+            <a:off x="3884613" y="8685213"/>
+            <a:ext cx="2971800" cy="458787"/>
+          </a:xfrm>
+          <a:prstGeom prst="rect">
+            <a:avLst/>
+          </a:prstGeom>
+        </p:spPr>
+        <p:txBody>
+          <a:bodyPr vert="horz" lIns="91440" tIns="45720" rIns="91440" bIns="45720" rtlCol="0" anchor="b"/>
+          <a:lstStyle>
+            <a:lvl1pPr algn="r">
+              <a:defRPr sz="1200"/>
+            </a:lvl1pPr>
+          </a:lstStyle>
+          <a:p>
+            <a:fld id="{0C184B33-0608-452E-AA1F-2691FC844A4A}" type="slidenum">
+              <a:rPr lang="vi-VN" smtClean="0"/>
+              <a:t>‹#›</a:t>
+            </a:fld>
+            <a:endParaRPr lang="vi-VN"/>
+          </a:p>
+        </p:txBody>
+      </p:sp>
+    </p:spTree>
+    <p:extLst>
+      <p:ext uri="{BB962C8B-B14F-4D97-AF65-F5344CB8AC3E}">
+        <p14:creationId xmlns:p14="http://schemas.microsoft.com/office/powerpoint/2010/main" val="3333737221"/>
+      </p:ext>
+    </p:extLst>
+  </p:cSld>
+  <p:clrMap bg1="lt1" tx1="dk1" bg2="lt2" tx2="dk2" accent1="accent1" accent2="accent2" accent3="accent3" accent4="accent4" accent5="accent5" accent6="accent6" hlink="hlink" folHlink="folHlink"/>
+  <p:notesStyle>
+    <a:lvl1pPr marL="0" algn="l" defTabSz="914400" rtl="0" eaLnBrk="1" latinLnBrk="0" hangingPunct="1">
+      <a:defRPr sz="1200" kern="1200">
+        <a:solidFill>
+          <a:schemeClr val="tx1"/>
+        </a:solidFill>
+        <a:latin typeface="+mn-lt"/>
+        <a:ea typeface="+mn-ea"/>
+        <a:cs typeface="+mn-cs"/>
+      </a:defRPr>
+    </a:lvl1pPr>
+    <a:lvl2pPr marL="457200" algn="l" defTabSz="914400" rtl="0" eaLnBrk="1" latinLnBrk="0" hangingPunct="1">
+      <a:defRPr sz="1200" kern="1200">
+        <a:solidFill>
+          <a:schemeClr val="tx1"/>
+        </a:solidFill>
+        <a:latin typeface="+mn-lt"/>
+        <a:ea typeface="+mn-ea"/>
+        <a:cs typeface="+mn-cs"/>
+      </a:defRPr>
+    </a:lvl2pPr>
+    <a:lvl3pPr marL="914400" algn="l" defTabSz="914400" rtl="0" eaLnBrk="1" latinLnBrk="0" hangingPunct="1">
+      <a:defRPr sz="1200" kern="1200">
+        <a:solidFill>
+          <a:schemeClr val="tx1"/>
+        </a:solidFill>
+        <a:latin typeface="+mn-lt"/>
+        <a:ea typeface="+mn-ea"/>
+        <a:cs typeface="+mn-cs"/>
+      </a:defRPr>
+    </a:lvl3pPr>
+    <a:lvl4pPr marL="1371600" algn="l" defTabSz="914400" rtl="0" eaLnBrk="1" latinLnBrk="0" hangingPunct="1">
+      <a:defRPr sz="1200" kern="1200">
+        <a:solidFill>
+          <a:schemeClr val="tx1"/>
+        </a:solidFill>
+        <a:latin typeface="+mn-lt"/>
+        <a:ea typeface="+mn-ea"/>
+        <a:cs typeface="+mn-cs"/>
+      </a:defRPr>
+    </a:lvl4pPr>
+    <a:lvl5pPr marL="1828800" algn="l" defTabSz="914400" rtl="0" eaLnBrk="1" latinLnBrk="0" hangingPunct="1">
+      <a:defRPr sz="1200" kern="1200">
+        <a:solidFill>
+          <a:schemeClr val="tx1"/>
+        </a:solidFill>
+        <a:latin typeface="+mn-lt"/>
+        <a:ea typeface="+mn-ea"/>
+        <a:cs typeface="+mn-cs"/>
+      </a:defRPr>
+    </a:lvl5pPr>
+    <a:lvl6pPr marL="2286000" algn="l" defTabSz="914400" rtl="0" eaLnBrk="1" latinLnBrk="0" hangingPunct="1">
+      <a:defRPr sz="1200" kern="1200">
+        <a:solidFill>
+          <a:schemeClr val="tx1"/>
+        </a:solidFill>
+        <a:latin typeface="+mn-lt"/>
+        <a:ea typeface="+mn-ea"/>
+        <a:cs typeface="+mn-cs"/>
+      </a:defRPr>
+    </a:lvl6pPr>
+    <a:lvl7pPr marL="2743200" algn="l" defTabSz="914400" rtl="0" eaLnBrk="1" latinLnBrk="0" hangingPunct="1">
+      <a:defRPr sz="1200" kern="1200">
+        <a:solidFill>
+          <a:schemeClr val="tx1"/>
+        </a:solidFill>
+        <a:latin typeface="+mn-lt"/>
+        <a:ea typeface="+mn-ea"/>
+        <a:cs typeface="+mn-cs"/>
+      </a:defRPr>
+    </a:lvl7pPr>
+    <a:lvl8pPr marL="3200400" algn="l" defTabSz="914400" rtl="0" eaLnBrk="1" latinLnBrk="0" hangingPunct="1">
+      <a:defRPr sz="1200" kern="1200">
+        <a:solidFill>
+          <a:schemeClr val="tx1"/>
+        </a:solidFill>
+        <a:latin typeface="+mn-lt"/>
+        <a:ea typeface="+mn-ea"/>
+        <a:cs typeface="+mn-cs"/>
+      </a:defRPr>
+    </a:lvl8pPr>
+    <a:lvl9pPr marL="3657600" algn="l" defTabSz="914400" rtl="0" eaLnBrk="1" latinLnBrk="0" hangingPunct="1">
+      <a:defRPr sz="1200" kern="1200">
+        <a:solidFill>
+          <a:schemeClr val="tx1"/>
+        </a:solidFill>
+        <a:latin typeface="+mn-lt"/>
+        <a:ea typeface="+mn-ea"/>
+        <a:cs typeface="+mn-cs"/>
+      </a:defRPr>
+    </a:lvl9pPr>
+  </p:notesStyle>
+</p:notesMaster>
+</file>
+
+<file path=ppt/notesSlides/notesSlide1.xml><?xml version="1.0" encoding="utf-8"?>
+<p:notes xmlns:a="http://schemas.openxmlformats.org/drawingml/2006/main" xmlns:r="http://schemas.openxmlformats.org/officeDocument/2006/relationships" xmlns:p="http://schemas.openxmlformats.org/presentationml/2006/main">
+  <p:cSld>
+    <p:spTree>
+      <p:nvGrpSpPr>
+        <p:cNvPr id="1" name=""/>
+        <p:cNvGrpSpPr/>
+        <p:nvPr/>
+      </p:nvGrpSpPr>
+      <p:grpSpPr>
+        <a:xfrm>
+          <a:off x="0" y="0"/>
+          <a:ext cx="0" cy="0"/>
+          <a:chOff x="0" y="0"/>
+          <a:chExt cx="0" cy="0"/>
+        </a:xfrm>
+      </p:grpSpPr>
+      <p:sp>
+        <p:nvSpPr>
+          <p:cNvPr id="2" name="Slide Image Placeholder 1"/>
+          <p:cNvSpPr>
+            <a:spLocks noGrp="1" noRot="1" noChangeAspect="1"/>
+          </p:cNvSpPr>
+          <p:nvPr>
+            <p:ph type="sldImg"/>
+          </p:nvPr>
+        </p:nvSpPr>
+        <p:spPr/>
+      </p:sp>
+      <p:sp>
+        <p:nvSpPr>
+          <p:cNvPr id="3" name="Notes Placeholder 2"/>
+          <p:cNvSpPr>
+            <a:spLocks noGrp="1"/>
+          </p:cNvSpPr>
+          <p:nvPr>
+            <p:ph type="body" idx="1"/>
+          </p:nvPr>
+        </p:nvSpPr>
+        <p:spPr/>
+        <p:txBody>
+          <a:bodyPr/>
+          <a:lstStyle/>
+          <a:p>
+            <a:endParaRPr lang="vi-VN"/>
+          </a:p>
+        </p:txBody>
+      </p:sp>
+      <p:sp>
+        <p:nvSpPr>
+          <p:cNvPr id="4" name="Slide Number Placeholder 3"/>
+          <p:cNvSpPr>
+            <a:spLocks noGrp="1"/>
+          </p:cNvSpPr>
+          <p:nvPr>
+            <p:ph type="sldNum" sz="quarter" idx="5"/>
+          </p:nvPr>
+        </p:nvSpPr>
+        <p:spPr/>
+        <p:txBody>
+          <a:bodyPr/>
+          <a:lstStyle/>
+          <a:p>
+            <a:fld id="{0C184B33-0608-452E-AA1F-2691FC844A4A}" type="slidenum">
+              <a:rPr lang="vi-VN" smtClean="0"/>
+              <a:t>11</a:t>
+            </a:fld>
+            <a:endParaRPr lang="vi-VN"/>
+          </a:p>
+        </p:txBody>
+      </p:sp>
+    </p:spTree>
+    <p:extLst>
+      <p:ext uri="{BB962C8B-B14F-4D97-AF65-F5344CB8AC3E}">
+        <p14:creationId xmlns:p14="http://schemas.microsoft.com/office/powerpoint/2010/main" val="3569908410"/>
+      </p:ext>
+    </p:extLst>
+  </p:cSld>
+  <p:clrMapOvr>
+    <a:masterClrMapping/>
+  </p:clrMapOvr>
+</p:notes>
+</file>
+
+<file path=ppt/notesSlides/notesSlide2.xml><?xml version="1.0" encoding="utf-8"?>
+<p:notes xmlns:a="http://schemas.openxmlformats.org/drawingml/2006/main" xmlns:r="http://schemas.openxmlformats.org/officeDocument/2006/relationships" xmlns:p="http://schemas.openxmlformats.org/presentationml/2006/main">
+  <p:cSld>
+    <p:spTree>
+      <p:nvGrpSpPr>
+        <p:cNvPr id="1" name=""/>
+        <p:cNvGrpSpPr/>
+        <p:nvPr/>
+      </p:nvGrpSpPr>
+      <p:grpSpPr>
+        <a:xfrm>
+          <a:off x="0" y="0"/>
+          <a:ext cx="0" cy="0"/>
+          <a:chOff x="0" y="0"/>
+          <a:chExt cx="0" cy="0"/>
+        </a:xfrm>
+      </p:grpSpPr>
+      <p:sp>
+        <p:nvSpPr>
+          <p:cNvPr id="2" name="Slide Image Placeholder 1"/>
+          <p:cNvSpPr>
+            <a:spLocks noGrp="1" noRot="1" noChangeAspect="1"/>
+          </p:cNvSpPr>
+          <p:nvPr>
+            <p:ph type="sldImg"/>
+          </p:nvPr>
+        </p:nvSpPr>
+        <p:spPr/>
+      </p:sp>
+      <p:sp>
+        <p:nvSpPr>
+          <p:cNvPr id="3" name="Notes Placeholder 2"/>
+          <p:cNvSpPr>
+            <a:spLocks noGrp="1"/>
+          </p:cNvSpPr>
+          <p:nvPr>
+            <p:ph type="body" idx="1"/>
+          </p:nvPr>
+        </p:nvSpPr>
+        <p:spPr/>
+        <p:txBody>
+          <a:bodyPr/>
+          <a:lstStyle/>
+          <a:p>
+            <a:endParaRPr lang="vi-VN"/>
+          </a:p>
+        </p:txBody>
+      </p:sp>
+      <p:sp>
+        <p:nvSpPr>
+          <p:cNvPr id="4" name="Slide Number Placeholder 3"/>
+          <p:cNvSpPr>
+            <a:spLocks noGrp="1"/>
+          </p:cNvSpPr>
+          <p:nvPr>
+            <p:ph type="sldNum" sz="quarter" idx="5"/>
+          </p:nvPr>
+        </p:nvSpPr>
+        <p:spPr/>
+        <p:txBody>
+          <a:bodyPr/>
+          <a:lstStyle/>
+          <a:p>
+            <a:fld id="{0C184B33-0608-452E-AA1F-2691FC844A4A}" type="slidenum">
+              <a:rPr lang="vi-VN" smtClean="0"/>
+              <a:t>12</a:t>
+            </a:fld>
+            <a:endParaRPr lang="vi-VN"/>
+          </a:p>
+        </p:txBody>
+      </p:sp>
+    </p:spTree>
+    <p:extLst>
+      <p:ext uri="{BB962C8B-B14F-4D97-AF65-F5344CB8AC3E}">
+        <p14:creationId xmlns:p14="http://schemas.microsoft.com/office/powerpoint/2010/main" val="3122784801"/>
+      </p:ext>
+    </p:extLst>
+  </p:cSld>
+  <p:clrMapOvr>
+    <a:masterClrMapping/>
+  </p:clrMapOvr>
+</p:notes>
 </file>
 
 <file path=ppt/slideLayouts/slideLayout1.xml><?xml version="1.0" encoding="utf-8"?>
@@ -1202,6 +1751,22 @@
 <file path=ppt/slides/slide1.xml><?xml version="1.0" encoding="utf-8"?>
 <p:sld xmlns:a="http://schemas.openxmlformats.org/drawingml/2006/main" xmlns:r="http://schemas.openxmlformats.org/officeDocument/2006/relationships" xmlns:p="http://schemas.openxmlformats.org/presentationml/2006/main">
   <p:cSld>
+    <p:bg>
+      <p:bgPr>
+        <a:gradFill rotWithShape="0">
+          <a:gsLst>
+            <a:gs pos="0">
+              <a:schemeClr val="tx1"/>
+            </a:gs>
+            <a:gs pos="100000">
+              <a:srgbClr val="3333B8"/>
+            </a:gs>
+          </a:gsLst>
+          <a:lin ang="18900000"/>
+        </a:gradFill>
+        <a:effectLst/>
+      </p:bgPr>
+    </p:bg>
     <p:spTree>
       <p:nvGrpSpPr>
         <p:cNvPr id="1" name=""/>
@@ -17509,7 +18074,7 @@
         </p:nvSpPr>
         <p:spPr>
           <a:xfrm>
-            <a:off x="343080" y="1110984"/>
+            <a:off x="343080" y="1814377"/>
             <a:ext cx="4228920" cy="761760"/>
           </a:xfrm>
           <a:prstGeom prst="rect">
@@ -17539,7 +18104,11 @@
           <a:lstStyle/>
           <a:p>
             <a:r>
-              <a:rPr lang="vi-VN"/>
+              <a:rPr lang="vi-VN">
+                <a:solidFill>
+                  <a:schemeClr val="bg2"/>
+                </a:solidFill>
+              </a:rPr>
               <a:t>ĐỒ ÁN TỐT NGHIỆP</a:t>
             </a:r>
           </a:p>
@@ -17553,7 +18122,7 @@
         </p:nvSpPr>
         <p:spPr>
           <a:xfrm>
-            <a:off x="343080" y="1594921"/>
+            <a:off x="343080" y="2195257"/>
             <a:ext cx="4638240" cy="1142640"/>
           </a:xfrm>
           <a:prstGeom prst="rect">
@@ -17593,7 +18162,7 @@
             <a:r>
               <a:rPr lang="en-US" sz="4500" b="1" u="none" strike="noStrike">
                 <a:solidFill>
-                  <a:srgbClr val="92F7FF"/>
+                  <a:schemeClr val="bg2"/>
                 </a:solidFill>
                 <a:effectLst/>
                 <a:uFillTx/>
@@ -17614,7 +18183,7 @@
             <a:r>
               <a:rPr lang="en-US" sz="4500" b="1" u="none" strike="noStrike">
                 <a:solidFill>
-                  <a:srgbClr val="92F7FF"/>
+                  <a:schemeClr val="bg2"/>
                 </a:solidFill>
                 <a:effectLst/>
                 <a:uFillTx/>
@@ -17635,7 +18204,7 @@
             <a:r>
               <a:rPr lang="en-US" sz="4500" b="1" u="none" strike="noStrike">
                 <a:solidFill>
-                  <a:srgbClr val="92F7FF"/>
+                  <a:schemeClr val="bg2"/>
                 </a:solidFill>
                 <a:effectLst/>
                 <a:uFillTx/>
@@ -17645,7 +18214,7 @@
             </a:r>
             <a:endParaRPr lang="en-US" sz="4500" b="0" u="none" strike="noStrike">
               <a:solidFill>
-                <a:srgbClr val="FFFFFF"/>
+                <a:schemeClr val="bg2"/>
               </a:solidFill>
               <a:effectLst/>
               <a:uFillTx/>
@@ -17668,8 +18237,8 @@
         </p:nvSpPr>
         <p:spPr>
           <a:xfrm>
-            <a:off x="547740" y="3084688"/>
-            <a:ext cx="4496450" cy="1307429"/>
+            <a:off x="354220" y="3660411"/>
+            <a:ext cx="3468272" cy="439400"/>
           </a:xfrm>
           <a:prstGeom prst="rect">
             <a:avLst/>
@@ -17693,50 +18262,1562 @@
         </p:style>
         <p:txBody>
           <a:bodyPr anchor="t">
-            <a:normAutofit fontScale="85000" lnSpcReduction="20000"/>
+            <a:normAutofit/>
           </a:bodyPr>
           <a:lstStyle/>
           <a:p>
             <a:r>
-              <a:rPr lang="vi-VN"/>
+              <a:rPr lang="vi-VN">
+                <a:solidFill>
+                  <a:schemeClr val="bg2"/>
+                </a:solidFill>
+              </a:rPr>
               <a:t>GVHD: Ngô Thanh Huy</a:t>
             </a:r>
           </a:p>
+        </p:txBody>
+      </p:sp>
+      <p:sp>
+        <p:nvSpPr>
+          <p:cNvPr id="159" name="Rectangle 158">
+            <a:extLst>
+              <a:ext uri="{FF2B5EF4-FFF2-40B4-BE49-F238E27FC236}">
+                <a16:creationId xmlns:a16="http://schemas.microsoft.com/office/drawing/2014/main" id="{6A42A90E-FB71-1483-B807-B97625DF98B3}"/>
+              </a:ext>
+            </a:extLst>
+          </p:cNvPr>
+          <p:cNvSpPr/>
+          <p:nvPr/>
+        </p:nvSpPr>
+        <p:spPr>
+          <a:xfrm>
+            <a:off x="1057612" y="290857"/>
+            <a:ext cx="4228920" cy="761760"/>
+          </a:xfrm>
+          <a:prstGeom prst="rect">
+            <a:avLst/>
+          </a:prstGeom>
+          <a:noFill/>
+          <a:ln w="0">
+            <a:noFill/>
+          </a:ln>
+        </p:spPr>
+        <p:style>
+          <a:lnRef idx="0">
+            <a:scrgbClr r="0" g="0" b="0"/>
+          </a:lnRef>
+          <a:fillRef idx="0">
+            <a:scrgbClr r="0" g="0" b="0"/>
+          </a:fillRef>
+          <a:effectRef idx="0">
+            <a:scrgbClr r="0" g="0" b="0"/>
+          </a:effectRef>
+          <a:fontRef idx="minor"/>
+        </p:style>
+        <p:txBody>
+          <a:bodyPr anchor="t">
+            <a:normAutofit fontScale="92500" lnSpcReduction="20000"/>
+          </a:bodyPr>
+          <a:lstStyle/>
           <a:p>
-            <a:endParaRPr lang="vi-VN"/>
-          </a:p>
-          <a:p>
-            <a:endParaRPr lang="vi-VN"/>
+            <a:r>
+              <a:rPr lang="vi-VN">
+                <a:solidFill>
+                  <a:schemeClr val="bg2"/>
+                </a:solidFill>
+              </a:rPr>
+              <a:t>ĐẠI HỌC TRÀ VINH</a:t>
+            </a:r>
           </a:p>
           <a:p>
             <a:r>
-              <a:rPr lang="vi-VN"/>
+              <a:rPr lang="vi-VN">
+                <a:solidFill>
+                  <a:schemeClr val="bg2"/>
+                </a:solidFill>
+              </a:rPr>
+              <a:t>TRƯỜNG KỸ THUẬT VÀ CÔNG NGHỆ</a:t>
+            </a:r>
+          </a:p>
+          <a:p>
+            <a:r>
+              <a:rPr lang="vi-VN">
+                <a:solidFill>
+                  <a:schemeClr val="bg2"/>
+                </a:solidFill>
+              </a:rPr>
+              <a:t>KHOA CÔNG NGHỆ THÔNG TIN</a:t>
+            </a:r>
+          </a:p>
+        </p:txBody>
+      </p:sp>
+      <p:sp>
+        <p:nvSpPr>
+          <p:cNvPr id="161" name="TextBox 160">
+            <a:extLst>
+              <a:ext uri="{FF2B5EF4-FFF2-40B4-BE49-F238E27FC236}">
+                <a16:creationId xmlns:a16="http://schemas.microsoft.com/office/drawing/2014/main" id="{B7F9ECD8-DC27-2894-148B-7810A923ECA8}"/>
+              </a:ext>
+            </a:extLst>
+          </p:cNvPr>
+          <p:cNvSpPr txBox="1"/>
+          <p:nvPr/>
+        </p:nvSpPr>
+        <p:spPr>
+          <a:xfrm>
+            <a:off x="354220" y="4099811"/>
+            <a:ext cx="4650698" cy="923330"/>
+          </a:xfrm>
+          <a:prstGeom prst="rect">
+            <a:avLst/>
+          </a:prstGeom>
+          <a:noFill/>
+        </p:spPr>
+        <p:txBody>
+          <a:bodyPr wrap="square">
+            <a:spAutoFit/>
+          </a:bodyPr>
+          <a:lstStyle/>
+          <a:p>
+            <a:r>
+              <a:rPr lang="vi-VN" sz="1800">
+                <a:solidFill>
+                  <a:schemeClr val="bg2"/>
+                </a:solidFill>
+              </a:rPr>
               <a:t>SVTH: Trương Nguyễn Tố Nguyên</a:t>
             </a:r>
           </a:p>
           <a:p>
             <a:r>
-              <a:rPr lang="vi-VN"/>
+              <a:rPr lang="vi-VN" sz="1800">
+                <a:solidFill>
+                  <a:schemeClr val="bg2"/>
+                </a:solidFill>
+              </a:rPr>
               <a:t>Mã lớp: DA22TTB</a:t>
             </a:r>
           </a:p>
           <a:p>
             <a:r>
-              <a:rPr lang="vi-VN"/>
+              <a:rPr lang="vi-VN" sz="1800">
+                <a:solidFill>
+                  <a:schemeClr val="bg2"/>
+                </a:solidFill>
+              </a:rPr>
               <a:t>MSSV: 110122127</a:t>
+            </a:r>
+            <a:endParaRPr lang="vi-VN">
+              <a:solidFill>
+                <a:schemeClr val="bg2"/>
+              </a:solidFill>
+            </a:endParaRPr>
+          </a:p>
+        </p:txBody>
+      </p:sp>
+      <p:pic>
+        <p:nvPicPr>
+          <p:cNvPr id="4" name="Picture 3">
+            <a:extLst>
+              <a:ext uri="{FF2B5EF4-FFF2-40B4-BE49-F238E27FC236}">
+                <a16:creationId xmlns:a16="http://schemas.microsoft.com/office/drawing/2014/main" id="{E8AB30A2-8D32-0258-A80C-69742DB430D2}"/>
+              </a:ext>
+            </a:extLst>
+          </p:cNvPr>
+          <p:cNvPicPr>
+            <a:picLocks noChangeAspect="1"/>
+          </p:cNvPicPr>
+          <p:nvPr/>
+        </p:nvPicPr>
+        <p:blipFill>
+          <a:blip r:embed="rId2" cstate="print">
+            <a:extLst>
+              <a:ext uri="{28A0092B-C50C-407E-A947-70E740481C1C}">
+                <a14:useLocalDpi xmlns:a14="http://schemas.microsoft.com/office/drawing/2010/main" val="0"/>
+              </a:ext>
+            </a:extLst>
+          </a:blip>
+          <a:stretch>
+            <a:fillRect/>
+          </a:stretch>
+        </p:blipFill>
+        <p:spPr>
+          <a:xfrm>
+            <a:off x="120866" y="174455"/>
+            <a:ext cx="839310" cy="839310"/>
+          </a:xfrm>
+          <a:prstGeom prst="rect">
+            <a:avLst/>
+          </a:prstGeom>
+        </p:spPr>
+      </p:pic>
+    </p:spTree>
+  </p:cSld>
+  <p:clrMapOvr>
+    <a:masterClrMapping/>
+  </p:clrMapOvr>
+  <mc:AlternateContent xmlns:mc="http://schemas.openxmlformats.org/markup-compatibility/2006" xmlns:p159="http://schemas.microsoft.com/office/powerpoint/2015/09/main">
+    <mc:Choice Requires="p159">
+      <p:transition xmlns:p14="http://schemas.microsoft.com/office/powerpoint/2010/main" spd="slow" p14:dur="2000">
+        <p159:morph option="byObject"/>
+      </p:transition>
+    </mc:Choice>
+    <mc:Fallback xmlns="">
+      <p:transition spd="slow">
+        <p:fade/>
+      </p:transition>
+    </mc:Fallback>
+  </mc:AlternateContent>
+</p:sld>
+</file>
+
+<file path=ppt/slides/slide10.xml><?xml version="1.0" encoding="utf-8"?>
+<p:sld xmlns:a="http://schemas.openxmlformats.org/drawingml/2006/main" xmlns:r="http://schemas.openxmlformats.org/officeDocument/2006/relationships" xmlns:p="http://schemas.openxmlformats.org/presentationml/2006/main">
+  <p:cSld>
+    <p:spTree>
+      <p:nvGrpSpPr>
+        <p:cNvPr id="1" name=""/>
+        <p:cNvGrpSpPr/>
+        <p:nvPr/>
+      </p:nvGrpSpPr>
+      <p:grpSpPr>
+        <a:xfrm>
+          <a:off x="0" y="0"/>
+          <a:ext cx="0" cy="0"/>
+          <a:chOff x="0" y="0"/>
+          <a:chExt cx="0" cy="0"/>
+        </a:xfrm>
+      </p:grpSpPr>
+      <p:sp>
+        <p:nvSpPr>
+          <p:cNvPr id="300" name="title"/>
+          <p:cNvSpPr/>
+          <p:nvPr/>
+        </p:nvSpPr>
+        <p:spPr>
+          <a:xfrm>
+            <a:off x="457200" y="400000"/>
+            <a:ext cx="8610840" cy="480000"/>
+          </a:xfrm>
+          <a:prstGeom prst="rect">
+            <a:avLst/>
+          </a:prstGeom>
+          <a:noFill/>
+          <a:ln w="0">
+            <a:noFill/>
+          </a:ln>
+        </p:spPr>
+        <p:style>
+          <a:lnRef idx="0">
+            <a:scrgbClr r="0" g="0" b="0"/>
+          </a:lnRef>
+          <a:fillRef idx="0">
+            <a:scrgbClr r="0" g="0" b="0"/>
+          </a:fillRef>
+          <a:effectRef idx="0">
+            <a:scrgbClr r="0" g="0" b="0"/>
+          </a:effectRef>
+          <a:fontRef idx="minor"/>
+        </p:style>
+        <p:txBody>
+          <a:bodyPr anchor="ctr">
+            <a:normAutofit/>
+          </a:bodyPr>
+          <a:lstStyle/>
+          <a:p>
+            <a:pPr algn="ctr"/>
+            <a:r>
+              <a:rPr lang="vi-VN" sz="2400" b="0">
+                <a:solidFill>
+                  <a:srgbClr val="92F7FF"/>
+                </a:solidFill>
+                <a:latin typeface="Orbitron"/>
+              </a:rPr>
+              <a:t>Cơ sở dữ liệu (ERD)</a:t>
+            </a:r>
+          </a:p>
+        </p:txBody>
+      </p:sp>
+      <p:pic>
+        <p:nvPicPr>
+          <p:cNvPr id="2050" name="Picture 2">
+            <a:extLst>
+              <a:ext uri="{FF2B5EF4-FFF2-40B4-BE49-F238E27FC236}">
+                <a16:creationId xmlns:a16="http://schemas.microsoft.com/office/drawing/2014/main" id="{B17C0491-DA17-359B-17AE-E5211FC4924F}"/>
+              </a:ext>
+            </a:extLst>
+          </p:cNvPr>
+          <p:cNvPicPr>
+            <a:picLocks noChangeAspect="1" noChangeArrowheads="1"/>
+          </p:cNvPicPr>
+          <p:nvPr/>
+        </p:nvPicPr>
+        <p:blipFill>
+          <a:blip r:embed="rId2">
+            <a:extLst>
+              <a:ext uri="{28A0092B-C50C-407E-A947-70E740481C1C}">
+                <a14:useLocalDpi xmlns:a14="http://schemas.microsoft.com/office/drawing/2010/main" val="0"/>
+              </a:ext>
+            </a:extLst>
+          </a:blip>
+          <a:srcRect/>
+          <a:stretch>
+            <a:fillRect/>
+          </a:stretch>
+        </p:blipFill>
+        <p:spPr bwMode="auto">
+          <a:xfrm>
+            <a:off x="787079" y="899895"/>
+            <a:ext cx="7592992" cy="4152773"/>
+          </a:xfrm>
+          <a:prstGeom prst="rect">
+            <a:avLst/>
+          </a:prstGeom>
+          <a:noFill/>
+          <a:ln>
+            <a:noFill/>
+          </a:ln>
+          <a:extLst>
+            <a:ext uri="{909E8E84-426E-40DD-AFC4-6F175D3DCCD1}">
+              <a14:hiddenFill xmlns:a14="http://schemas.microsoft.com/office/drawing/2010/main">
+                <a:solidFill>
+                  <a:srgbClr val="FFFFFF"/>
+                </a:solidFill>
+              </a14:hiddenFill>
+            </a:ext>
+            <a:ext uri="{91240B29-F687-4F45-9708-019B960494DF}">
+              <a14:hiddenLine xmlns:a14="http://schemas.microsoft.com/office/drawing/2010/main" w="9525">
+                <a:solidFill>
+                  <a:srgbClr val="000000"/>
+                </a:solidFill>
+                <a:miter lim="800000"/>
+                <a:headEnd/>
+                <a:tailEnd/>
+              </a14:hiddenLine>
+            </a:ext>
+          </a:extLst>
+        </p:spPr>
+      </p:pic>
+    </p:spTree>
+  </p:cSld>
+  <p:clrMapOvr>
+    <a:masterClrMapping/>
+  </p:clrMapOvr>
+  <mc:AlternateContent xmlns:mc="http://schemas.openxmlformats.org/markup-compatibility/2006" xmlns:p159="http://schemas.microsoft.com/office/powerpoint/2015/09/main">
+    <mc:Choice Requires="p159">
+      <p:transition xmlns:p14="http://schemas.microsoft.com/office/powerpoint/2010/main" spd="slow" p14:dur="2000">
+        <p159:morph option="byObject"/>
+      </p:transition>
+    </mc:Choice>
+    <mc:Fallback xmlns="">
+      <p:transition spd="slow">
+        <p:fade/>
+      </p:transition>
+    </mc:Fallback>
+  </mc:AlternateContent>
+</p:sld>
+</file>
+
+<file path=ppt/slides/slide11.xml><?xml version="1.0" encoding="utf-8"?>
+<p:sld xmlns:a="http://schemas.openxmlformats.org/drawingml/2006/main" xmlns:r="http://schemas.openxmlformats.org/officeDocument/2006/relationships" xmlns:p="http://schemas.openxmlformats.org/presentationml/2006/main">
+  <p:cSld>
+    <p:spTree>
+      <p:nvGrpSpPr>
+        <p:cNvPr id="1" name=""/>
+        <p:cNvGrpSpPr/>
+        <p:nvPr/>
+      </p:nvGrpSpPr>
+      <p:grpSpPr>
+        <a:xfrm>
+          <a:off x="0" y="0"/>
+          <a:ext cx="0" cy="0"/>
+          <a:chOff x="0" y="0"/>
+          <a:chExt cx="0" cy="0"/>
+        </a:xfrm>
+      </p:grpSpPr>
+      <p:sp>
+        <p:nvSpPr>
+          <p:cNvPr id="300" name="title"/>
+          <p:cNvSpPr/>
+          <p:nvPr/>
+        </p:nvSpPr>
+        <p:spPr>
+          <a:xfrm>
+            <a:off x="457200" y="400000"/>
+            <a:ext cx="8610840" cy="480000"/>
+          </a:xfrm>
+          <a:prstGeom prst="rect">
+            <a:avLst/>
+          </a:prstGeom>
+          <a:noFill/>
+          <a:ln w="0">
+            <a:noFill/>
+          </a:ln>
+        </p:spPr>
+        <p:style>
+          <a:lnRef idx="0">
+            <a:scrgbClr r="0" g="0" b="0"/>
+          </a:lnRef>
+          <a:fillRef idx="0">
+            <a:scrgbClr r="0" g="0" b="0"/>
+          </a:fillRef>
+          <a:effectRef idx="0">
+            <a:scrgbClr r="0" g="0" b="0"/>
+          </a:effectRef>
+          <a:fontRef idx="minor"/>
+        </p:style>
+        <p:txBody>
+          <a:bodyPr anchor="ctr">
+            <a:normAutofit/>
+          </a:bodyPr>
+          <a:lstStyle/>
+          <a:p>
+            <a:pPr algn="ctr"/>
+            <a:r>
+              <a:rPr lang="vi-VN" sz="2400" b="0">
+                <a:solidFill>
+                  <a:srgbClr val="92F7FF"/>
+                </a:solidFill>
+                <a:latin typeface="Orbitron"/>
+              </a:rPr>
+              <a:t>Sơ đồ luồng Đặt giá</a:t>
+            </a:r>
+          </a:p>
+        </p:txBody>
+      </p:sp>
+      <p:sp>
+        <p:nvSpPr>
+          <p:cNvPr id="302" name="lbl_bf"/>
+          <p:cNvSpPr/>
+          <p:nvPr/>
+        </p:nvSpPr>
+        <p:spPr>
+          <a:xfrm>
+            <a:off x="-374441" y="4633069"/>
+            <a:ext cx="3800000" cy="280000"/>
+          </a:xfrm>
+          <a:prstGeom prst="rect">
+            <a:avLst/>
+          </a:prstGeom>
+          <a:noFill/>
+          <a:ln w="0">
+            <a:noFill/>
+          </a:ln>
+        </p:spPr>
+        <p:style>
+          <a:lnRef idx="0">
+            <a:scrgbClr r="0" g="0" b="0"/>
+          </a:lnRef>
+          <a:fillRef idx="0">
+            <a:scrgbClr r="0" g="0" b="0"/>
+          </a:fillRef>
+          <a:effectRef idx="0">
+            <a:scrgbClr r="0" g="0" b="0"/>
+          </a:effectRef>
+          <a:fontRef idx="minor"/>
+        </p:style>
+        <p:txBody>
+          <a:bodyPr anchor="ctr">
+            <a:normAutofit/>
+          </a:bodyPr>
+          <a:lstStyle/>
+          <a:p>
+            <a:pPr algn="ctr"/>
+            <a:r>
+              <a:rPr lang="en-US" sz="1100" b="1">
+                <a:solidFill>
+                  <a:srgbClr val="92F7FF"/>
+                </a:solidFill>
+                <a:latin typeface="Archivo Light"/>
+              </a:rPr>
+              <a:t>S</a:t>
+            </a:r>
+            <a:r>
+              <a:rPr lang="vi-VN" sz="1100" b="1">
+                <a:solidFill>
+                  <a:srgbClr val="92F7FF"/>
+                </a:solidFill>
+                <a:latin typeface="Archivo Light"/>
+              </a:rPr>
+              <a:t>ơ đồ hoạt động</a:t>
+            </a:r>
+          </a:p>
+        </p:txBody>
+      </p:sp>
+      <p:sp>
+        <p:nvSpPr>
+          <p:cNvPr id="304" name="lbl_bs"/>
+          <p:cNvSpPr/>
+          <p:nvPr/>
+        </p:nvSpPr>
+        <p:spPr>
+          <a:xfrm>
+            <a:off x="3596124" y="4655000"/>
+            <a:ext cx="4600000" cy="280000"/>
+          </a:xfrm>
+          <a:prstGeom prst="rect">
+            <a:avLst/>
+          </a:prstGeom>
+          <a:noFill/>
+          <a:ln w="0">
+            <a:noFill/>
+          </a:ln>
+        </p:spPr>
+        <p:style>
+          <a:lnRef idx="0">
+            <a:scrgbClr r="0" g="0" b="0"/>
+          </a:lnRef>
+          <a:fillRef idx="0">
+            <a:scrgbClr r="0" g="0" b="0"/>
+          </a:fillRef>
+          <a:effectRef idx="0">
+            <a:scrgbClr r="0" g="0" b="0"/>
+          </a:effectRef>
+          <a:fontRef idx="minor"/>
+        </p:style>
+        <p:txBody>
+          <a:bodyPr anchor="ctr">
+            <a:normAutofit/>
+          </a:bodyPr>
+          <a:lstStyle/>
+          <a:p>
+            <a:pPr algn="ctr"/>
+            <a:r>
+              <a:rPr lang="vi-VN" sz="1100" b="1">
+                <a:solidFill>
+                  <a:srgbClr val="92F7FF"/>
+                </a:solidFill>
+                <a:latin typeface="Archivo Light"/>
+              </a:rPr>
+              <a:t>Sơ đồ tuần tự</a:t>
+            </a:r>
+          </a:p>
+        </p:txBody>
+      </p:sp>
+      <p:pic>
+        <p:nvPicPr>
+          <p:cNvPr id="3074" name="Picture 2">
+            <a:extLst>
+              <a:ext uri="{FF2B5EF4-FFF2-40B4-BE49-F238E27FC236}">
+                <a16:creationId xmlns:a16="http://schemas.microsoft.com/office/drawing/2014/main" id="{EEC18215-F2D9-7316-BDA9-09EC109F4C01}"/>
+              </a:ext>
+            </a:extLst>
+          </p:cNvPr>
+          <p:cNvPicPr>
+            <a:picLocks noChangeAspect="1" noChangeArrowheads="1"/>
+          </p:cNvPicPr>
+          <p:nvPr/>
+        </p:nvPicPr>
+        <p:blipFill>
+          <a:blip r:embed="rId3">
+            <a:extLst>
+              <a:ext uri="{28A0092B-C50C-407E-A947-70E740481C1C}">
+                <a14:useLocalDpi xmlns:a14="http://schemas.microsoft.com/office/drawing/2010/main" val="0"/>
+              </a:ext>
+            </a:extLst>
+          </a:blip>
+          <a:srcRect/>
+          <a:stretch>
+            <a:fillRect/>
+          </a:stretch>
+        </p:blipFill>
+        <p:spPr bwMode="auto">
+          <a:xfrm>
+            <a:off x="585710" y="853199"/>
+            <a:ext cx="1879698" cy="3776801"/>
+          </a:xfrm>
+          <a:prstGeom prst="rect">
+            <a:avLst/>
+          </a:prstGeom>
+          <a:noFill/>
+          <a:ln>
+            <a:noFill/>
+          </a:ln>
+          <a:extLst>
+            <a:ext uri="{909E8E84-426E-40DD-AFC4-6F175D3DCCD1}">
+              <a14:hiddenFill xmlns:a14="http://schemas.microsoft.com/office/drawing/2010/main">
+                <a:solidFill>
+                  <a:srgbClr val="FFFFFF"/>
+                </a:solidFill>
+              </a14:hiddenFill>
+            </a:ext>
+            <a:ext uri="{91240B29-F687-4F45-9708-019B960494DF}">
+              <a14:hiddenLine xmlns:a14="http://schemas.microsoft.com/office/drawing/2010/main" w="9525">
+                <a:solidFill>
+                  <a:srgbClr val="000000"/>
+                </a:solidFill>
+                <a:miter lim="800000"/>
+                <a:headEnd/>
+                <a:tailEnd/>
+              </a14:hiddenLine>
+            </a:ext>
+          </a:extLst>
+        </p:spPr>
+      </p:pic>
+      <p:pic>
+        <p:nvPicPr>
+          <p:cNvPr id="3075" name="Picture 3">
+            <a:extLst>
+              <a:ext uri="{FF2B5EF4-FFF2-40B4-BE49-F238E27FC236}">
+                <a16:creationId xmlns:a16="http://schemas.microsoft.com/office/drawing/2014/main" id="{F1DCCE3F-74D2-F220-C39D-E64F4CFE7970}"/>
+              </a:ext>
+            </a:extLst>
+          </p:cNvPr>
+          <p:cNvPicPr>
+            <a:picLocks noChangeAspect="1" noChangeArrowheads="1"/>
+          </p:cNvPicPr>
+          <p:nvPr/>
+        </p:nvPicPr>
+        <p:blipFill>
+          <a:blip r:embed="rId4">
+            <a:extLst>
+              <a:ext uri="{28A0092B-C50C-407E-A947-70E740481C1C}">
+                <a14:useLocalDpi xmlns:a14="http://schemas.microsoft.com/office/drawing/2010/main" val="0"/>
+              </a:ext>
+            </a:extLst>
+          </a:blip>
+          <a:srcRect/>
+          <a:stretch>
+            <a:fillRect/>
+          </a:stretch>
+        </p:blipFill>
+        <p:spPr bwMode="auto">
+          <a:xfrm>
+            <a:off x="3177200" y="1489417"/>
+            <a:ext cx="5437848" cy="3165583"/>
+          </a:xfrm>
+          <a:prstGeom prst="rect">
+            <a:avLst/>
+          </a:prstGeom>
+          <a:noFill/>
+          <a:ln>
+            <a:noFill/>
+          </a:ln>
+          <a:extLst>
+            <a:ext uri="{909E8E84-426E-40DD-AFC4-6F175D3DCCD1}">
+              <a14:hiddenFill xmlns:a14="http://schemas.microsoft.com/office/drawing/2010/main">
+                <a:solidFill>
+                  <a:srgbClr val="FFFFFF"/>
+                </a:solidFill>
+              </a14:hiddenFill>
+            </a:ext>
+            <a:ext uri="{91240B29-F687-4F45-9708-019B960494DF}">
+              <a14:hiddenLine xmlns:a14="http://schemas.microsoft.com/office/drawing/2010/main" w="9525">
+                <a:solidFill>
+                  <a:srgbClr val="000000"/>
+                </a:solidFill>
+                <a:miter lim="800000"/>
+                <a:headEnd/>
+                <a:tailEnd/>
+              </a14:hiddenLine>
+            </a:ext>
+          </a:extLst>
+        </p:spPr>
+      </p:pic>
+    </p:spTree>
+  </p:cSld>
+  <p:clrMapOvr>
+    <a:masterClrMapping/>
+  </p:clrMapOvr>
+  <mc:AlternateContent xmlns:mc="http://schemas.openxmlformats.org/markup-compatibility/2006" xmlns:p159="http://schemas.microsoft.com/office/powerpoint/2015/09/main">
+    <mc:Choice Requires="p159">
+      <p:transition xmlns:p14="http://schemas.microsoft.com/office/powerpoint/2010/main" spd="slow" p14:dur="2000">
+        <p159:morph option="byObject"/>
+      </p:transition>
+    </mc:Choice>
+    <mc:Fallback xmlns="">
+      <p:transition spd="slow">
+        <p:fade/>
+      </p:transition>
+    </mc:Fallback>
+  </mc:AlternateContent>
+</p:sld>
+</file>
+
+<file path=ppt/slides/slide12.xml><?xml version="1.0" encoding="utf-8"?>
+<p:sld xmlns:a="http://schemas.openxmlformats.org/drawingml/2006/main" xmlns:r="http://schemas.openxmlformats.org/officeDocument/2006/relationships" xmlns:p="http://schemas.openxmlformats.org/presentationml/2006/main">
+  <p:cSld>
+    <p:spTree>
+      <p:nvGrpSpPr>
+        <p:cNvPr id="1" name=""/>
+        <p:cNvGrpSpPr/>
+        <p:nvPr/>
+      </p:nvGrpSpPr>
+      <p:grpSpPr>
+        <a:xfrm>
+          <a:off x="0" y="0"/>
+          <a:ext cx="0" cy="0"/>
+          <a:chOff x="0" y="0"/>
+          <a:chExt cx="0" cy="0"/>
+        </a:xfrm>
+      </p:grpSpPr>
+      <p:sp>
+        <p:nvSpPr>
+          <p:cNvPr id="300" name="title"/>
+          <p:cNvSpPr/>
+          <p:nvPr/>
+        </p:nvSpPr>
+        <p:spPr>
+          <a:xfrm>
+            <a:off x="457200" y="400000"/>
+            <a:ext cx="8610840" cy="480000"/>
+          </a:xfrm>
+          <a:prstGeom prst="rect">
+            <a:avLst/>
+          </a:prstGeom>
+          <a:noFill/>
+          <a:ln w="0">
+            <a:noFill/>
+          </a:ln>
+        </p:spPr>
+        <p:style>
+          <a:lnRef idx="0">
+            <a:scrgbClr r="0" g="0" b="0"/>
+          </a:lnRef>
+          <a:fillRef idx="0">
+            <a:scrgbClr r="0" g="0" b="0"/>
+          </a:fillRef>
+          <a:effectRef idx="0">
+            <a:scrgbClr r="0" g="0" b="0"/>
+          </a:effectRef>
+          <a:fontRef idx="minor"/>
+        </p:style>
+        <p:txBody>
+          <a:bodyPr anchor="ctr">
+            <a:normAutofit/>
+          </a:bodyPr>
+          <a:lstStyle/>
+          <a:p>
+            <a:pPr algn="ctr"/>
+            <a:r>
+              <a:rPr lang="vi-VN" sz="2400" b="0">
+                <a:solidFill>
+                  <a:srgbClr val="92F7FF"/>
+                </a:solidFill>
+                <a:latin typeface="Orbitron"/>
+              </a:rPr>
+              <a:t>Sơ đồ luồng Mua ngay</a:t>
+            </a:r>
+          </a:p>
+        </p:txBody>
+      </p:sp>
+      <p:sp>
+        <p:nvSpPr>
+          <p:cNvPr id="302" name="lbl_bf"/>
+          <p:cNvSpPr/>
+          <p:nvPr/>
+        </p:nvSpPr>
+        <p:spPr>
+          <a:xfrm>
+            <a:off x="6974" y="4687170"/>
+            <a:ext cx="3800000" cy="280000"/>
+          </a:xfrm>
+          <a:prstGeom prst="rect">
+            <a:avLst/>
+          </a:prstGeom>
+          <a:noFill/>
+          <a:ln w="0">
+            <a:noFill/>
+          </a:ln>
+        </p:spPr>
+        <p:style>
+          <a:lnRef idx="0">
+            <a:scrgbClr r="0" g="0" b="0"/>
+          </a:lnRef>
+          <a:fillRef idx="0">
+            <a:scrgbClr r="0" g="0" b="0"/>
+          </a:fillRef>
+          <a:effectRef idx="0">
+            <a:scrgbClr r="0" g="0" b="0"/>
+          </a:effectRef>
+          <a:fontRef idx="minor"/>
+        </p:style>
+        <p:txBody>
+          <a:bodyPr anchor="ctr">
+            <a:normAutofit/>
+          </a:bodyPr>
+          <a:lstStyle/>
+          <a:p>
+            <a:pPr algn="ctr"/>
+            <a:r>
+              <a:rPr lang="vi-VN" sz="1100" b="1">
+                <a:solidFill>
+                  <a:srgbClr val="92F7FF"/>
+                </a:solidFill>
+                <a:latin typeface="Archivo Light"/>
+              </a:rPr>
+              <a:t>Sơ đồ hoạt động</a:t>
+            </a:r>
+          </a:p>
+        </p:txBody>
+      </p:sp>
+      <p:sp>
+        <p:nvSpPr>
+          <p:cNvPr id="304" name="lbl_bs"/>
+          <p:cNvSpPr/>
+          <p:nvPr/>
+        </p:nvSpPr>
+        <p:spPr>
+          <a:xfrm>
+            <a:off x="3936323" y="4687170"/>
+            <a:ext cx="4600000" cy="280000"/>
+          </a:xfrm>
+          <a:prstGeom prst="rect">
+            <a:avLst/>
+          </a:prstGeom>
+          <a:noFill/>
+          <a:ln w="0">
+            <a:noFill/>
+          </a:ln>
+        </p:spPr>
+        <p:style>
+          <a:lnRef idx="0">
+            <a:scrgbClr r="0" g="0" b="0"/>
+          </a:lnRef>
+          <a:fillRef idx="0">
+            <a:scrgbClr r="0" g="0" b="0"/>
+          </a:fillRef>
+          <a:effectRef idx="0">
+            <a:scrgbClr r="0" g="0" b="0"/>
+          </a:effectRef>
+          <a:fontRef idx="minor"/>
+        </p:style>
+        <p:txBody>
+          <a:bodyPr anchor="ctr">
+            <a:normAutofit/>
+          </a:bodyPr>
+          <a:lstStyle/>
+          <a:p>
+            <a:pPr algn="ctr"/>
+            <a:r>
+              <a:rPr lang="vi-VN" sz="1100" b="1">
+                <a:solidFill>
+                  <a:srgbClr val="92F7FF"/>
+                </a:solidFill>
+                <a:latin typeface="Archivo Light"/>
+              </a:rPr>
+              <a:t>Sơ đồ tuần tự</a:t>
+            </a:r>
+          </a:p>
+        </p:txBody>
+      </p:sp>
+      <p:pic>
+        <p:nvPicPr>
+          <p:cNvPr id="4098" name="Picture 2">
+            <a:extLst>
+              <a:ext uri="{FF2B5EF4-FFF2-40B4-BE49-F238E27FC236}">
+                <a16:creationId xmlns:a16="http://schemas.microsoft.com/office/drawing/2014/main" id="{A849432A-B6F1-51F8-D373-592602C07893}"/>
+              </a:ext>
+            </a:extLst>
+          </p:cNvPr>
+          <p:cNvPicPr>
+            <a:picLocks noChangeAspect="1" noChangeArrowheads="1"/>
+          </p:cNvPicPr>
+          <p:nvPr/>
+        </p:nvPicPr>
+        <p:blipFill>
+          <a:blip r:embed="rId3">
+            <a:extLst>
+              <a:ext uri="{28A0092B-C50C-407E-A947-70E740481C1C}">
+                <a14:useLocalDpi xmlns:a14="http://schemas.microsoft.com/office/drawing/2010/main" val="0"/>
+              </a:ext>
+            </a:extLst>
+          </a:blip>
+          <a:srcRect/>
+          <a:stretch>
+            <a:fillRect/>
+          </a:stretch>
+        </p:blipFill>
+        <p:spPr bwMode="auto">
+          <a:xfrm>
+            <a:off x="359764" y="1004734"/>
+            <a:ext cx="3094420" cy="3633687"/>
+          </a:xfrm>
+          <a:prstGeom prst="rect">
+            <a:avLst/>
+          </a:prstGeom>
+          <a:noFill/>
+          <a:ln>
+            <a:noFill/>
+          </a:ln>
+          <a:extLst>
+            <a:ext uri="{909E8E84-426E-40DD-AFC4-6F175D3DCCD1}">
+              <a14:hiddenFill xmlns:a14="http://schemas.microsoft.com/office/drawing/2010/main">
+                <a:solidFill>
+                  <a:srgbClr val="FFFFFF"/>
+                </a:solidFill>
+              </a14:hiddenFill>
+            </a:ext>
+            <a:ext uri="{91240B29-F687-4F45-9708-019B960494DF}">
+              <a14:hiddenLine xmlns:a14="http://schemas.microsoft.com/office/drawing/2010/main" w="9525">
+                <a:solidFill>
+                  <a:srgbClr val="000000"/>
+                </a:solidFill>
+                <a:miter lim="800000"/>
+                <a:headEnd/>
+                <a:tailEnd/>
+              </a14:hiddenLine>
+            </a:ext>
+          </a:extLst>
+        </p:spPr>
+      </p:pic>
+      <p:pic>
+        <p:nvPicPr>
+          <p:cNvPr id="4101" name="Picture 5">
+            <a:extLst>
+              <a:ext uri="{FF2B5EF4-FFF2-40B4-BE49-F238E27FC236}">
+                <a16:creationId xmlns:a16="http://schemas.microsoft.com/office/drawing/2014/main" id="{28E08795-69BF-D349-8A79-B569C9A3624F}"/>
+              </a:ext>
+            </a:extLst>
+          </p:cNvPr>
+          <p:cNvPicPr>
+            <a:picLocks noChangeAspect="1" noChangeArrowheads="1"/>
+          </p:cNvPicPr>
+          <p:nvPr/>
+        </p:nvPicPr>
+        <p:blipFill>
+          <a:blip r:embed="rId4">
+            <a:extLst>
+              <a:ext uri="{28A0092B-C50C-407E-A947-70E740481C1C}">
+                <a14:useLocalDpi xmlns:a14="http://schemas.microsoft.com/office/drawing/2010/main" val="0"/>
+              </a:ext>
+            </a:extLst>
+          </a:blip>
+          <a:srcRect b="4588"/>
+          <a:stretch>
+            <a:fillRect/>
+          </a:stretch>
+        </p:blipFill>
+        <p:spPr bwMode="auto">
+          <a:xfrm>
+            <a:off x="3688410" y="963156"/>
+            <a:ext cx="5095826" cy="3675265"/>
+          </a:xfrm>
+          <a:prstGeom prst="rect">
+            <a:avLst/>
+          </a:prstGeom>
+          <a:noFill/>
+          <a:ln>
+            <a:noFill/>
+          </a:ln>
+          <a:extLst>
+            <a:ext uri="{909E8E84-426E-40DD-AFC4-6F175D3DCCD1}">
+              <a14:hiddenFill xmlns:a14="http://schemas.microsoft.com/office/drawing/2010/main">
+                <a:solidFill>
+                  <a:srgbClr val="FFFFFF"/>
+                </a:solidFill>
+              </a14:hiddenFill>
+            </a:ext>
+            <a:ext uri="{91240B29-F687-4F45-9708-019B960494DF}">
+              <a14:hiddenLine xmlns:a14="http://schemas.microsoft.com/office/drawing/2010/main" w="9525">
+                <a:solidFill>
+                  <a:srgbClr val="000000"/>
+                </a:solidFill>
+                <a:miter lim="800000"/>
+                <a:headEnd/>
+                <a:tailEnd/>
+              </a14:hiddenLine>
+            </a:ext>
+          </a:extLst>
+        </p:spPr>
+      </p:pic>
+    </p:spTree>
+  </p:cSld>
+  <p:clrMapOvr>
+    <a:masterClrMapping/>
+  </p:clrMapOvr>
+  <mc:AlternateContent xmlns:mc="http://schemas.openxmlformats.org/markup-compatibility/2006" xmlns:p159="http://schemas.microsoft.com/office/powerpoint/2015/09/main">
+    <mc:Choice Requires="p159">
+      <p:transition xmlns:p14="http://schemas.microsoft.com/office/powerpoint/2010/main" spd="slow" p14:dur="2000">
+        <p159:morph option="byObject"/>
+      </p:transition>
+    </mc:Choice>
+    <mc:Fallback xmlns="">
+      <p:transition spd="slow">
+        <p:fade/>
+      </p:transition>
+    </mc:Fallback>
+  </mc:AlternateContent>
+</p:sld>
+</file>
+
+<file path=ppt/slides/slide13.xml><?xml version="1.0" encoding="utf-8"?>
+<p:sld xmlns:a="http://schemas.openxmlformats.org/drawingml/2006/main" xmlns:r="http://schemas.openxmlformats.org/officeDocument/2006/relationships" xmlns:p="http://schemas.openxmlformats.org/presentationml/2006/main">
+  <p:cSld>
+    <p:spTree>
+      <p:nvGrpSpPr>
+        <p:cNvPr id="1" name="">
+          <a:extLst>
+            <a:ext uri="{FF2B5EF4-FFF2-40B4-BE49-F238E27FC236}">
+              <a16:creationId xmlns:a16="http://schemas.microsoft.com/office/drawing/2014/main" id="{3280A065-27A7-8362-C54A-4F1E59DFF852}"/>
+            </a:ext>
+          </a:extLst>
+        </p:cNvPr>
+        <p:cNvGrpSpPr/>
+        <p:nvPr/>
+      </p:nvGrpSpPr>
+      <p:grpSpPr>
+        <a:xfrm>
+          <a:off x="0" y="0"/>
+          <a:ext cx="0" cy="0"/>
+          <a:chOff x="0" y="0"/>
+          <a:chExt cx="0" cy="0"/>
+        </a:xfrm>
+      </p:grpSpPr>
+      <p:sp>
+        <p:nvSpPr>
+          <p:cNvPr id="171" name="Rectangle 170">
+            <a:extLst>
+              <a:ext uri="{FF2B5EF4-FFF2-40B4-BE49-F238E27FC236}">
+                <a16:creationId xmlns:a16="http://schemas.microsoft.com/office/drawing/2014/main" id="{748A74AA-09EE-4FB4-F351-C6A08B4A6372}"/>
+              </a:ext>
+            </a:extLst>
+          </p:cNvPr>
+          <p:cNvSpPr/>
+          <p:nvPr/>
+        </p:nvSpPr>
+        <p:spPr>
+          <a:xfrm>
+            <a:off x="693636" y="626694"/>
+            <a:ext cx="2285640" cy="914040"/>
+          </a:xfrm>
+          <a:prstGeom prst="rect">
+            <a:avLst/>
+          </a:prstGeom>
+          <a:noFill/>
+          <a:ln w="0">
+            <a:noFill/>
+          </a:ln>
+        </p:spPr>
+        <p:style>
+          <a:lnRef idx="0">
+            <a:scrgbClr r="0" g="0" b="0"/>
+          </a:lnRef>
+          <a:fillRef idx="0">
+            <a:scrgbClr r="0" g="0" b="0"/>
+          </a:fillRef>
+          <a:effectRef idx="0">
+            <a:scrgbClr r="0" g="0" b="0"/>
+          </a:effectRef>
+          <a:fontRef idx="minor"/>
+        </p:style>
+        <p:txBody>
+          <a:bodyPr anchor="t">
+            <a:normAutofit/>
+          </a:bodyPr>
+          <a:lstStyle/>
+          <a:p>
+            <a:pPr defTabSz="914400">
+              <a:lnSpc>
+                <a:spcPct val="100000"/>
+              </a:lnSpc>
+              <a:tabLst>
+                <a:tab pos="0" algn="l"/>
+              </a:tabLst>
+            </a:pPr>
+            <a:r>
+              <a:rPr lang="en-US" sz="5000" b="0" u="none" strike="noStrike">
+                <a:solidFill>
+                  <a:srgbClr val="92F7FF"/>
+                </a:solidFill>
+                <a:effectLst/>
+                <a:uFillTx/>
+                <a:latin typeface="Orbitron"/>
+              </a:rPr>
+              <a:t>03</a:t>
+            </a:r>
+            <a:endParaRPr lang="en-US" sz="5000" b="0" u="none" strike="noStrike">
+              <a:solidFill>
+                <a:srgbClr val="FFFFFF"/>
+              </a:solidFill>
+              <a:effectLst/>
+              <a:uFillTx/>
+              <a:latin typeface="OpenSymbol"/>
+            </a:endParaRPr>
+          </a:p>
+        </p:txBody>
+      </p:sp>
+      <p:sp>
+        <p:nvSpPr>
+          <p:cNvPr id="172" name="Rectangle 171">
+            <a:extLst>
+              <a:ext uri="{FF2B5EF4-FFF2-40B4-BE49-F238E27FC236}">
+                <a16:creationId xmlns:a16="http://schemas.microsoft.com/office/drawing/2014/main" id="{60DAFDA4-3401-697E-E2D0-2926E0D0DAC4}"/>
+              </a:ext>
+            </a:extLst>
+          </p:cNvPr>
+          <p:cNvSpPr/>
+          <p:nvPr/>
+        </p:nvSpPr>
+        <p:spPr>
+          <a:xfrm>
+            <a:off x="693636" y="1540734"/>
+            <a:ext cx="8075610" cy="914039"/>
+          </a:xfrm>
+          <a:prstGeom prst="rect">
+            <a:avLst/>
+          </a:prstGeom>
+          <a:noFill/>
+          <a:ln w="0">
+            <a:noFill/>
+          </a:ln>
+        </p:spPr>
+        <p:style>
+          <a:lnRef idx="0">
+            <a:scrgbClr r="0" g="0" b="0"/>
+          </a:lnRef>
+          <a:fillRef idx="0">
+            <a:scrgbClr r="0" g="0" b="0"/>
+          </a:fillRef>
+          <a:effectRef idx="0">
+            <a:scrgbClr r="0" g="0" b="0"/>
+          </a:effectRef>
+          <a:fontRef idx="minor"/>
+        </p:style>
+        <p:txBody>
+          <a:bodyPr anchor="t">
+            <a:noAutofit/>
+          </a:bodyPr>
+          <a:lstStyle/>
+          <a:p>
+            <a:pPr>
+              <a:tabLst>
+                <a:tab pos="0" algn="l"/>
+              </a:tabLst>
+            </a:pPr>
+            <a:r>
+              <a:rPr lang="en-US" sz="4000">
+                <a:solidFill>
+                  <a:srgbClr val="92F7FF"/>
+                </a:solidFill>
+                <a:latin typeface="Orbitron"/>
+              </a:rPr>
+              <a:t>Kết quả đạt được &amp; Hướng phát triển</a:t>
+            </a:r>
+            <a:endParaRPr lang="en-US" sz="4000" b="0" u="none" strike="noStrike">
+              <a:solidFill>
+                <a:srgbClr val="FFFFFF"/>
+              </a:solidFill>
+              <a:effectLst/>
+              <a:uFillTx/>
+              <a:latin typeface="OpenSymbol"/>
+            </a:endParaRPr>
+          </a:p>
+        </p:txBody>
+      </p:sp>
+      <p:sp>
+        <p:nvSpPr>
+          <p:cNvPr id="173" name="Rectangle 172">
+            <a:extLst>
+              <a:ext uri="{FF2B5EF4-FFF2-40B4-BE49-F238E27FC236}">
+                <a16:creationId xmlns:a16="http://schemas.microsoft.com/office/drawing/2014/main" id="{1C5B15A1-48CE-ACBC-3A1C-2892BBA53EB0}"/>
+              </a:ext>
+            </a:extLst>
+          </p:cNvPr>
+          <p:cNvSpPr/>
+          <p:nvPr/>
+        </p:nvSpPr>
+        <p:spPr>
+          <a:xfrm>
+            <a:off x="5048280" y="3333600"/>
+            <a:ext cx="3476160" cy="456840"/>
+          </a:xfrm>
+          <a:prstGeom prst="rect">
+            <a:avLst/>
+          </a:prstGeom>
+          <a:noFill/>
+          <a:ln w="0">
+            <a:noFill/>
+          </a:ln>
+        </p:spPr>
+        <p:style>
+          <a:lnRef idx="0">
+            <a:scrgbClr r="0" g="0" b="0"/>
+          </a:lnRef>
+          <a:fillRef idx="0">
+            <a:scrgbClr r="0" g="0" b="0"/>
+          </a:fillRef>
+          <a:effectRef idx="0">
+            <a:scrgbClr r="0" g="0" b="0"/>
+          </a:effectRef>
+          <a:fontRef idx="minor"/>
+        </p:style>
+        <p:txBody>
+          <a:bodyPr anchor="t">
+            <a:normAutofit lnSpcReduction="10000"/>
+          </a:bodyPr>
+          <a:lstStyle/>
+          <a:p>
+            <a:pPr defTabSz="914400">
+              <a:lnSpc>
+                <a:spcPct val="150000"/>
+              </a:lnSpc>
+              <a:tabLst>
+                <a:tab pos="0" algn="l"/>
+              </a:tabLst>
+            </a:pPr>
+            <a:endParaRPr lang="en-US" sz="1800" b="0" u="none" strike="noStrike">
+              <a:solidFill>
+                <a:srgbClr val="FFFFFF"/>
+              </a:solidFill>
+              <a:effectLst/>
+              <a:uFillTx/>
+              <a:latin typeface="OpenSymbol"/>
+            </a:endParaRPr>
+          </a:p>
+        </p:txBody>
+      </p:sp>
+    </p:spTree>
+    <p:extLst>
+      <p:ext uri="{BB962C8B-B14F-4D97-AF65-F5344CB8AC3E}">
+        <p14:creationId xmlns:p14="http://schemas.microsoft.com/office/powerpoint/2010/main" val="439665798"/>
+      </p:ext>
+    </p:extLst>
+  </p:cSld>
+  <p:clrMapOvr>
+    <a:masterClrMapping/>
+  </p:clrMapOvr>
+  <mc:AlternateContent xmlns:mc="http://schemas.openxmlformats.org/markup-compatibility/2006" xmlns:p159="http://schemas.microsoft.com/office/powerpoint/2015/09/main">
+    <mc:Choice Requires="p159">
+      <p:transition xmlns:p14="http://schemas.microsoft.com/office/powerpoint/2010/main" spd="slow" p14:dur="2000">
+        <p159:morph option="byObject"/>
+      </p:transition>
+    </mc:Choice>
+    <mc:Fallback xmlns="">
+      <p:transition spd="slow">
+        <p:fade/>
+      </p:transition>
+    </mc:Fallback>
+  </mc:AlternateContent>
+</p:sld>
+</file>
+
+<file path=ppt/slides/slide14.xml><?xml version="1.0" encoding="utf-8"?>
+<p:sld xmlns:a="http://schemas.openxmlformats.org/drawingml/2006/main" xmlns:r="http://schemas.openxmlformats.org/officeDocument/2006/relationships" xmlns:p="http://schemas.openxmlformats.org/presentationml/2006/main">
+  <p:cSld>
+    <p:spTree>
+      <p:nvGrpSpPr>
+        <p:cNvPr id="1" name="">
+          <a:extLst>
+            <a:ext uri="{FF2B5EF4-FFF2-40B4-BE49-F238E27FC236}">
+              <a16:creationId xmlns:a16="http://schemas.microsoft.com/office/drawing/2014/main" id="{ADEF5364-C60B-E82B-4977-B2A2FBF7A9D2}"/>
+            </a:ext>
+          </a:extLst>
+        </p:cNvPr>
+        <p:cNvGrpSpPr/>
+        <p:nvPr/>
+      </p:nvGrpSpPr>
+      <p:grpSpPr>
+        <a:xfrm>
+          <a:off x="0" y="0"/>
+          <a:ext cx="0" cy="0"/>
+          <a:chOff x="0" y="0"/>
+          <a:chExt cx="0" cy="0"/>
+        </a:xfrm>
+      </p:grpSpPr>
+      <p:sp>
+        <p:nvSpPr>
+          <p:cNvPr id="179" name="Rectangle 178">
+            <a:extLst>
+              <a:ext uri="{FF2B5EF4-FFF2-40B4-BE49-F238E27FC236}">
+                <a16:creationId xmlns:a16="http://schemas.microsoft.com/office/drawing/2014/main" id="{2EE4D166-96E6-D71E-40F6-62E26C0530F8}"/>
+              </a:ext>
+            </a:extLst>
+          </p:cNvPr>
+          <p:cNvSpPr/>
+          <p:nvPr/>
+        </p:nvSpPr>
+        <p:spPr>
+          <a:xfrm>
+            <a:off x="619200" y="619200"/>
+            <a:ext cx="7905240" cy="732960"/>
+          </a:xfrm>
+          <a:prstGeom prst="rect">
+            <a:avLst/>
+          </a:prstGeom>
+          <a:noFill/>
+          <a:ln w="0">
+            <a:noFill/>
+          </a:ln>
+        </p:spPr>
+        <p:style>
+          <a:lnRef idx="0">
+            <a:scrgbClr r="0" g="0" b="0"/>
+          </a:lnRef>
+          <a:fillRef idx="0">
+            <a:scrgbClr r="0" g="0" b="0"/>
+          </a:fillRef>
+          <a:effectRef idx="0">
+            <a:scrgbClr r="0" g="0" b="0"/>
+          </a:effectRef>
+          <a:fontRef idx="minor"/>
+        </p:style>
+        <p:txBody>
+          <a:bodyPr anchor="t">
+            <a:normAutofit/>
+          </a:bodyPr>
+          <a:lstStyle/>
+          <a:p>
+            <a:pPr defTabSz="914400">
+              <a:lnSpc>
+                <a:spcPct val="100000"/>
+              </a:lnSpc>
+              <a:tabLst>
+                <a:tab pos="0" algn="l"/>
+              </a:tabLst>
+            </a:pPr>
+            <a:r>
+              <a:rPr lang="en-US" sz="2400" b="0" u="none" strike="noStrike">
+                <a:solidFill>
+                  <a:srgbClr val="92F7FF"/>
+                </a:solidFill>
+                <a:effectLst/>
+                <a:uFillTx/>
+                <a:latin typeface="Orbitron"/>
+              </a:rPr>
+              <a:t>Kết quả </a:t>
+            </a:r>
+            <a:r>
+              <a:rPr lang="en-US" sz="2400">
+                <a:solidFill>
+                  <a:srgbClr val="92F7FF"/>
+                </a:solidFill>
+                <a:latin typeface="Orbitron"/>
+              </a:rPr>
+              <a:t>đạt được</a:t>
+            </a:r>
+            <a:endParaRPr lang="en-US" sz="2400" b="0" u="none" strike="noStrike">
+              <a:solidFill>
+                <a:srgbClr val="FFFFFF"/>
+              </a:solidFill>
+              <a:effectLst/>
+              <a:uFillTx/>
+              <a:latin typeface="OpenSymbol"/>
+            </a:endParaRPr>
+          </a:p>
+        </p:txBody>
+      </p:sp>
+      <p:sp>
+        <p:nvSpPr>
+          <p:cNvPr id="2" name="content_box">
+            <a:extLst>
+              <a:ext uri="{FF2B5EF4-FFF2-40B4-BE49-F238E27FC236}">
+                <a16:creationId xmlns:a16="http://schemas.microsoft.com/office/drawing/2014/main" id="{E68EEF83-F9A4-2969-593A-ED1E04B26B59}"/>
+              </a:ext>
+            </a:extLst>
+          </p:cNvPr>
+          <p:cNvSpPr/>
+          <p:nvPr/>
+        </p:nvSpPr>
+        <p:spPr>
+          <a:xfrm>
+            <a:off x="262105" y="1953525"/>
+            <a:ext cx="7615226" cy="2938034"/>
+          </a:xfrm>
+          <a:prstGeom prst="rect">
+            <a:avLst/>
+          </a:prstGeom>
+          <a:noFill/>
+          <a:ln w="0">
+            <a:noFill/>
+          </a:ln>
+        </p:spPr>
+        <p:style>
+          <a:lnRef idx="0">
+            <a:scrgbClr r="0" g="0" b="0"/>
+          </a:lnRef>
+          <a:fillRef idx="0">
+            <a:scrgbClr r="0" g="0" b="0"/>
+          </a:fillRef>
+          <a:effectRef idx="0">
+            <a:scrgbClr r="0" g="0" b="0"/>
+          </a:effectRef>
+          <a:fontRef idx="minor"/>
+        </p:style>
+        <p:txBody>
+          <a:bodyPr anchor="t">
+            <a:normAutofit/>
+          </a:bodyPr>
+          <a:lstStyle>
+            <a:defPPr>
+              <a:defRPr lang="vi-VN"/>
+            </a:defPPr>
+            <a:lvl1pPr marL="0" algn="l" defTabSz="914400" rtl="0" eaLnBrk="1" latinLnBrk="0" hangingPunct="1">
+              <a:defRPr sz="1800" kern="1200">
+                <a:solidFill>
+                  <a:schemeClr val="tx1"/>
+                </a:solidFill>
+                <a:latin typeface="+mn-lt"/>
+                <a:ea typeface="+mn-ea"/>
+                <a:cs typeface="+mn-cs"/>
+              </a:defRPr>
+            </a:lvl1pPr>
+            <a:lvl2pPr marL="457200" algn="l" defTabSz="914400" rtl="0" eaLnBrk="1" latinLnBrk="0" hangingPunct="1">
+              <a:defRPr sz="1800" kern="1200">
+                <a:solidFill>
+                  <a:schemeClr val="tx1"/>
+                </a:solidFill>
+                <a:latin typeface="+mn-lt"/>
+                <a:ea typeface="+mn-ea"/>
+                <a:cs typeface="+mn-cs"/>
+              </a:defRPr>
+            </a:lvl2pPr>
+            <a:lvl3pPr marL="914400" algn="l" defTabSz="914400" rtl="0" eaLnBrk="1" latinLnBrk="0" hangingPunct="1">
+              <a:defRPr sz="1800" kern="1200">
+                <a:solidFill>
+                  <a:schemeClr val="tx1"/>
+                </a:solidFill>
+                <a:latin typeface="+mn-lt"/>
+                <a:ea typeface="+mn-ea"/>
+                <a:cs typeface="+mn-cs"/>
+              </a:defRPr>
+            </a:lvl3pPr>
+            <a:lvl4pPr marL="1371600" algn="l" defTabSz="914400" rtl="0" eaLnBrk="1" latinLnBrk="0" hangingPunct="1">
+              <a:defRPr sz="1800" kern="1200">
+                <a:solidFill>
+                  <a:schemeClr val="tx1"/>
+                </a:solidFill>
+                <a:latin typeface="+mn-lt"/>
+                <a:ea typeface="+mn-ea"/>
+                <a:cs typeface="+mn-cs"/>
+              </a:defRPr>
+            </a:lvl4pPr>
+            <a:lvl5pPr marL="1828800" algn="l" defTabSz="914400" rtl="0" eaLnBrk="1" latinLnBrk="0" hangingPunct="1">
+              <a:defRPr sz="1800" kern="1200">
+                <a:solidFill>
+                  <a:schemeClr val="tx1"/>
+                </a:solidFill>
+                <a:latin typeface="+mn-lt"/>
+                <a:ea typeface="+mn-ea"/>
+                <a:cs typeface="+mn-cs"/>
+              </a:defRPr>
+            </a:lvl5pPr>
+            <a:lvl6pPr marL="2286000" algn="l" defTabSz="914400" rtl="0" eaLnBrk="1" latinLnBrk="0" hangingPunct="1">
+              <a:defRPr sz="1800" kern="1200">
+                <a:solidFill>
+                  <a:schemeClr val="tx1"/>
+                </a:solidFill>
+                <a:latin typeface="+mn-lt"/>
+                <a:ea typeface="+mn-ea"/>
+                <a:cs typeface="+mn-cs"/>
+              </a:defRPr>
+            </a:lvl6pPr>
+            <a:lvl7pPr marL="2743200" algn="l" defTabSz="914400" rtl="0" eaLnBrk="1" latinLnBrk="0" hangingPunct="1">
+              <a:defRPr sz="1800" kern="1200">
+                <a:solidFill>
+                  <a:schemeClr val="tx1"/>
+                </a:solidFill>
+                <a:latin typeface="+mn-lt"/>
+                <a:ea typeface="+mn-ea"/>
+                <a:cs typeface="+mn-cs"/>
+              </a:defRPr>
+            </a:lvl7pPr>
+            <a:lvl8pPr marL="3200400" algn="l" defTabSz="914400" rtl="0" eaLnBrk="1" latinLnBrk="0" hangingPunct="1">
+              <a:defRPr sz="1800" kern="1200">
+                <a:solidFill>
+                  <a:schemeClr val="tx1"/>
+                </a:solidFill>
+                <a:latin typeface="+mn-lt"/>
+                <a:ea typeface="+mn-ea"/>
+                <a:cs typeface="+mn-cs"/>
+              </a:defRPr>
+            </a:lvl8pPr>
+            <a:lvl9pPr marL="3657600" algn="l" defTabSz="914400" rtl="0" eaLnBrk="1" latinLnBrk="0" hangingPunct="1">
+              <a:defRPr sz="1800" kern="1200">
+                <a:solidFill>
+                  <a:schemeClr val="tx1"/>
+                </a:solidFill>
+                <a:latin typeface="+mn-lt"/>
+                <a:ea typeface="+mn-ea"/>
+                <a:cs typeface="+mn-cs"/>
+              </a:defRPr>
+            </a:lvl9pPr>
+          </a:lstStyle>
+          <a:p>
+            <a:pPr marL="342900" defTabSz="914400">
+              <a:lnSpc>
+                <a:spcPct val="130000"/>
+              </a:lnSpc>
+              <a:buChar char="•"/>
+            </a:pPr>
+            <a:r>
+              <a:rPr lang="vi-VN" sz="1600" b="0">
+                <a:solidFill>
+                  <a:srgbClr val="92F7FF"/>
+                </a:solidFill>
+                <a:latin typeface="Archivo Light"/>
+              </a:rPr>
+              <a:t>Giao diện đầy đủ cho người dùng và admin</a:t>
+            </a:r>
+          </a:p>
+          <a:p>
+            <a:pPr marL="342900" defTabSz="914400">
+              <a:lnSpc>
+                <a:spcPct val="130000"/>
+              </a:lnSpc>
+              <a:buChar char="•"/>
+            </a:pPr>
+            <a:r>
+              <a:rPr lang="vi-VN" sz="1600">
+                <a:solidFill>
+                  <a:srgbClr val="92F7FF"/>
+                </a:solidFill>
+                <a:latin typeface="Archivo Light"/>
+              </a:rPr>
+              <a:t>Các chức tính năng chính được thử nghiệm thành công</a:t>
+            </a:r>
+            <a:endParaRPr lang="vi-VN" sz="1600" b="0">
+              <a:solidFill>
+                <a:srgbClr val="92F7FF"/>
+              </a:solidFill>
+              <a:latin typeface="Archivo Light"/>
+            </a:endParaRPr>
+          </a:p>
+          <a:p>
+            <a:pPr marL="342900" defTabSz="914400">
+              <a:lnSpc>
+                <a:spcPct val="130000"/>
+              </a:lnSpc>
+              <a:buChar char="•"/>
+            </a:pPr>
+            <a:r>
+              <a:rPr lang="vi-VN" sz="1600" b="0">
+                <a:solidFill>
+                  <a:srgbClr val="92F7FF"/>
+                </a:solidFill>
+                <a:latin typeface="Archivo Light"/>
+              </a:rPr>
+              <a:t>Hạn chế: chưa tích hợp cổng thanh toán thực</a:t>
             </a:r>
           </a:p>
         </p:txBody>
       </p:sp>
     </p:spTree>
+    <p:extLst>
+      <p:ext uri="{BB962C8B-B14F-4D97-AF65-F5344CB8AC3E}">
+        <p14:creationId xmlns:p14="http://schemas.microsoft.com/office/powerpoint/2010/main" val="1627385865"/>
+      </p:ext>
+    </p:extLst>
   </p:cSld>
   <p:clrMapOvr>
     <a:masterClrMapping/>
   </p:clrMapOvr>
+  <mc:AlternateContent xmlns:mc="http://schemas.openxmlformats.org/markup-compatibility/2006" xmlns:p159="http://schemas.microsoft.com/office/powerpoint/2015/09/main">
+    <mc:Choice Requires="p159">
+      <p:transition xmlns:p14="http://schemas.microsoft.com/office/powerpoint/2010/main" spd="slow" p14:dur="2000">
+        <p159:morph option="byObject"/>
+      </p:transition>
+    </mc:Choice>
+    <mc:Fallback xmlns="">
+      <p:transition spd="slow">
+        <p:fade/>
+      </p:transition>
+    </mc:Fallback>
+  </mc:AlternateContent>
 </p:sld>
 </file>
 
-<file path=ppt/slides/slide10.xml><?xml version="1.0" encoding="utf-8"?>
+<file path=ppt/slides/slide15.xml><?xml version="1.0" encoding="utf-8"?>
 <p:sld xmlns:a="http://schemas.openxmlformats.org/drawingml/2006/main" xmlns:r="http://schemas.openxmlformats.org/officeDocument/2006/relationships" xmlns:p="http://schemas.openxmlformats.org/presentationml/2006/main">
   <p:cSld>
     <p:spTree>
@@ -17807,7 +19888,7 @@
                 <a:uFillTx/>
                 <a:latin typeface="Orbitron"/>
               </a:rPr>
-              <a:t>Kết quả &amp; Hướng phát triển</a:t>
+              <a:t>Hướng phát triển</a:t>
             </a:r>
             <a:endParaRPr lang="en-US" sz="2400" b="0" u="none" strike="noStrike">
               <a:solidFill>
@@ -17822,14 +19903,20 @@
       </p:sp>
       <p:sp>
         <p:nvSpPr>
-          <p:cNvPr id="180" name="Rectangle 179"/>
+          <p:cNvPr id="2" name="content_box">
+            <a:extLst>
+              <a:ext uri="{FF2B5EF4-FFF2-40B4-BE49-F238E27FC236}">
+                <a16:creationId xmlns:a16="http://schemas.microsoft.com/office/drawing/2014/main" id="{0616E217-3E21-A1D1-91E1-C70EBA2E9CD8}"/>
+              </a:ext>
+            </a:extLst>
+          </p:cNvPr>
           <p:cNvSpPr/>
           <p:nvPr/>
         </p:nvSpPr>
         <p:spPr>
           <a:xfrm>
-            <a:off x="619200" y="1905120"/>
-            <a:ext cx="8677200" cy="2984380"/>
+            <a:off x="352046" y="2023709"/>
+            <a:ext cx="7615226" cy="2938034"/>
           </a:xfrm>
           <a:prstGeom prst="rect">
             <a:avLst/>
@@ -17855,107 +19942,151 @@
           <a:bodyPr anchor="t">
             <a:normAutofit/>
           </a:bodyPr>
-          <a:lstStyle/>
+          <a:lstStyle>
+            <a:defPPr>
+              <a:defRPr lang="vi-VN"/>
+            </a:defPPr>
+            <a:lvl1pPr marL="0" algn="l" defTabSz="914400" rtl="0" eaLnBrk="1" latinLnBrk="0" hangingPunct="1">
+              <a:defRPr sz="1800" kern="1200">
+                <a:solidFill>
+                  <a:schemeClr val="tx1"/>
+                </a:solidFill>
+                <a:latin typeface="+mn-lt"/>
+                <a:ea typeface="+mn-ea"/>
+                <a:cs typeface="+mn-cs"/>
+              </a:defRPr>
+            </a:lvl1pPr>
+            <a:lvl2pPr marL="457200" algn="l" defTabSz="914400" rtl="0" eaLnBrk="1" latinLnBrk="0" hangingPunct="1">
+              <a:defRPr sz="1800" kern="1200">
+                <a:solidFill>
+                  <a:schemeClr val="tx1"/>
+                </a:solidFill>
+                <a:latin typeface="+mn-lt"/>
+                <a:ea typeface="+mn-ea"/>
+                <a:cs typeface="+mn-cs"/>
+              </a:defRPr>
+            </a:lvl2pPr>
+            <a:lvl3pPr marL="914400" algn="l" defTabSz="914400" rtl="0" eaLnBrk="1" latinLnBrk="0" hangingPunct="1">
+              <a:defRPr sz="1800" kern="1200">
+                <a:solidFill>
+                  <a:schemeClr val="tx1"/>
+                </a:solidFill>
+                <a:latin typeface="+mn-lt"/>
+                <a:ea typeface="+mn-ea"/>
+                <a:cs typeface="+mn-cs"/>
+              </a:defRPr>
+            </a:lvl3pPr>
+            <a:lvl4pPr marL="1371600" algn="l" defTabSz="914400" rtl="0" eaLnBrk="1" latinLnBrk="0" hangingPunct="1">
+              <a:defRPr sz="1800" kern="1200">
+                <a:solidFill>
+                  <a:schemeClr val="tx1"/>
+                </a:solidFill>
+                <a:latin typeface="+mn-lt"/>
+                <a:ea typeface="+mn-ea"/>
+                <a:cs typeface="+mn-cs"/>
+              </a:defRPr>
+            </a:lvl4pPr>
+            <a:lvl5pPr marL="1828800" algn="l" defTabSz="914400" rtl="0" eaLnBrk="1" latinLnBrk="0" hangingPunct="1">
+              <a:defRPr sz="1800" kern="1200">
+                <a:solidFill>
+                  <a:schemeClr val="tx1"/>
+                </a:solidFill>
+                <a:latin typeface="+mn-lt"/>
+                <a:ea typeface="+mn-ea"/>
+                <a:cs typeface="+mn-cs"/>
+              </a:defRPr>
+            </a:lvl5pPr>
+            <a:lvl6pPr marL="2286000" algn="l" defTabSz="914400" rtl="0" eaLnBrk="1" latinLnBrk="0" hangingPunct="1">
+              <a:defRPr sz="1800" kern="1200">
+                <a:solidFill>
+                  <a:schemeClr val="tx1"/>
+                </a:solidFill>
+                <a:latin typeface="+mn-lt"/>
+                <a:ea typeface="+mn-ea"/>
+                <a:cs typeface="+mn-cs"/>
+              </a:defRPr>
+            </a:lvl6pPr>
+            <a:lvl7pPr marL="2743200" algn="l" defTabSz="914400" rtl="0" eaLnBrk="1" latinLnBrk="0" hangingPunct="1">
+              <a:defRPr sz="1800" kern="1200">
+                <a:solidFill>
+                  <a:schemeClr val="tx1"/>
+                </a:solidFill>
+                <a:latin typeface="+mn-lt"/>
+                <a:ea typeface="+mn-ea"/>
+                <a:cs typeface="+mn-cs"/>
+              </a:defRPr>
+            </a:lvl7pPr>
+            <a:lvl8pPr marL="3200400" algn="l" defTabSz="914400" rtl="0" eaLnBrk="1" latinLnBrk="0" hangingPunct="1">
+              <a:defRPr sz="1800" kern="1200">
+                <a:solidFill>
+                  <a:schemeClr val="tx1"/>
+                </a:solidFill>
+                <a:latin typeface="+mn-lt"/>
+                <a:ea typeface="+mn-ea"/>
+                <a:cs typeface="+mn-cs"/>
+              </a:defRPr>
+            </a:lvl8pPr>
+            <a:lvl9pPr marL="3657600" algn="l" defTabSz="914400" rtl="0" eaLnBrk="1" latinLnBrk="0" hangingPunct="1">
+              <a:defRPr sz="1800" kern="1200">
+                <a:solidFill>
+                  <a:schemeClr val="tx1"/>
+                </a:solidFill>
+                <a:latin typeface="+mn-lt"/>
+                <a:ea typeface="+mn-ea"/>
+                <a:cs typeface="+mn-cs"/>
+              </a:defRPr>
+            </a:lvl9pPr>
+          </a:lstStyle>
           <a:p>
-            <a:pPr defTabSz="914400">
+            <a:pPr marL="342900" defTabSz="914400">
               <a:lnSpc>
-                <a:spcPct val="150000"/>
+                <a:spcPct val="130000"/>
               </a:lnSpc>
-              <a:tabLst>
-                <a:tab pos="0" algn="l"/>
-              </a:tabLst>
+              <a:buChar char="•"/>
             </a:pPr>
             <a:r>
-              <a:rPr lang="en-US" sz="1600" b="0" u="none" strike="noStrike">
+              <a:rPr lang="vi-VN" sz="1600" b="0">
                 <a:solidFill>
                   <a:srgbClr val="92F7FF"/>
                 </a:solidFill>
-                <a:effectLst/>
-                <a:uFillTx/>
                 <a:latin typeface="Archivo Light"/>
               </a:rPr>
-              <a:t>Giao diện đầy đủ cho người dùng và admin </a:t>
+              <a:t>Tích hợp thanh toán bằng ví điện tử/ngân hàng</a:t>
             </a:r>
           </a:p>
           <a:p>
-            <a:pPr defTabSz="914400">
+            <a:pPr marL="342900" defTabSz="914400">
               <a:lnSpc>
-                <a:spcPct val="150000"/>
+                <a:spcPct val="130000"/>
               </a:lnSpc>
-              <a:tabLst>
-                <a:tab pos="0" algn="l"/>
-              </a:tabLst>
+              <a:buChar char="•"/>
             </a:pPr>
             <a:r>
-              <a:rPr lang="en-US" sz="1600">
+              <a:rPr lang="vi-VN" sz="1600" b="0">
                 <a:solidFill>
                   <a:srgbClr val="92F7FF"/>
                 </a:solidFill>
                 <a:latin typeface="Archivo Light"/>
               </a:rPr>
-              <a:t>K</a:t>
-            </a:r>
-            <a:r>
-              <a:rPr lang="en-US" sz="1600" b="0" u="none" strike="noStrike">
-                <a:solidFill>
-                  <a:srgbClr val="92F7FF"/>
-                </a:solidFill>
-                <a:effectLst/>
-                <a:uFillTx/>
-                <a:latin typeface="Archivo Light"/>
-              </a:rPr>
-              <a:t>iểm thử chức năng đạt (TC01–TC012). </a:t>
+              <a:t>Thêm tính năng trò chuyện trực tiếp giữa người dùng</a:t>
             </a:r>
           </a:p>
           <a:p>
-            <a:pPr defTabSz="914400">
+            <a:pPr marL="342900" defTabSz="914400">
               <a:lnSpc>
-                <a:spcPct val="150000"/>
+                <a:spcPct val="130000"/>
               </a:lnSpc>
-              <a:tabLst>
-                <a:tab pos="0" algn="l"/>
-              </a:tabLst>
+              <a:buChar char="•"/>
             </a:pPr>
             <a:r>
-              <a:rPr lang="en-US" sz="1600" b="0" u="none" strike="noStrike">
+              <a:rPr lang="vi-VN" sz="1600" b="0">
                 <a:solidFill>
                   <a:srgbClr val="92F7FF"/>
                 </a:solidFill>
-                <a:effectLst/>
-                <a:uFillTx/>
                 <a:latin typeface="Archivo Light"/>
               </a:rPr>
-              <a:t>Hạn chế: chưa tích hợp cổng thanh toán thực, chưa kiểm thử tải lớn. </a:t>
+              <a:t>Phát triển ứng dụng di động</a:t>
             </a:r>
-          </a:p>
-          <a:p>
-            <a:pPr defTabSz="914400">
-              <a:lnSpc>
-                <a:spcPct val="150000"/>
-              </a:lnSpc>
-              <a:tabLst>
-                <a:tab pos="0" algn="l"/>
-              </a:tabLst>
-            </a:pPr>
-            <a:r>
-              <a:rPr lang="en-US" sz="1600" b="0" u="none" strike="noStrike">
-                <a:solidFill>
-                  <a:srgbClr val="92F7FF"/>
-                </a:solidFill>
-                <a:effectLst/>
-                <a:uFillTx/>
-                <a:latin typeface="Archivo Light"/>
-              </a:rPr>
-              <a:t>Hướng phát triển: tích hợp VNPay/MoMo, caching (Redis), chat và hệ thống đánh giá.</a:t>
-            </a:r>
-            <a:endParaRPr lang="en-US" sz="1600" b="0" u="none" strike="noStrike">
-              <a:solidFill>
-                <a:srgbClr val="FFFFFF"/>
-              </a:solidFill>
-              <a:effectLst/>
-              <a:uFillTx/>
-              <a:latin typeface="OpenSymbol"/>
-            </a:endParaRPr>
           </a:p>
         </p:txBody>
       </p:sp>
@@ -17964,238 +20095,22 @@
   <p:clrMapOvr>
     <a:masterClrMapping/>
   </p:clrMapOvr>
+  <mc:AlternateContent xmlns:mc="http://schemas.openxmlformats.org/markup-compatibility/2006" xmlns:p159="http://schemas.microsoft.com/office/powerpoint/2015/09/main">
+    <mc:Choice Requires="p159">
+      <p:transition xmlns:p14="http://schemas.microsoft.com/office/powerpoint/2010/main" spd="slow" p14:dur="2000">
+        <p159:morph option="byObject"/>
+      </p:transition>
+    </mc:Choice>
+    <mc:Fallback xmlns="">
+      <p:transition spd="slow">
+        <p:fade/>
+      </p:transition>
+    </mc:Fallback>
+  </mc:AlternateContent>
 </p:sld>
 </file>
 
-<file path=ppt/slides/slide11.xml><?xml version="1.0" encoding="utf-8"?>
-<p:sld xmlns:a="http://schemas.openxmlformats.org/drawingml/2006/main" xmlns:r="http://schemas.openxmlformats.org/officeDocument/2006/relationships" xmlns:p="http://schemas.openxmlformats.org/presentationml/2006/main">
-  <p:cSld>
-    <p:spTree>
-      <p:nvGrpSpPr>
-        <p:cNvPr id="1" name=""/>
-        <p:cNvGrpSpPr/>
-        <p:nvPr/>
-      </p:nvGrpSpPr>
-      <p:grpSpPr>
-        <a:xfrm>
-          <a:off x="0" y="0"/>
-          <a:ext cx="0" cy="0"/>
-          <a:chOff x="0" y="0"/>
-          <a:chExt cx="0" cy="0"/>
-        </a:xfrm>
-      </p:grpSpPr>
-      <p:sp>
-        <p:nvSpPr>
-          <p:cNvPr id="181" name="Rectangle 180"/>
-          <p:cNvSpPr/>
-          <p:nvPr/>
-        </p:nvSpPr>
-        <p:spPr>
-          <a:xfrm>
-            <a:off x="619200" y="619200"/>
-            <a:ext cx="7905240" cy="361440"/>
-          </a:xfrm>
-          <a:prstGeom prst="rect">
-            <a:avLst/>
-          </a:prstGeom>
-          <a:noFill/>
-          <a:ln w="0">
-            <a:noFill/>
-          </a:ln>
-        </p:spPr>
-        <p:style>
-          <a:lnRef idx="0">
-            <a:scrgbClr r="0" g="0" b="0"/>
-          </a:lnRef>
-          <a:fillRef idx="0">
-            <a:scrgbClr r="0" g="0" b="0"/>
-          </a:fillRef>
-          <a:effectRef idx="0">
-            <a:scrgbClr r="0" g="0" b="0"/>
-          </a:effectRef>
-          <a:fontRef idx="minor"/>
-        </p:style>
-        <p:txBody>
-          <a:bodyPr anchor="t">
-            <a:normAutofit fontScale="85000" lnSpcReduction="19999"/>
-          </a:bodyPr>
-          <a:lstStyle/>
-          <a:p>
-            <a:pPr defTabSz="914400">
-              <a:lnSpc>
-                <a:spcPct val="100000"/>
-              </a:lnSpc>
-              <a:tabLst>
-                <a:tab pos="0" algn="l"/>
-              </a:tabLst>
-            </a:pPr>
-            <a:r>
-              <a:rPr lang="en-US" sz="2400" b="0" u="none" strike="noStrike">
-                <a:solidFill>
-                  <a:srgbClr val="92F7FF"/>
-                </a:solidFill>
-                <a:effectLst/>
-                <a:uFillTx/>
-                <a:latin typeface="Orbitron"/>
-              </a:rPr>
-              <a:t>Kết luận</a:t>
-            </a:r>
-            <a:endParaRPr lang="en-US" sz="2400" b="0" u="none" strike="noStrike">
-              <a:solidFill>
-                <a:srgbClr val="FFFFFF"/>
-              </a:solidFill>
-              <a:effectLst/>
-              <a:uFillTx/>
-              <a:latin typeface="OpenSymbol"/>
-            </a:endParaRPr>
-          </a:p>
-        </p:txBody>
-      </p:sp>
-      <p:sp>
-        <p:nvSpPr>
-          <p:cNvPr id="182" name="Rectangle 181"/>
-          <p:cNvSpPr/>
-          <p:nvPr/>
-        </p:nvSpPr>
-        <p:spPr>
-          <a:xfrm>
-            <a:off x="619200" y="1905120"/>
-            <a:ext cx="7905240" cy="1371240"/>
-          </a:xfrm>
-          <a:prstGeom prst="rect">
-            <a:avLst/>
-          </a:prstGeom>
-          <a:noFill/>
-          <a:ln w="0">
-            <a:noFill/>
-          </a:ln>
-        </p:spPr>
-        <p:style>
-          <a:lnRef idx="0">
-            <a:scrgbClr r="0" g="0" b="0"/>
-          </a:lnRef>
-          <a:fillRef idx="0">
-            <a:scrgbClr r="0" g="0" b="0"/>
-          </a:fillRef>
-          <a:effectRef idx="0">
-            <a:scrgbClr r="0" g="0" b="0"/>
-          </a:effectRef>
-          <a:fontRef idx="minor"/>
-        </p:style>
-        <p:txBody>
-          <a:bodyPr anchor="t">
-            <a:normAutofit fontScale="92500" lnSpcReduction="10000"/>
-          </a:bodyPr>
-          <a:lstStyle/>
-          <a:p>
-            <a:pPr defTabSz="914400">
-              <a:lnSpc>
-                <a:spcPct val="150000"/>
-              </a:lnSpc>
-              <a:tabLst>
-                <a:tab pos="0" algn="l"/>
-              </a:tabLst>
-            </a:pPr>
-            <a:r>
-              <a:rPr lang="en-US" sz="1600" b="0" u="none" strike="noStrike">
-                <a:solidFill>
-                  <a:srgbClr val="92F7FF"/>
-                </a:solidFill>
-                <a:effectLst/>
-                <a:uFillTx/>
-                <a:latin typeface="Archivo Light"/>
-              </a:rPr>
-              <a:t>Hệ thống đã hiện thực hóa nền tảng đấu giá điện tử với </a:t>
-            </a:r>
-            <a:r>
-              <a:rPr lang="en-US" sz="1600" b="1" u="none" strike="noStrike">
-                <a:solidFill>
-                  <a:srgbClr val="92F7FF"/>
-                </a:solidFill>
-                <a:effectLst/>
-                <a:uFillTx/>
-                <a:latin typeface="Archivo Light"/>
-              </a:rPr>
-              <a:t>thời gian thực</a:t>
-            </a:r>
-            <a:r>
-              <a:rPr lang="en-US" sz="1600" b="0" u="none" strike="noStrike">
-                <a:solidFill>
-                  <a:srgbClr val="92F7FF"/>
-                </a:solidFill>
-                <a:effectLst/>
-                <a:uFillTx/>
-                <a:latin typeface="Archivo Light"/>
-              </a:rPr>
-              <a:t> và cơ chế vận hành an toàn, đáp ứng mục tiêu nghiên cứu. </a:t>
-            </a:r>
-            <a:endParaRPr lang="en-US" sz="1600" b="0" u="none" strike="noStrike">
-              <a:solidFill>
-                <a:srgbClr val="FFFFFF"/>
-              </a:solidFill>
-              <a:effectLst/>
-              <a:uFillTx/>
-              <a:latin typeface="OpenSymbol"/>
-            </a:endParaRPr>
-          </a:p>
-          <a:p>
-            <a:pPr defTabSz="914400">
-              <a:lnSpc>
-                <a:spcPct val="150000"/>
-              </a:lnSpc>
-              <a:tabLst>
-                <a:tab pos="0" algn="l"/>
-              </a:tabLst>
-            </a:pPr>
-            <a:endParaRPr lang="en-US" sz="1600" b="0" u="none" strike="noStrike">
-              <a:solidFill>
-                <a:srgbClr val="FFFFFF"/>
-              </a:solidFill>
-              <a:effectLst/>
-              <a:uFillTx/>
-              <a:latin typeface="OpenSymbol"/>
-            </a:endParaRPr>
-          </a:p>
-          <a:p>
-            <a:pPr defTabSz="914400">
-              <a:lnSpc>
-                <a:spcPct val="150000"/>
-              </a:lnSpc>
-              <a:tabLst>
-                <a:tab pos="0" algn="l"/>
-              </a:tabLst>
-            </a:pPr>
-            <a:r>
-              <a:rPr lang="en-US" sz="1600" b="0" u="none" strike="noStrike">
-                <a:solidFill>
-                  <a:srgbClr val="92F7FF"/>
-                </a:solidFill>
-                <a:effectLst/>
-                <a:uFillTx/>
-                <a:latin typeface="Archivo Light"/>
-              </a:rPr>
-              <a:t>Bước tiếp theo: hoàn thiện tích hợp thanh toán, tối ưu hiệu năng và mở rộng kiểm thử tải.</a:t>
-            </a:r>
-            <a:endParaRPr lang="en-US" sz="1600" b="0" u="none" strike="noStrike">
-              <a:solidFill>
-                <a:srgbClr val="FFFFFF"/>
-              </a:solidFill>
-              <a:effectLst/>
-              <a:uFillTx/>
-              <a:latin typeface="OpenSymbol"/>
-            </a:endParaRPr>
-          </a:p>
-        </p:txBody>
-      </p:sp>
-    </p:spTree>
-  </p:cSld>
-  <p:clrMapOvr>
-    <a:masterClrMapping/>
-  </p:clrMapOvr>
-</p:sld>
-</file>
-
-<file path=ppt/slides/slide12.xml><?xml version="1.0" encoding="utf-8"?>
+<file path=ppt/slides/slide16.xml><?xml version="1.0" encoding="utf-8"?>
 <p:sld xmlns:a="http://schemas.openxmlformats.org/drawingml/2006/main" xmlns:r="http://schemas.openxmlformats.org/officeDocument/2006/relationships" xmlns:p="http://schemas.openxmlformats.org/presentationml/2006/main">
   <p:cSld>
     <p:spTree>
@@ -18236,7 +20151,7 @@
         </p:nvSpPr>
         <p:spPr>
           <a:xfrm>
-            <a:off x="727075" y="720725"/>
+            <a:off x="2869026" y="1321974"/>
             <a:ext cx="4737100" cy="896938"/>
           </a:xfrm>
           <a:prstGeom prst="rect">
@@ -18285,6 +20200,176 @@
           </a:p>
         </p:txBody>
       </p:sp>
+      <p:sp>
+        <p:nvSpPr>
+          <p:cNvPr id="3" name="subtitle">
+            <a:extLst>
+              <a:ext uri="{FF2B5EF4-FFF2-40B4-BE49-F238E27FC236}">
+                <a16:creationId xmlns:a16="http://schemas.microsoft.com/office/drawing/2014/main" id="{59118037-982C-BD17-51C1-0BD1FD66F835}"/>
+              </a:ext>
+            </a:extLst>
+          </p:cNvPr>
+          <p:cNvSpPr/>
+          <p:nvPr/>
+        </p:nvSpPr>
+        <p:spPr>
+          <a:xfrm>
+            <a:off x="168759" y="2422687"/>
+            <a:ext cx="8305440" cy="1200000"/>
+          </a:xfrm>
+          <a:prstGeom prst="rect">
+            <a:avLst/>
+          </a:prstGeom>
+          <a:noFill/>
+          <a:ln w="0">
+            <a:noFill/>
+          </a:ln>
+        </p:spPr>
+        <p:style>
+          <a:lnRef idx="0">
+            <a:scrgbClr r="0" g="0" b="0"/>
+          </a:lnRef>
+          <a:fillRef idx="0">
+            <a:scrgbClr r="0" g="0" b="0"/>
+          </a:fillRef>
+          <a:effectRef idx="0">
+            <a:scrgbClr r="0" g="0" b="0"/>
+          </a:effectRef>
+          <a:fontRef idx="minor"/>
+        </p:style>
+        <p:txBody>
+          <a:bodyPr anchor="ctr">
+            <a:normAutofit/>
+          </a:bodyPr>
+          <a:lstStyle>
+            <a:defPPr>
+              <a:defRPr lang="vi-VN"/>
+            </a:defPPr>
+            <a:lvl1pPr marL="0" algn="l" defTabSz="914400" rtl="0" eaLnBrk="1" latinLnBrk="0" hangingPunct="1">
+              <a:defRPr sz="1800" kern="1200">
+                <a:solidFill>
+                  <a:schemeClr val="tx1"/>
+                </a:solidFill>
+                <a:latin typeface="+mn-lt"/>
+                <a:ea typeface="+mn-ea"/>
+                <a:cs typeface="+mn-cs"/>
+              </a:defRPr>
+            </a:lvl1pPr>
+            <a:lvl2pPr marL="457200" algn="l" defTabSz="914400" rtl="0" eaLnBrk="1" latinLnBrk="0" hangingPunct="1">
+              <a:defRPr sz="1800" kern="1200">
+                <a:solidFill>
+                  <a:schemeClr val="tx1"/>
+                </a:solidFill>
+                <a:latin typeface="+mn-lt"/>
+                <a:ea typeface="+mn-ea"/>
+                <a:cs typeface="+mn-cs"/>
+              </a:defRPr>
+            </a:lvl2pPr>
+            <a:lvl3pPr marL="914400" algn="l" defTabSz="914400" rtl="0" eaLnBrk="1" latinLnBrk="0" hangingPunct="1">
+              <a:defRPr sz="1800" kern="1200">
+                <a:solidFill>
+                  <a:schemeClr val="tx1"/>
+                </a:solidFill>
+                <a:latin typeface="+mn-lt"/>
+                <a:ea typeface="+mn-ea"/>
+                <a:cs typeface="+mn-cs"/>
+              </a:defRPr>
+            </a:lvl3pPr>
+            <a:lvl4pPr marL="1371600" algn="l" defTabSz="914400" rtl="0" eaLnBrk="1" latinLnBrk="0" hangingPunct="1">
+              <a:defRPr sz="1800" kern="1200">
+                <a:solidFill>
+                  <a:schemeClr val="tx1"/>
+                </a:solidFill>
+                <a:latin typeface="+mn-lt"/>
+                <a:ea typeface="+mn-ea"/>
+                <a:cs typeface="+mn-cs"/>
+              </a:defRPr>
+            </a:lvl4pPr>
+            <a:lvl5pPr marL="1828800" algn="l" defTabSz="914400" rtl="0" eaLnBrk="1" latinLnBrk="0" hangingPunct="1">
+              <a:defRPr sz="1800" kern="1200">
+                <a:solidFill>
+                  <a:schemeClr val="tx1"/>
+                </a:solidFill>
+                <a:latin typeface="+mn-lt"/>
+                <a:ea typeface="+mn-ea"/>
+                <a:cs typeface="+mn-cs"/>
+              </a:defRPr>
+            </a:lvl5pPr>
+            <a:lvl6pPr marL="2286000" algn="l" defTabSz="914400" rtl="0" eaLnBrk="1" latinLnBrk="0" hangingPunct="1">
+              <a:defRPr sz="1800" kern="1200">
+                <a:solidFill>
+                  <a:schemeClr val="tx1"/>
+                </a:solidFill>
+                <a:latin typeface="+mn-lt"/>
+                <a:ea typeface="+mn-ea"/>
+                <a:cs typeface="+mn-cs"/>
+              </a:defRPr>
+            </a:lvl6pPr>
+            <a:lvl7pPr marL="2743200" algn="l" defTabSz="914400" rtl="0" eaLnBrk="1" latinLnBrk="0" hangingPunct="1">
+              <a:defRPr sz="1800" kern="1200">
+                <a:solidFill>
+                  <a:schemeClr val="tx1"/>
+                </a:solidFill>
+                <a:latin typeface="+mn-lt"/>
+                <a:ea typeface="+mn-ea"/>
+                <a:cs typeface="+mn-cs"/>
+              </a:defRPr>
+            </a:lvl7pPr>
+            <a:lvl8pPr marL="3200400" algn="l" defTabSz="914400" rtl="0" eaLnBrk="1" latinLnBrk="0" hangingPunct="1">
+              <a:defRPr sz="1800" kern="1200">
+                <a:solidFill>
+                  <a:schemeClr val="tx1"/>
+                </a:solidFill>
+                <a:latin typeface="+mn-lt"/>
+                <a:ea typeface="+mn-ea"/>
+                <a:cs typeface="+mn-cs"/>
+              </a:defRPr>
+            </a:lvl8pPr>
+            <a:lvl9pPr marL="3657600" algn="l" defTabSz="914400" rtl="0" eaLnBrk="1" latinLnBrk="0" hangingPunct="1">
+              <a:defRPr sz="1800" kern="1200">
+                <a:solidFill>
+                  <a:schemeClr val="tx1"/>
+                </a:solidFill>
+                <a:latin typeface="+mn-lt"/>
+                <a:ea typeface="+mn-ea"/>
+                <a:cs typeface="+mn-cs"/>
+              </a:defRPr>
+            </a:lvl9pPr>
+          </a:lstStyle>
+          <a:p>
+            <a:pPr algn="ctr">
+              <a:lnSpc>
+                <a:spcPct val="130000"/>
+              </a:lnSpc>
+            </a:pPr>
+            <a:r>
+              <a:rPr lang="vi-VN" sz="1600" b="0">
+                <a:solidFill>
+                  <a:srgbClr val="FFFFFF"/>
+                </a:solidFill>
+                <a:latin typeface="Archivo Light"/>
+              </a:rPr>
+              <a:t>GVHD: Ths. Ngô Thanh Huy</a:t>
+            </a:r>
+          </a:p>
+          <a:p>
+            <a:pPr algn="ctr">
+              <a:lnSpc>
+                <a:spcPct val="130000"/>
+              </a:lnSpc>
+            </a:pPr>
+            <a:r>
+              <a:rPr lang="vi-VN" sz="1600" b="0">
+                <a:solidFill>
+                  <a:srgbClr val="FFFFFF"/>
+                </a:solidFill>
+                <a:latin typeface="Archivo Light"/>
+              </a:rPr>
+              <a:t>SVTH: Trương Nguyễn Tố Nguyên — MSSV: 110122127</a:t>
+            </a:r>
+          </a:p>
+        </p:txBody>
+      </p:sp>
     </p:spTree>
     <p:extLst>
       <p:ext uri="{BB962C8B-B14F-4D97-AF65-F5344CB8AC3E}">
@@ -18295,6 +20380,18 @@
   <p:clrMapOvr>
     <a:masterClrMapping/>
   </p:clrMapOvr>
+  <mc:AlternateContent xmlns:mc="http://schemas.openxmlformats.org/markup-compatibility/2006" xmlns:p159="http://schemas.microsoft.com/office/powerpoint/2015/09/main">
+    <mc:Choice Requires="p159">
+      <p:transition xmlns:p14="http://schemas.microsoft.com/office/powerpoint/2010/main" spd="slow" p14:dur="2000">
+        <p159:morph option="byObject"/>
+      </p:transition>
+    </mc:Choice>
+    <mc:Fallback xmlns="">
+      <p:transition spd="slow">
+        <p:fade/>
+      </p:transition>
+    </mc:Fallback>
+  </mc:AlternateContent>
 </p:sld>
 </file>
 
@@ -18384,14 +20481,20 @@
       </p:sp>
       <p:sp>
         <p:nvSpPr>
-          <p:cNvPr id="158" name="Rectangle 157"/>
+          <p:cNvPr id="2" name="Rectangle 1">
+            <a:extLst>
+              <a:ext uri="{FF2B5EF4-FFF2-40B4-BE49-F238E27FC236}">
+                <a16:creationId xmlns:a16="http://schemas.microsoft.com/office/drawing/2014/main" id="{DEE9B855-E890-498C-9C2A-0694EB43D89F}"/>
+              </a:ext>
+            </a:extLst>
+          </p:cNvPr>
           <p:cNvSpPr/>
           <p:nvPr/>
         </p:nvSpPr>
         <p:spPr>
           <a:xfrm>
-            <a:off x="619200" y="1905120"/>
-            <a:ext cx="7745311" cy="1676160"/>
+            <a:off x="619200" y="980640"/>
+            <a:ext cx="7617896" cy="3400000"/>
           </a:xfrm>
           <a:prstGeom prst="rect">
             <a:avLst/>
@@ -18415,83 +20518,339 @@
         </p:style>
         <p:txBody>
           <a:bodyPr anchor="t">
-            <a:normAutofit fontScale="92500" lnSpcReduction="10000"/>
+            <a:normAutofit/>
+          </a:bodyPr>
+          <a:lstStyle>
+            <a:defPPr>
+              <a:defRPr lang="vi-VN"/>
+            </a:defPPr>
+            <a:lvl1pPr marL="0" algn="l" defTabSz="914400" rtl="0" eaLnBrk="1" latinLnBrk="0" hangingPunct="1">
+              <a:defRPr sz="1800" kern="1200">
+                <a:solidFill>
+                  <a:schemeClr val="tx1"/>
+                </a:solidFill>
+                <a:latin typeface="+mn-lt"/>
+                <a:ea typeface="+mn-ea"/>
+                <a:cs typeface="+mn-cs"/>
+              </a:defRPr>
+            </a:lvl1pPr>
+            <a:lvl2pPr marL="457200" algn="l" defTabSz="914400" rtl="0" eaLnBrk="1" latinLnBrk="0" hangingPunct="1">
+              <a:defRPr sz="1800" kern="1200">
+                <a:solidFill>
+                  <a:schemeClr val="tx1"/>
+                </a:solidFill>
+                <a:latin typeface="+mn-lt"/>
+                <a:ea typeface="+mn-ea"/>
+                <a:cs typeface="+mn-cs"/>
+              </a:defRPr>
+            </a:lvl2pPr>
+            <a:lvl3pPr marL="914400" algn="l" defTabSz="914400" rtl="0" eaLnBrk="1" latinLnBrk="0" hangingPunct="1">
+              <a:defRPr sz="1800" kern="1200">
+                <a:solidFill>
+                  <a:schemeClr val="tx1"/>
+                </a:solidFill>
+                <a:latin typeface="+mn-lt"/>
+                <a:ea typeface="+mn-ea"/>
+                <a:cs typeface="+mn-cs"/>
+              </a:defRPr>
+            </a:lvl3pPr>
+            <a:lvl4pPr marL="1371600" algn="l" defTabSz="914400" rtl="0" eaLnBrk="1" latinLnBrk="0" hangingPunct="1">
+              <a:defRPr sz="1800" kern="1200">
+                <a:solidFill>
+                  <a:schemeClr val="tx1"/>
+                </a:solidFill>
+                <a:latin typeface="+mn-lt"/>
+                <a:ea typeface="+mn-ea"/>
+                <a:cs typeface="+mn-cs"/>
+              </a:defRPr>
+            </a:lvl4pPr>
+            <a:lvl5pPr marL="1828800" algn="l" defTabSz="914400" rtl="0" eaLnBrk="1" latinLnBrk="0" hangingPunct="1">
+              <a:defRPr sz="1800" kern="1200">
+                <a:solidFill>
+                  <a:schemeClr val="tx1"/>
+                </a:solidFill>
+                <a:latin typeface="+mn-lt"/>
+                <a:ea typeface="+mn-ea"/>
+                <a:cs typeface="+mn-cs"/>
+              </a:defRPr>
+            </a:lvl5pPr>
+            <a:lvl6pPr marL="2286000" algn="l" defTabSz="914400" rtl="0" eaLnBrk="1" latinLnBrk="0" hangingPunct="1">
+              <a:defRPr sz="1800" kern="1200">
+                <a:solidFill>
+                  <a:schemeClr val="tx1"/>
+                </a:solidFill>
+                <a:latin typeface="+mn-lt"/>
+                <a:ea typeface="+mn-ea"/>
+                <a:cs typeface="+mn-cs"/>
+              </a:defRPr>
+            </a:lvl6pPr>
+            <a:lvl7pPr marL="2743200" algn="l" defTabSz="914400" rtl="0" eaLnBrk="1" latinLnBrk="0" hangingPunct="1">
+              <a:defRPr sz="1800" kern="1200">
+                <a:solidFill>
+                  <a:schemeClr val="tx1"/>
+                </a:solidFill>
+                <a:latin typeface="+mn-lt"/>
+                <a:ea typeface="+mn-ea"/>
+                <a:cs typeface="+mn-cs"/>
+              </a:defRPr>
+            </a:lvl7pPr>
+            <a:lvl8pPr marL="3200400" algn="l" defTabSz="914400" rtl="0" eaLnBrk="1" latinLnBrk="0" hangingPunct="1">
+              <a:defRPr sz="1800" kern="1200">
+                <a:solidFill>
+                  <a:schemeClr val="tx1"/>
+                </a:solidFill>
+                <a:latin typeface="+mn-lt"/>
+                <a:ea typeface="+mn-ea"/>
+                <a:cs typeface="+mn-cs"/>
+              </a:defRPr>
+            </a:lvl8pPr>
+            <a:lvl9pPr marL="3657600" algn="l" defTabSz="914400" rtl="0" eaLnBrk="1" latinLnBrk="0" hangingPunct="1">
+              <a:defRPr sz="1800" kern="1200">
+                <a:solidFill>
+                  <a:schemeClr val="tx1"/>
+                </a:solidFill>
+                <a:latin typeface="+mn-lt"/>
+                <a:ea typeface="+mn-ea"/>
+                <a:cs typeface="+mn-cs"/>
+              </a:defRPr>
+            </a:lvl9pPr>
+          </a:lstStyle>
+          <a:p>
+            <a:pPr algn="just" defTabSz="914400">
+              <a:lnSpc>
+                <a:spcPct val="130000"/>
+              </a:lnSpc>
+            </a:pPr>
+            <a:r>
+              <a:rPr lang="vi-VN" sz="1600" b="0" u="none" strike="noStrike">
+                <a:solidFill>
+                  <a:srgbClr val="92F7FF"/>
+                </a:solidFill>
+                <a:latin typeface="Archivo Light"/>
+              </a:rPr>
+              <a:t>Hệ thống web cho phép </a:t>
+            </a:r>
+            <a:r>
+              <a:rPr lang="vi-VN" sz="1600" b="0" i="1" u="none" strike="noStrike">
+                <a:solidFill>
+                  <a:srgbClr val="92F7FF"/>
+                </a:solidFill>
+                <a:latin typeface="Archivo Light"/>
+              </a:rPr>
+              <a:t>đăng bán</a:t>
+            </a:r>
+            <a:r>
+              <a:rPr lang="vi-VN" sz="1600" b="0" u="none" strike="noStrike">
+                <a:solidFill>
+                  <a:srgbClr val="92F7FF"/>
+                </a:solidFill>
+                <a:latin typeface="Archivo Light"/>
+              </a:rPr>
+              <a:t> và </a:t>
+            </a:r>
+            <a:r>
+              <a:rPr lang="vi-VN" sz="1600" b="0" i="1" u="none" strike="noStrike">
+                <a:solidFill>
+                  <a:srgbClr val="92F7FF"/>
+                </a:solidFill>
+                <a:latin typeface="Archivo Light"/>
+              </a:rPr>
+              <a:t>tham gia đấu giá</a:t>
+            </a:r>
+            <a:r>
+              <a:rPr lang="vi-VN" sz="1600" b="0" u="none" strike="noStrike">
+                <a:solidFill>
+                  <a:srgbClr val="92F7FF"/>
+                </a:solidFill>
+                <a:latin typeface="Archivo Light"/>
+              </a:rPr>
+              <a:t> sản phẩm điện tử theo mô hình </a:t>
+            </a:r>
+            <a:r>
+              <a:rPr lang="vi-VN" sz="1600" i="1">
+                <a:solidFill>
+                  <a:srgbClr val="92F7FF"/>
+                </a:solidFill>
+                <a:latin typeface="Archivo Light"/>
+              </a:rPr>
+              <a:t>đấu giá kiểu Anh.</a:t>
+            </a:r>
+          </a:p>
+          <a:p>
+            <a:pPr algn="just" defTabSz="914400">
+              <a:lnSpc>
+                <a:spcPct val="130000"/>
+              </a:lnSpc>
+            </a:pPr>
+            <a:endParaRPr lang="vi-VN" sz="1600" b="0"/>
+          </a:p>
+          <a:p>
+            <a:pPr algn="just" defTabSz="914400">
+              <a:lnSpc>
+                <a:spcPct val="130000"/>
+              </a:lnSpc>
+            </a:pPr>
+            <a:r>
+              <a:rPr lang="vi-VN" sz="1600" b="1" u="none" strike="noStrike">
+                <a:solidFill>
+                  <a:srgbClr val="92F7FF"/>
+                </a:solidFill>
+                <a:latin typeface="Archivo Light"/>
+              </a:rPr>
+              <a:t>Các tính năng chính:</a:t>
+            </a:r>
+          </a:p>
+          <a:p>
+            <a:pPr marL="342900" algn="just" defTabSz="914400">
+              <a:lnSpc>
+                <a:spcPct val="130000"/>
+              </a:lnSpc>
+              <a:buChar char="•"/>
+            </a:pPr>
+            <a:r>
+              <a:rPr lang="vi-VN" sz="1400" b="0">
+                <a:solidFill>
+                  <a:srgbClr val="92F7FF"/>
+                </a:solidFill>
+                <a:latin typeface="Archivo Light"/>
+              </a:rPr>
+              <a:t>Đấu giá theo thời gian thực qua WebSocket</a:t>
+            </a:r>
+          </a:p>
+          <a:p>
+            <a:pPr marL="342900" algn="just" defTabSz="914400">
+              <a:lnSpc>
+                <a:spcPct val="130000"/>
+              </a:lnSpc>
+              <a:buChar char="•"/>
+            </a:pPr>
+            <a:r>
+              <a:rPr lang="vi-VN" sz="1400" b="0">
+                <a:solidFill>
+                  <a:srgbClr val="92F7FF"/>
+                </a:solidFill>
+                <a:latin typeface="Archivo Light"/>
+              </a:rPr>
+              <a:t>Mua ngay với Optimistic Locking</a:t>
+            </a:r>
+          </a:p>
+          <a:p>
+            <a:pPr marL="342900" algn="just" defTabSz="914400">
+              <a:lnSpc>
+                <a:spcPct val="130000"/>
+              </a:lnSpc>
+              <a:buChar char="•"/>
+            </a:pPr>
+            <a:r>
+              <a:rPr lang="vi-VN" sz="1400" b="0">
+                <a:solidFill>
+                  <a:srgbClr val="92F7FF"/>
+                </a:solidFill>
+                <a:latin typeface="Archivo Light"/>
+              </a:rPr>
+              <a:t>Quản lý đơn hàng, thông báo, kiểm duyệt</a:t>
+            </a:r>
+          </a:p>
+        </p:txBody>
+      </p:sp>
+    </p:spTree>
+  </p:cSld>
+  <p:clrMapOvr>
+    <a:masterClrMapping/>
+  </p:clrMapOvr>
+  <mc:AlternateContent xmlns:mc="http://schemas.openxmlformats.org/markup-compatibility/2006" xmlns:p159="http://schemas.microsoft.com/office/powerpoint/2015/09/main">
+    <mc:Choice Requires="p159">
+      <p:transition xmlns:p14="http://schemas.microsoft.com/office/powerpoint/2010/main" spd="slow" p14:dur="2000">
+        <p159:morph option="byObject"/>
+      </p:transition>
+    </mc:Choice>
+    <mc:Fallback xmlns="">
+      <p:transition spd="slow">
+        <p:fade/>
+      </p:transition>
+    </mc:Fallback>
+  </mc:AlternateContent>
+</p:sld>
+</file>
+
+<file path=ppt/slides/slide3.xml><?xml version="1.0" encoding="utf-8"?>
+<p:sld xmlns:a="http://schemas.openxmlformats.org/drawingml/2006/main" xmlns:r="http://schemas.openxmlformats.org/officeDocument/2006/relationships" xmlns:p="http://schemas.openxmlformats.org/presentationml/2006/main">
+  <p:cSld>
+    <p:spTree>
+      <p:nvGrpSpPr>
+        <p:cNvPr id="1" name=""/>
+        <p:cNvGrpSpPr/>
+        <p:nvPr/>
+      </p:nvGrpSpPr>
+      <p:grpSpPr>
+        <a:xfrm>
+          <a:off x="0" y="0"/>
+          <a:ext cx="0" cy="0"/>
+          <a:chOff x="0" y="0"/>
+          <a:chExt cx="0" cy="0"/>
+        </a:xfrm>
+      </p:grpSpPr>
+      <p:sp>
+        <p:nvSpPr>
+          <p:cNvPr id="7" name="Rectangle 6">
+            <a:extLst>
+              <a:ext uri="{FF2B5EF4-FFF2-40B4-BE49-F238E27FC236}">
+                <a16:creationId xmlns:a16="http://schemas.microsoft.com/office/drawing/2014/main" id="{B2D90F75-A901-BE97-FD59-4C9BBC8D5C90}"/>
+              </a:ext>
+            </a:extLst>
+          </p:cNvPr>
+          <p:cNvSpPr/>
+          <p:nvPr/>
+        </p:nvSpPr>
+        <p:spPr>
+          <a:xfrm>
+            <a:off x="581724" y="439041"/>
+            <a:ext cx="4114439" cy="1254399"/>
+          </a:xfrm>
+          <a:prstGeom prst="rect">
+            <a:avLst/>
+          </a:prstGeom>
+          <a:noFill/>
+          <a:ln w="0">
+            <a:noFill/>
+          </a:ln>
+        </p:spPr>
+        <p:style>
+          <a:lnRef idx="0">
+            <a:scrgbClr r="0" g="0" b="0"/>
+          </a:lnRef>
+          <a:fillRef idx="0">
+            <a:scrgbClr r="0" g="0" b="0"/>
+          </a:fillRef>
+          <a:effectRef idx="0">
+            <a:scrgbClr r="0" g="0" b="0"/>
+          </a:effectRef>
+          <a:fontRef idx="minor"/>
+        </p:style>
+        <p:txBody>
+          <a:bodyPr anchor="t">
+            <a:normAutofit/>
           </a:bodyPr>
           <a:lstStyle/>
           <a:p>
             <a:pPr defTabSz="914400">
               <a:lnSpc>
-                <a:spcPct val="150000"/>
+                <a:spcPct val="100000"/>
               </a:lnSpc>
               <a:tabLst>
                 <a:tab pos="0" algn="l"/>
               </a:tabLst>
             </a:pPr>
             <a:r>
-              <a:rPr lang="en-US" sz="1600" b="0" u="none" strike="noStrike">
+              <a:rPr lang="en-US" sz="4000">
                 <a:solidFill>
                   <a:srgbClr val="92F7FF"/>
                 </a:solidFill>
-                <a:effectLst/>
-                <a:uFillTx/>
-                <a:latin typeface="Archivo Light"/>
+                <a:latin typeface="Orbitron"/>
               </a:rPr>
-              <a:t>Hệ thống web cho phép </a:t>
+              <a:t>Mục lục</a:t>
             </a:r>
-            <a:r>
-              <a:rPr lang="en-US" sz="1600" b="0" i="1" u="none" strike="noStrike">
-                <a:solidFill>
-                  <a:srgbClr val="92F7FF"/>
-                </a:solidFill>
-                <a:effectLst/>
-                <a:uFillTx/>
-                <a:latin typeface="Archivo Light"/>
-              </a:rPr>
-              <a:t>đăng bán</a:t>
-            </a:r>
-            <a:r>
-              <a:rPr lang="en-US" sz="1600" b="0" u="none" strike="noStrike">
-                <a:solidFill>
-                  <a:srgbClr val="92F7FF"/>
-                </a:solidFill>
-                <a:effectLst/>
-                <a:uFillTx/>
-                <a:latin typeface="Archivo Light"/>
-              </a:rPr>
-              <a:t> và </a:t>
-            </a:r>
-            <a:r>
-              <a:rPr lang="en-US" sz="1600" b="0" i="1" u="none" strike="noStrike">
-                <a:solidFill>
-                  <a:srgbClr val="92F7FF"/>
-                </a:solidFill>
-                <a:effectLst/>
-                <a:uFillTx/>
-                <a:latin typeface="Archivo Light"/>
-              </a:rPr>
-              <a:t>tham gia đấu giá</a:t>
-            </a:r>
-            <a:r>
-              <a:rPr lang="en-US" sz="1600" b="0" u="none" strike="noStrike">
-                <a:solidFill>
-                  <a:srgbClr val="92F7FF"/>
-                </a:solidFill>
-                <a:effectLst/>
-                <a:uFillTx/>
-                <a:latin typeface="Archivo Light"/>
-              </a:rPr>
-              <a:t> sản phẩm điện tử theo mô hình </a:t>
-            </a:r>
-            <a:r>
-              <a:rPr lang="en-US" sz="1600" i="1">
-                <a:solidFill>
-                  <a:srgbClr val="92F7FF"/>
-                </a:solidFill>
-                <a:latin typeface="Archivo Light"/>
-              </a:rPr>
-              <a:t>đấu giá kiểu Anh.</a:t>
-            </a:r>
-            <a:endParaRPr lang="en-US" sz="1600" b="0" u="none" strike="noStrike">
+            <a:endParaRPr lang="en-US" sz="4000" b="0" u="none" strike="noStrike">
               <a:solidFill>
                 <a:srgbClr val="FFFFFF"/>
               </a:solidFill>
@@ -18500,16 +20859,71 @@
               <a:latin typeface="OpenSymbol"/>
             </a:endParaRPr>
           </a:p>
+        </p:txBody>
+      </p:sp>
+      <p:sp>
+        <p:nvSpPr>
+          <p:cNvPr id="10" name="Rectangle 9">
+            <a:extLst>
+              <a:ext uri="{FF2B5EF4-FFF2-40B4-BE49-F238E27FC236}">
+                <a16:creationId xmlns:a16="http://schemas.microsoft.com/office/drawing/2014/main" id="{C43D845D-F296-487C-63D9-347CF5DDB256}"/>
+              </a:ext>
+            </a:extLst>
+          </p:cNvPr>
+          <p:cNvSpPr/>
+          <p:nvPr/>
+        </p:nvSpPr>
+        <p:spPr>
+          <a:xfrm>
+            <a:off x="581724" y="1397993"/>
+            <a:ext cx="5474302" cy="1254399"/>
+          </a:xfrm>
+          <a:prstGeom prst="rect">
+            <a:avLst/>
+          </a:prstGeom>
+          <a:noFill/>
+          <a:ln w="0">
+            <a:noFill/>
+          </a:ln>
+        </p:spPr>
+        <p:style>
+          <a:lnRef idx="0">
+            <a:scrgbClr r="0" g="0" b="0"/>
+          </a:lnRef>
+          <a:fillRef idx="0">
+            <a:scrgbClr r="0" g="0" b="0"/>
+          </a:fillRef>
+          <a:effectRef idx="0">
+            <a:scrgbClr r="0" g="0" b="0"/>
+          </a:effectRef>
+          <a:fontRef idx="minor"/>
+        </p:style>
+        <p:txBody>
+          <a:bodyPr anchor="t">
+            <a:normAutofit/>
+          </a:bodyPr>
+          <a:lstStyle/>
           <a:p>
             <a:pPr defTabSz="914400">
               <a:lnSpc>
-                <a:spcPct val="150000"/>
+                <a:spcPct val="100000"/>
               </a:lnSpc>
               <a:tabLst>
                 <a:tab pos="0" algn="l"/>
               </a:tabLst>
             </a:pPr>
-            <a:endParaRPr lang="en-US" sz="1600" b="0" u="none" strike="noStrike">
+            <a:r>
+              <a:rPr lang="en-US" sz="3000" b="0" u="none" strike="noStrike">
+                <a:solidFill>
+                  <a:srgbClr val="92F7FF"/>
+                </a:solidFill>
+                <a:effectLst/>
+                <a:uFillTx/>
+                <a:latin typeface="Orbitron"/>
+              </a:rPr>
+              <a:t>01. Tổng quan đề tài</a:t>
+            </a:r>
+            <a:endParaRPr lang="en-US" sz="3000" b="0" u="none" strike="noStrike">
               <a:solidFill>
                 <a:srgbClr val="FFFFFF"/>
               </a:solidFill>
@@ -18518,27 +20932,139 @@
               <a:latin typeface="OpenSymbol"/>
             </a:endParaRPr>
           </a:p>
+        </p:txBody>
+      </p:sp>
+      <p:sp>
+        <p:nvSpPr>
+          <p:cNvPr id="12" name="Rectangle 11">
+            <a:extLst>
+              <a:ext uri="{FF2B5EF4-FFF2-40B4-BE49-F238E27FC236}">
+                <a16:creationId xmlns:a16="http://schemas.microsoft.com/office/drawing/2014/main" id="{E222317D-4D47-F193-02E0-267F70022C46}"/>
+              </a:ext>
+            </a:extLst>
+          </p:cNvPr>
+          <p:cNvSpPr/>
+          <p:nvPr/>
+        </p:nvSpPr>
+        <p:spPr>
+          <a:xfrm>
+            <a:off x="581724" y="2231101"/>
+            <a:ext cx="5774106" cy="1218960"/>
+          </a:xfrm>
+          <a:prstGeom prst="rect">
+            <a:avLst/>
+          </a:prstGeom>
+          <a:noFill/>
+          <a:ln w="0">
+            <a:noFill/>
+          </a:ln>
+        </p:spPr>
+        <p:style>
+          <a:lnRef idx="0">
+            <a:scrgbClr r="0" g="0" b="0"/>
+          </a:lnRef>
+          <a:fillRef idx="0">
+            <a:scrgbClr r="0" g="0" b="0"/>
+          </a:fillRef>
+          <a:effectRef idx="0">
+            <a:scrgbClr r="0" g="0" b="0"/>
+          </a:effectRef>
+          <a:fontRef idx="minor"/>
+        </p:style>
+        <p:txBody>
+          <a:bodyPr anchor="t">
+            <a:normAutofit/>
+          </a:bodyPr>
+          <a:lstStyle/>
           <a:p>
             <a:pPr defTabSz="914400">
               <a:lnSpc>
-                <a:spcPct val="150000"/>
+                <a:spcPct val="100000"/>
               </a:lnSpc>
               <a:tabLst>
                 <a:tab pos="0" algn="l"/>
               </a:tabLst>
             </a:pPr>
             <a:r>
-              <a:rPr lang="en-US" sz="1600" b="0" u="none" strike="noStrike">
+              <a:rPr lang="en-US" sz="3000" b="0" u="none" strike="noStrike">
                 <a:solidFill>
                   <a:srgbClr val="92F7FF"/>
                 </a:solidFill>
                 <a:effectLst/>
                 <a:uFillTx/>
-                <a:latin typeface="Archivo Light"/>
+                <a:latin typeface="Orbitron"/>
               </a:rPr>
-              <a:t>Tập trung vào cập nhật thời gian thực, quản lý đơn hàng và kiểm duyệt vận hành cho nền tảng thương mại điện tử.</a:t>
+              <a:t>02. Triển khai kỹ thuật</a:t>
             </a:r>
-            <a:endParaRPr lang="en-US" sz="1600" b="0" u="none" strike="noStrike">
+            <a:endParaRPr lang="en-US" sz="3000" b="0" u="none" strike="noStrike">
+              <a:solidFill>
+                <a:srgbClr val="FFFFFF"/>
+              </a:solidFill>
+              <a:effectLst/>
+              <a:uFillTx/>
+              <a:latin typeface="OpenSymbol"/>
+            </a:endParaRPr>
+          </a:p>
+        </p:txBody>
+      </p:sp>
+      <p:sp>
+        <p:nvSpPr>
+          <p:cNvPr id="14" name="Rectangle 13">
+            <a:extLst>
+              <a:ext uri="{FF2B5EF4-FFF2-40B4-BE49-F238E27FC236}">
+                <a16:creationId xmlns:a16="http://schemas.microsoft.com/office/drawing/2014/main" id="{CD57B61F-709D-951E-EA10-6D6F00ADA6A5}"/>
+              </a:ext>
+            </a:extLst>
+          </p:cNvPr>
+          <p:cNvSpPr/>
+          <p:nvPr/>
+        </p:nvSpPr>
+        <p:spPr>
+          <a:xfrm>
+            <a:off x="619199" y="3073683"/>
+            <a:ext cx="8877070" cy="914039"/>
+          </a:xfrm>
+          <a:prstGeom prst="rect">
+            <a:avLst/>
+          </a:prstGeom>
+          <a:noFill/>
+          <a:ln w="0">
+            <a:noFill/>
+          </a:ln>
+        </p:spPr>
+        <p:style>
+          <a:lnRef idx="0">
+            <a:scrgbClr r="0" g="0" b="0"/>
+          </a:lnRef>
+          <a:fillRef idx="0">
+            <a:scrgbClr r="0" g="0" b="0"/>
+          </a:fillRef>
+          <a:effectRef idx="0">
+            <a:scrgbClr r="0" g="0" b="0"/>
+          </a:effectRef>
+          <a:fontRef idx="minor"/>
+        </p:style>
+        <p:txBody>
+          <a:bodyPr anchor="t">
+            <a:noAutofit/>
+          </a:bodyPr>
+          <a:lstStyle/>
+          <a:p>
+            <a:pPr>
+              <a:tabLst>
+                <a:tab pos="0" algn="l"/>
+              </a:tabLst>
+            </a:pPr>
+            <a:r>
+              <a:rPr lang="en-US" sz="3000">
+                <a:solidFill>
+                  <a:srgbClr val="92F7FF"/>
+                </a:solidFill>
+                <a:latin typeface="Orbitron"/>
+              </a:rPr>
+              <a:t>03. Kết quả đạt được &amp; Hướng phát triển</a:t>
+            </a:r>
+            <a:endParaRPr lang="en-US" sz="3000" b="0" u="none" strike="noStrike">
               <a:solidFill>
                 <a:srgbClr val="FFFFFF"/>
               </a:solidFill>
@@ -18550,14 +21076,31 @@
         </p:txBody>
       </p:sp>
     </p:spTree>
+    <p:extLst>
+      <p:ext uri="{BB962C8B-B14F-4D97-AF65-F5344CB8AC3E}">
+        <p14:creationId xmlns:p14="http://schemas.microsoft.com/office/powerpoint/2010/main" val="1868178985"/>
+      </p:ext>
+    </p:extLst>
   </p:cSld>
   <p:clrMapOvr>
     <a:masterClrMapping/>
   </p:clrMapOvr>
+  <mc:AlternateContent xmlns:mc="http://schemas.openxmlformats.org/markup-compatibility/2006" xmlns:p159="http://schemas.microsoft.com/office/powerpoint/2015/09/main">
+    <mc:Choice Requires="p159">
+      <p:transition xmlns:p14="http://schemas.microsoft.com/office/powerpoint/2010/main" spd="slow" p14:dur="2000">
+        <p159:morph option="byObject"/>
+      </p:transition>
+    </mc:Choice>
+    <mc:Fallback xmlns="">
+      <p:transition spd="slow">
+        <p:fade/>
+      </p:transition>
+    </mc:Fallback>
+  </mc:AlternateContent>
 </p:sld>
 </file>
 
-<file path=ppt/slides/slide3.xml><?xml version="1.0" encoding="utf-8"?>
+<file path=ppt/slides/slide4.xml><?xml version="1.0" encoding="utf-8"?>
 <p:sld xmlns:a="http://schemas.openxmlformats.org/drawingml/2006/main" xmlns:r="http://schemas.openxmlformats.org/officeDocument/2006/relationships" xmlns:p="http://schemas.openxmlformats.org/presentationml/2006/main">
   <p:cSld>
     <p:spTree>
@@ -18823,10 +21366,22 @@
   <p:clrMapOvr>
     <a:masterClrMapping/>
   </p:clrMapOvr>
+  <mc:AlternateContent xmlns:mc="http://schemas.openxmlformats.org/markup-compatibility/2006" xmlns:p159="http://schemas.microsoft.com/office/powerpoint/2015/09/main">
+    <mc:Choice Requires="p159">
+      <p:transition xmlns:p14="http://schemas.microsoft.com/office/powerpoint/2010/main" spd="slow" p14:dur="2000">
+        <p159:morph option="byObject"/>
+      </p:transition>
+    </mc:Choice>
+    <mc:Fallback xmlns="">
+      <p:transition spd="slow">
+        <p:fade/>
+      </p:transition>
+    </mc:Fallback>
+  </mc:AlternateContent>
 </p:sld>
 </file>
 
-<file path=ppt/slides/slide4.xml><?xml version="1.0" encoding="utf-8"?>
+<file path=ppt/slides/slide5.xml><?xml version="1.0" encoding="utf-8"?>
 <p:sld xmlns:a="http://schemas.openxmlformats.org/drawingml/2006/main" xmlns:r="http://schemas.openxmlformats.org/officeDocument/2006/relationships" xmlns:p="http://schemas.openxmlformats.org/presentationml/2006/main">
   <p:cSld>
     <p:spTree>
@@ -18912,14 +21467,20 @@
       </p:sp>
       <p:sp>
         <p:nvSpPr>
-          <p:cNvPr id="164" name="Rectangle 163"/>
+          <p:cNvPr id="2" name="content_box">
+            <a:extLst>
+              <a:ext uri="{FF2B5EF4-FFF2-40B4-BE49-F238E27FC236}">
+                <a16:creationId xmlns:a16="http://schemas.microsoft.com/office/drawing/2014/main" id="{FDA99F7B-27E7-48B2-3A43-493FF47E8C7C}"/>
+              </a:ext>
+            </a:extLst>
+          </p:cNvPr>
           <p:cNvSpPr/>
           <p:nvPr/>
         </p:nvSpPr>
         <p:spPr>
           <a:xfrm>
-            <a:off x="619200" y="1905120"/>
-            <a:ext cx="7905240" cy="1676160"/>
+            <a:off x="264466" y="1124300"/>
+            <a:ext cx="8542255" cy="3400000"/>
           </a:xfrm>
           <a:prstGeom prst="rect">
             <a:avLst/>
@@ -18943,106 +21504,187 @@
         </p:style>
         <p:txBody>
           <a:bodyPr anchor="t">
-            <a:normAutofit fontScale="92500" lnSpcReduction="10000"/>
+            <a:normAutofit/>
           </a:bodyPr>
-          <a:lstStyle/>
+          <a:lstStyle>
+            <a:defPPr>
+              <a:defRPr lang="vi-VN"/>
+            </a:defPPr>
+            <a:lvl1pPr marL="0" algn="l" defTabSz="914400" rtl="0" eaLnBrk="1" latinLnBrk="0" hangingPunct="1">
+              <a:defRPr sz="1800" kern="1200">
+                <a:solidFill>
+                  <a:schemeClr val="tx1"/>
+                </a:solidFill>
+                <a:latin typeface="+mn-lt"/>
+                <a:ea typeface="+mn-ea"/>
+                <a:cs typeface="+mn-cs"/>
+              </a:defRPr>
+            </a:lvl1pPr>
+            <a:lvl2pPr marL="457200" algn="l" defTabSz="914400" rtl="0" eaLnBrk="1" latinLnBrk="0" hangingPunct="1">
+              <a:defRPr sz="1800" kern="1200">
+                <a:solidFill>
+                  <a:schemeClr val="tx1"/>
+                </a:solidFill>
+                <a:latin typeface="+mn-lt"/>
+                <a:ea typeface="+mn-ea"/>
+                <a:cs typeface="+mn-cs"/>
+              </a:defRPr>
+            </a:lvl2pPr>
+            <a:lvl3pPr marL="914400" algn="l" defTabSz="914400" rtl="0" eaLnBrk="1" latinLnBrk="0" hangingPunct="1">
+              <a:defRPr sz="1800" kern="1200">
+                <a:solidFill>
+                  <a:schemeClr val="tx1"/>
+                </a:solidFill>
+                <a:latin typeface="+mn-lt"/>
+                <a:ea typeface="+mn-ea"/>
+                <a:cs typeface="+mn-cs"/>
+              </a:defRPr>
+            </a:lvl3pPr>
+            <a:lvl4pPr marL="1371600" algn="l" defTabSz="914400" rtl="0" eaLnBrk="1" latinLnBrk="0" hangingPunct="1">
+              <a:defRPr sz="1800" kern="1200">
+                <a:solidFill>
+                  <a:schemeClr val="tx1"/>
+                </a:solidFill>
+                <a:latin typeface="+mn-lt"/>
+                <a:ea typeface="+mn-ea"/>
+                <a:cs typeface="+mn-cs"/>
+              </a:defRPr>
+            </a:lvl4pPr>
+            <a:lvl5pPr marL="1828800" algn="l" defTabSz="914400" rtl="0" eaLnBrk="1" latinLnBrk="0" hangingPunct="1">
+              <a:defRPr sz="1800" kern="1200">
+                <a:solidFill>
+                  <a:schemeClr val="tx1"/>
+                </a:solidFill>
+                <a:latin typeface="+mn-lt"/>
+                <a:ea typeface="+mn-ea"/>
+                <a:cs typeface="+mn-cs"/>
+              </a:defRPr>
+            </a:lvl5pPr>
+            <a:lvl6pPr marL="2286000" algn="l" defTabSz="914400" rtl="0" eaLnBrk="1" latinLnBrk="0" hangingPunct="1">
+              <a:defRPr sz="1800" kern="1200">
+                <a:solidFill>
+                  <a:schemeClr val="tx1"/>
+                </a:solidFill>
+                <a:latin typeface="+mn-lt"/>
+                <a:ea typeface="+mn-ea"/>
+                <a:cs typeface="+mn-cs"/>
+              </a:defRPr>
+            </a:lvl6pPr>
+            <a:lvl7pPr marL="2743200" algn="l" defTabSz="914400" rtl="0" eaLnBrk="1" latinLnBrk="0" hangingPunct="1">
+              <a:defRPr sz="1800" kern="1200">
+                <a:solidFill>
+                  <a:schemeClr val="tx1"/>
+                </a:solidFill>
+                <a:latin typeface="+mn-lt"/>
+                <a:ea typeface="+mn-ea"/>
+                <a:cs typeface="+mn-cs"/>
+              </a:defRPr>
+            </a:lvl7pPr>
+            <a:lvl8pPr marL="3200400" algn="l" defTabSz="914400" rtl="0" eaLnBrk="1" latinLnBrk="0" hangingPunct="1">
+              <a:defRPr sz="1800" kern="1200">
+                <a:solidFill>
+                  <a:schemeClr val="tx1"/>
+                </a:solidFill>
+                <a:latin typeface="+mn-lt"/>
+                <a:ea typeface="+mn-ea"/>
+                <a:cs typeface="+mn-cs"/>
+              </a:defRPr>
+            </a:lvl8pPr>
+            <a:lvl9pPr marL="3657600" algn="l" defTabSz="914400" rtl="0" eaLnBrk="1" latinLnBrk="0" hangingPunct="1">
+              <a:defRPr sz="1800" kern="1200">
+                <a:solidFill>
+                  <a:schemeClr val="tx1"/>
+                </a:solidFill>
+                <a:latin typeface="+mn-lt"/>
+                <a:ea typeface="+mn-ea"/>
+                <a:cs typeface="+mn-cs"/>
+              </a:defRPr>
+            </a:lvl9pPr>
+          </a:lstStyle>
           <a:p>
-            <a:pPr defTabSz="914400">
+            <a:pPr marL="342900" defTabSz="914400">
               <a:lnSpc>
-                <a:spcPct val="150000"/>
+                <a:spcPct val="130000"/>
               </a:lnSpc>
-              <a:tabLst>
-                <a:tab pos="0" algn="l"/>
-              </a:tabLst>
+              <a:buChar char="•"/>
             </a:pPr>
             <a:r>
-              <a:rPr lang="en-US" sz="1600" b="0" u="none" strike="noStrike">
+              <a:rPr lang="vi-VN" sz="1600" b="0">
                 <a:solidFill>
                   <a:srgbClr val="92F7FF"/>
                 </a:solidFill>
-                <a:effectLst/>
-                <a:uFillTx/>
                 <a:latin typeface="Archivo Light"/>
               </a:rPr>
-              <a:t>Nhu cầu mua bán thiết bị điện tử qua mạng tăng, các kênh hiện tại thiếu cơ chế minh bạch và kiểm soát rủi ro. </a:t>
+              <a:t>Nhu cầu mua bán thiết bị điện tử qua mạng ngày càng tăng</a:t>
             </a:r>
-            <a:endParaRPr lang="en-US" sz="1600" b="0" u="none" strike="noStrike">
-              <a:solidFill>
-                <a:srgbClr val="FFFFFF"/>
-              </a:solidFill>
-              <a:effectLst/>
-              <a:uFillTx/>
-              <a:latin typeface="OpenSymbol"/>
-            </a:endParaRPr>
           </a:p>
           <a:p>
-            <a:pPr defTabSz="914400">
+            <a:pPr marL="342900" defTabSz="914400">
               <a:lnSpc>
-                <a:spcPct val="150000"/>
+                <a:spcPct val="130000"/>
               </a:lnSpc>
-              <a:tabLst>
-                <a:tab pos="0" algn="l"/>
-              </a:tabLst>
+              <a:buChar char="•"/>
             </a:pPr>
-            <a:endParaRPr lang="en-US" sz="1600" b="0" u="none" strike="noStrike">
-              <a:solidFill>
-                <a:srgbClr val="FFFFFF"/>
-              </a:solidFill>
-              <a:effectLst/>
-              <a:uFillTx/>
-              <a:latin typeface="OpenSymbol"/>
-            </a:endParaRPr>
+            <a:r>
+              <a:rPr lang="vi-VN" sz="1600" b="0">
+                <a:solidFill>
+                  <a:srgbClr val="92F7FF"/>
+                </a:solidFill>
+                <a:latin typeface="Archivo Light"/>
+              </a:rPr>
+              <a:t>Các kênh hiện tại thiếu cơ chế định giá minh bạch</a:t>
+            </a:r>
           </a:p>
           <a:p>
-            <a:pPr defTabSz="914400">
+            <a:pPr marL="342900" defTabSz="914400">
               <a:lnSpc>
-                <a:spcPct val="150000"/>
+                <a:spcPct val="130000"/>
               </a:lnSpc>
-              <a:tabLst>
-                <a:tab pos="0" algn="l"/>
-              </a:tabLst>
+              <a:buChar char="•"/>
             </a:pPr>
             <a:r>
-              <a:rPr lang="en-US" sz="1600" b="0" u="none" strike="noStrike">
+              <a:rPr lang="vi-VN" sz="1600" b="0">
                 <a:solidFill>
                   <a:srgbClr val="92F7FF"/>
                 </a:solidFill>
-                <a:effectLst/>
-                <a:uFillTx/>
                 <a:latin typeface="Archivo Light"/>
               </a:rPr>
-              <a:t>Mục tiêu giải quyết: đảm bảo </a:t>
+              <a:t>Khó kiểm soát rủi ro giao dịch trực tuyến</a:t>
             </a:r>
+          </a:p>
+          <a:p>
+            <a:pPr marL="342900" defTabSz="914400">
+              <a:lnSpc>
+                <a:spcPct val="130000"/>
+              </a:lnSpc>
+              <a:buChar char="•"/>
+            </a:pPr>
             <a:r>
-              <a:rPr lang="en-US" sz="1600" b="0" i="1" u="none" strike="noStrike">
+              <a:rPr lang="vi-VN" sz="1600" b="0">
                 <a:solidFill>
                   <a:srgbClr val="92F7FF"/>
                 </a:solidFill>
-                <a:effectLst/>
-                <a:uFillTx/>
                 <a:latin typeface="Archivo Light"/>
               </a:rPr>
-              <a:t>định giá công khai</a:t>
+              <a:t>Cần nền tảng cạnh tranh công khai đẩy giá lên cao hơn</a:t>
             </a:r>
+          </a:p>
+          <a:p>
+            <a:pPr marL="342900" defTabSz="914400">
+              <a:lnSpc>
+                <a:spcPct val="130000"/>
+              </a:lnSpc>
+              <a:buChar char="•"/>
+            </a:pPr>
             <a:r>
-              <a:rPr lang="en-US" sz="1600" b="0" u="none" strike="noStrike">
+              <a:rPr lang="vi-VN" sz="1600" b="0">
                 <a:solidFill>
                   <a:srgbClr val="92F7FF"/>
                 </a:solidFill>
-                <a:effectLst/>
-                <a:uFillTx/>
                 <a:latin typeface="Archivo Light"/>
               </a:rPr>
-              <a:t>, giảm gian lận, cải thiện trải nghiệm thời gian thực và quản trị nền tảng.</a:t>
+              <a:t>Mục tiêu: đảm bảo định giá công khai, giảm gian lận, cải thiện trải nghiệm thời gian thực và quản trị nền tảng</a:t>
             </a:r>
-            <a:endParaRPr lang="en-US" sz="1600" b="0" u="none" strike="noStrike">
-              <a:solidFill>
-                <a:srgbClr val="FFFFFF"/>
-              </a:solidFill>
-              <a:effectLst/>
-              <a:uFillTx/>
-              <a:latin typeface="OpenSymbol"/>
-            </a:endParaRPr>
           </a:p>
         </p:txBody>
       </p:sp>
@@ -19051,10 +21693,22 @@
   <p:clrMapOvr>
     <a:masterClrMapping/>
   </p:clrMapOvr>
+  <mc:AlternateContent xmlns:mc="http://schemas.openxmlformats.org/markup-compatibility/2006" xmlns:p159="http://schemas.microsoft.com/office/powerpoint/2015/09/main">
+    <mc:Choice Requires="p159">
+      <p:transition xmlns:p14="http://schemas.microsoft.com/office/powerpoint/2010/main" spd="slow" p14:dur="2000">
+        <p159:morph option="byObject"/>
+      </p:transition>
+    </mc:Choice>
+    <mc:Fallback xmlns="">
+      <p:transition spd="slow">
+        <p:fade/>
+      </p:transition>
+    </mc:Fallback>
+  </mc:AlternateContent>
 </p:sld>
 </file>
 
-<file path=ppt/slides/slide5.xml><?xml version="1.0" encoding="utf-8"?>
+<file path=ppt/slides/slide6.xml><?xml version="1.0" encoding="utf-8"?>
 <p:sld xmlns:a="http://schemas.openxmlformats.org/drawingml/2006/main" xmlns:r="http://schemas.openxmlformats.org/officeDocument/2006/relationships" xmlns:p="http://schemas.openxmlformats.org/presentationml/2006/main">
   <p:cSld>
     <p:spTree>
@@ -19140,296 +21794,20 @@
       </p:sp>
       <p:sp>
         <p:nvSpPr>
-          <p:cNvPr id="166" name="Rectangle 165"/>
+          <p:cNvPr id="2" name="content_box">
+            <a:extLst>
+              <a:ext uri="{FF2B5EF4-FFF2-40B4-BE49-F238E27FC236}">
+                <a16:creationId xmlns:a16="http://schemas.microsoft.com/office/drawing/2014/main" id="{FE53A1E1-AD0D-0F45-F439-893ED6555F98}"/>
+              </a:ext>
+            </a:extLst>
+          </p:cNvPr>
           <p:cNvSpPr/>
           <p:nvPr/>
         </p:nvSpPr>
         <p:spPr>
           <a:xfrm>
-            <a:off x="619200" y="1905120"/>
-            <a:ext cx="7905240" cy="1676160"/>
-          </a:xfrm>
-          <a:prstGeom prst="rect">
-            <a:avLst/>
-          </a:prstGeom>
-          <a:noFill/>
-          <a:ln w="0">
-            <a:noFill/>
-          </a:ln>
-        </p:spPr>
-        <p:style>
-          <a:lnRef idx="0">
-            <a:scrgbClr r="0" g="0" b="0"/>
-          </a:lnRef>
-          <a:fillRef idx="0">
-            <a:scrgbClr r="0" g="0" b="0"/>
-          </a:fillRef>
-          <a:effectRef idx="0">
-            <a:scrgbClr r="0" g="0" b="0"/>
-          </a:effectRef>
-          <a:fontRef idx="minor"/>
-        </p:style>
-        <p:txBody>
-          <a:bodyPr anchor="t">
-            <a:normAutofit fontScale="92500" lnSpcReduction="10000"/>
-          </a:bodyPr>
-          <a:lstStyle/>
-          <a:p>
-            <a:pPr defTabSz="914400">
-              <a:lnSpc>
-                <a:spcPct val="150000"/>
-              </a:lnSpc>
-              <a:tabLst>
-                <a:tab pos="0" algn="l"/>
-              </a:tabLst>
-            </a:pPr>
-            <a:r>
-              <a:rPr lang="en-US" sz="1600" b="0" u="none" strike="noStrike">
-                <a:solidFill>
-                  <a:srgbClr val="92F7FF"/>
-                </a:solidFill>
-                <a:effectLst/>
-                <a:uFillTx/>
-                <a:latin typeface="Archivo Light"/>
-              </a:rPr>
-              <a:t>Mục tiêu: xây dựng hệ thống đầy đủ tính năng đấu giá, WebSocket cho cập nhật thời gian thực, cơ chế </a:t>
-            </a:r>
-            <a:r>
-              <a:rPr lang="en-US" sz="1600" b="0" i="1" u="none" strike="noStrike">
-                <a:solidFill>
-                  <a:srgbClr val="92F7FF"/>
-                </a:solidFill>
-                <a:effectLst/>
-                <a:uFillTx/>
-                <a:latin typeface="Archivo Light"/>
-              </a:rPr>
-              <a:t>anti-sniping</a:t>
-            </a:r>
-            <a:r>
-              <a:rPr lang="en-US" sz="1600" b="0" u="none" strike="noStrike">
-                <a:solidFill>
-                  <a:srgbClr val="92F7FF"/>
-                </a:solidFill>
-                <a:effectLst/>
-                <a:uFillTx/>
-                <a:latin typeface="Archivo Light"/>
-              </a:rPr>
-              <a:t>, quản lý đơn hàng và thông báo. </a:t>
-            </a:r>
-            <a:endParaRPr lang="en-US" sz="1600" b="0" u="none" strike="noStrike">
-              <a:solidFill>
-                <a:srgbClr val="FFFFFF"/>
-              </a:solidFill>
-              <a:effectLst/>
-              <a:uFillTx/>
-              <a:latin typeface="OpenSymbol"/>
-            </a:endParaRPr>
-          </a:p>
-          <a:p>
-            <a:pPr defTabSz="914400">
-              <a:lnSpc>
-                <a:spcPct val="150000"/>
-              </a:lnSpc>
-              <a:tabLst>
-                <a:tab pos="0" algn="l"/>
-              </a:tabLst>
-            </a:pPr>
-            <a:endParaRPr lang="en-US" sz="1600" b="0" u="none" strike="noStrike">
-              <a:solidFill>
-                <a:srgbClr val="FFFFFF"/>
-              </a:solidFill>
-              <a:effectLst/>
-              <a:uFillTx/>
-              <a:latin typeface="OpenSymbol"/>
-            </a:endParaRPr>
-          </a:p>
-          <a:p>
-            <a:pPr defTabSz="914400">
-              <a:lnSpc>
-                <a:spcPct val="150000"/>
-              </a:lnSpc>
-              <a:tabLst>
-                <a:tab pos="0" algn="l"/>
-              </a:tabLst>
-            </a:pPr>
-            <a:r>
-              <a:rPr lang="en-US" sz="1600" b="0" u="none" strike="noStrike">
-                <a:solidFill>
-                  <a:srgbClr val="92F7FF"/>
-                </a:solidFill>
-                <a:effectLst/>
-                <a:uFillTx/>
-                <a:latin typeface="Archivo Light"/>
-              </a:rPr>
-              <a:t>Phạm vi: triển khai web (frontend + backend + MySQL), mô phỏng thanh toán, không bao gồm tích hợp cổng thanh toán thực tế.</a:t>
-            </a:r>
-            <a:endParaRPr lang="en-US" sz="1600" b="0" u="none" strike="noStrike">
-              <a:solidFill>
-                <a:srgbClr val="FFFFFF"/>
-              </a:solidFill>
-              <a:effectLst/>
-              <a:uFillTx/>
-              <a:latin typeface="OpenSymbol"/>
-            </a:endParaRPr>
-          </a:p>
-        </p:txBody>
-      </p:sp>
-    </p:spTree>
-  </p:cSld>
-  <p:clrMapOvr>
-    <a:masterClrMapping/>
-  </p:clrMapOvr>
-</p:sld>
-</file>
-
-<file path=ppt/slides/slide6.xml><?xml version="1.0" encoding="utf-8"?>
-<p:sld xmlns:a="http://schemas.openxmlformats.org/drawingml/2006/main" xmlns:r="http://schemas.openxmlformats.org/officeDocument/2006/relationships" xmlns:p="http://schemas.openxmlformats.org/presentationml/2006/main">
-  <p:cSld>
-    <p:spTree>
-      <p:nvGrpSpPr>
-        <p:cNvPr id="1" name=""/>
-        <p:cNvGrpSpPr/>
-        <p:nvPr/>
-      </p:nvGrpSpPr>
-      <p:grpSpPr>
-        <a:xfrm>
-          <a:off x="0" y="0"/>
-          <a:ext cx="0" cy="0"/>
-          <a:chOff x="0" y="0"/>
-          <a:chExt cx="0" cy="0"/>
-        </a:xfrm>
-      </p:grpSpPr>
-      <p:sp>
-        <p:nvSpPr>
-          <p:cNvPr id="167" name="image_0:slide_img_cnhHNK.jpg"/>
-          <p:cNvSpPr/>
-          <p:nvPr/>
-        </p:nvSpPr>
-        <p:spPr>
-          <a:xfrm>
-            <a:off x="4800600" y="257040"/>
-            <a:ext cx="4114440" cy="4628880"/>
-          </a:xfrm>
-          <a:prstGeom prst="roundRect">
-            <a:avLst>
-              <a:gd name="adj" fmla="val 16667"/>
-            </a:avLst>
-          </a:prstGeom>
-          <a:blipFill rotWithShape="0">
-            <a:blip r:embed="rId2"/>
-            <a:srcRect/>
-            <a:stretch/>
-          </a:blipFill>
-          <a:ln w="0">
-            <a:noFill/>
-          </a:ln>
-        </p:spPr>
-        <p:style>
-          <a:lnRef idx="0">
-            <a:scrgbClr r="0" g="0" b="0"/>
-          </a:lnRef>
-          <a:fillRef idx="0">
-            <a:scrgbClr r="0" g="0" b="0"/>
-          </a:fillRef>
-          <a:effectRef idx="0">
-            <a:scrgbClr r="0" g="0" b="0"/>
-          </a:effectRef>
-          <a:fontRef idx="minor"/>
-        </p:style>
-        <p:txBody>
-          <a:bodyPr lIns="90000" tIns="45000" rIns="90000" bIns="45000" anchor="t">
-            <a:noAutofit/>
-          </a:bodyPr>
-          <a:lstStyle/>
-          <a:p>
-            <a:endParaRPr lang="en-US" sz="1800" b="0" u="none" strike="noStrike">
-              <a:solidFill>
-                <a:srgbClr val="000000"/>
-              </a:solidFill>
-              <a:effectLst/>
-              <a:uFillTx/>
-              <a:latin typeface="OpenSymbol"/>
-            </a:endParaRPr>
-          </a:p>
-        </p:txBody>
-      </p:sp>
-      <p:sp>
-        <p:nvSpPr>
-          <p:cNvPr id="168" name="Rectangle 167"/>
-          <p:cNvSpPr/>
-          <p:nvPr/>
-        </p:nvSpPr>
-        <p:spPr>
-          <a:xfrm>
-            <a:off x="619200" y="619200"/>
-            <a:ext cx="3476160" cy="361440"/>
-          </a:xfrm>
-          <a:prstGeom prst="rect">
-            <a:avLst/>
-          </a:prstGeom>
-          <a:noFill/>
-          <a:ln w="0">
-            <a:noFill/>
-          </a:ln>
-        </p:spPr>
-        <p:style>
-          <a:lnRef idx="0">
-            <a:scrgbClr r="0" g="0" b="0"/>
-          </a:lnRef>
-          <a:fillRef idx="0">
-            <a:scrgbClr r="0" g="0" b="0"/>
-          </a:fillRef>
-          <a:effectRef idx="0">
-            <a:scrgbClr r="0" g="0" b="0"/>
-          </a:effectRef>
-          <a:fontRef idx="minor"/>
-        </p:style>
-        <p:txBody>
-          <a:bodyPr anchor="t">
-            <a:normAutofit fontScale="85000" lnSpcReduction="19999"/>
-          </a:bodyPr>
-          <a:lstStyle/>
-          <a:p>
-            <a:pPr defTabSz="914400">
-              <a:lnSpc>
-                <a:spcPct val="100000"/>
-              </a:lnSpc>
-              <a:tabLst>
-                <a:tab pos="0" algn="l"/>
-              </a:tabLst>
-            </a:pPr>
-            <a:r>
-              <a:rPr lang="en-US" sz="2400" b="0" u="none" strike="noStrike">
-                <a:solidFill>
-                  <a:srgbClr val="92F7FF"/>
-                </a:solidFill>
-                <a:effectLst/>
-                <a:uFillTx/>
-                <a:latin typeface="Orbitron"/>
-              </a:rPr>
-              <a:t>Tính mới mẻ &amp; Ứng dụng</a:t>
-            </a:r>
-            <a:endParaRPr lang="en-US" sz="2400" b="0" u="none" strike="noStrike">
-              <a:solidFill>
-                <a:srgbClr val="FFFFFF"/>
-              </a:solidFill>
-              <a:effectLst/>
-              <a:uFillTx/>
-              <a:latin typeface="OpenSymbol"/>
-            </a:endParaRPr>
-          </a:p>
-        </p:txBody>
-      </p:sp>
-      <p:sp>
-        <p:nvSpPr>
-          <p:cNvPr id="169" name="Rectangle 168"/>
-          <p:cNvSpPr/>
-          <p:nvPr/>
-        </p:nvSpPr>
-        <p:spPr>
-          <a:xfrm>
-            <a:off x="619200" y="1905120"/>
-            <a:ext cx="3476160" cy="3200040"/>
+            <a:off x="324530" y="1124300"/>
+            <a:ext cx="8062466" cy="3400000"/>
           </a:xfrm>
           <a:prstGeom prst="rect">
             <a:avLst/>
@@ -19455,147 +21833,297 @@
           <a:bodyPr anchor="t">
             <a:normAutofit/>
           </a:bodyPr>
-          <a:lstStyle/>
+          <a:lstStyle>
+            <a:defPPr>
+              <a:defRPr lang="vi-VN"/>
+            </a:defPPr>
+            <a:lvl1pPr marL="0" algn="l" defTabSz="914400" rtl="0" eaLnBrk="1" latinLnBrk="0" hangingPunct="1">
+              <a:defRPr sz="1800" kern="1200">
+                <a:solidFill>
+                  <a:schemeClr val="tx1"/>
+                </a:solidFill>
+                <a:latin typeface="+mn-lt"/>
+                <a:ea typeface="+mn-ea"/>
+                <a:cs typeface="+mn-cs"/>
+              </a:defRPr>
+            </a:lvl1pPr>
+            <a:lvl2pPr marL="457200" algn="l" defTabSz="914400" rtl="0" eaLnBrk="1" latinLnBrk="0" hangingPunct="1">
+              <a:defRPr sz="1800" kern="1200">
+                <a:solidFill>
+                  <a:schemeClr val="tx1"/>
+                </a:solidFill>
+                <a:latin typeface="+mn-lt"/>
+                <a:ea typeface="+mn-ea"/>
+                <a:cs typeface="+mn-cs"/>
+              </a:defRPr>
+            </a:lvl2pPr>
+            <a:lvl3pPr marL="914400" algn="l" defTabSz="914400" rtl="0" eaLnBrk="1" latinLnBrk="0" hangingPunct="1">
+              <a:defRPr sz="1800" kern="1200">
+                <a:solidFill>
+                  <a:schemeClr val="tx1"/>
+                </a:solidFill>
+                <a:latin typeface="+mn-lt"/>
+                <a:ea typeface="+mn-ea"/>
+                <a:cs typeface="+mn-cs"/>
+              </a:defRPr>
+            </a:lvl3pPr>
+            <a:lvl4pPr marL="1371600" algn="l" defTabSz="914400" rtl="0" eaLnBrk="1" latinLnBrk="0" hangingPunct="1">
+              <a:defRPr sz="1800" kern="1200">
+                <a:solidFill>
+                  <a:schemeClr val="tx1"/>
+                </a:solidFill>
+                <a:latin typeface="+mn-lt"/>
+                <a:ea typeface="+mn-ea"/>
+                <a:cs typeface="+mn-cs"/>
+              </a:defRPr>
+            </a:lvl4pPr>
+            <a:lvl5pPr marL="1828800" algn="l" defTabSz="914400" rtl="0" eaLnBrk="1" latinLnBrk="0" hangingPunct="1">
+              <a:defRPr sz="1800" kern="1200">
+                <a:solidFill>
+                  <a:schemeClr val="tx1"/>
+                </a:solidFill>
+                <a:latin typeface="+mn-lt"/>
+                <a:ea typeface="+mn-ea"/>
+                <a:cs typeface="+mn-cs"/>
+              </a:defRPr>
+            </a:lvl5pPr>
+            <a:lvl6pPr marL="2286000" algn="l" defTabSz="914400" rtl="0" eaLnBrk="1" latinLnBrk="0" hangingPunct="1">
+              <a:defRPr sz="1800" kern="1200">
+                <a:solidFill>
+                  <a:schemeClr val="tx1"/>
+                </a:solidFill>
+                <a:latin typeface="+mn-lt"/>
+                <a:ea typeface="+mn-ea"/>
+                <a:cs typeface="+mn-cs"/>
+              </a:defRPr>
+            </a:lvl6pPr>
+            <a:lvl7pPr marL="2743200" algn="l" defTabSz="914400" rtl="0" eaLnBrk="1" latinLnBrk="0" hangingPunct="1">
+              <a:defRPr sz="1800" kern="1200">
+                <a:solidFill>
+                  <a:schemeClr val="tx1"/>
+                </a:solidFill>
+                <a:latin typeface="+mn-lt"/>
+                <a:ea typeface="+mn-ea"/>
+                <a:cs typeface="+mn-cs"/>
+              </a:defRPr>
+            </a:lvl7pPr>
+            <a:lvl8pPr marL="3200400" algn="l" defTabSz="914400" rtl="0" eaLnBrk="1" latinLnBrk="0" hangingPunct="1">
+              <a:defRPr sz="1800" kern="1200">
+                <a:solidFill>
+                  <a:schemeClr val="tx1"/>
+                </a:solidFill>
+                <a:latin typeface="+mn-lt"/>
+                <a:ea typeface="+mn-ea"/>
+                <a:cs typeface="+mn-cs"/>
+              </a:defRPr>
+            </a:lvl8pPr>
+            <a:lvl9pPr marL="3657600" algn="l" defTabSz="914400" rtl="0" eaLnBrk="1" latinLnBrk="0" hangingPunct="1">
+              <a:defRPr sz="1800" kern="1200">
+                <a:solidFill>
+                  <a:schemeClr val="tx1"/>
+                </a:solidFill>
+                <a:latin typeface="+mn-lt"/>
+                <a:ea typeface="+mn-ea"/>
+                <a:cs typeface="+mn-cs"/>
+              </a:defRPr>
+            </a:lvl9pPr>
+          </a:lstStyle>
           <a:p>
-            <a:pPr defTabSz="914400">
+            <a:pPr marL="342900" defTabSz="914400">
               <a:lnSpc>
-                <a:spcPct val="150000"/>
+                <a:spcPct val="130000"/>
               </a:lnSpc>
-              <a:tabLst>
-                <a:tab pos="0" algn="l"/>
-              </a:tabLst>
             </a:pPr>
             <a:r>
-              <a:rPr lang="en-US" sz="1600" b="0" u="none" strike="noStrike">
+              <a:rPr lang="vi-VN" sz="1600" b="0">
                 <a:solidFill>
                   <a:srgbClr val="92F7FF"/>
                 </a:solidFill>
-                <a:effectLst/>
-                <a:uFillTx/>
                 <a:latin typeface="Archivo Light"/>
               </a:rPr>
-              <a:t>Hệ thống áp dụng </a:t>
+              <a:t>Mục tiêu:</a:t>
             </a:r>
-            <a:r>
-              <a:rPr lang="en-US" sz="1600" b="0" i="1" u="none" strike="noStrike">
-                <a:solidFill>
-                  <a:srgbClr val="92F7FF"/>
-                </a:solidFill>
-                <a:effectLst/>
-                <a:uFillTx/>
-                <a:latin typeface="Archivo Light"/>
-              </a:rPr>
-              <a:t>English Auction</a:t>
-            </a:r>
-            <a:r>
-              <a:rPr lang="en-US" sz="1600" b="0" u="none" strike="noStrike">
-                <a:solidFill>
-                  <a:srgbClr val="92F7FF"/>
-                </a:solidFill>
-                <a:effectLst/>
-                <a:uFillTx/>
-                <a:latin typeface="Archivo Light"/>
-              </a:rPr>
-              <a:t> kết hợp </a:t>
-            </a:r>
-            <a:r>
-              <a:rPr lang="en-US" sz="1600" b="1" u="none" strike="noStrike">
-                <a:solidFill>
-                  <a:srgbClr val="92F7FF"/>
-                </a:solidFill>
-                <a:effectLst/>
-                <a:uFillTx/>
-                <a:latin typeface="Archivo Light"/>
-              </a:rPr>
-              <a:t>WebSocket (anti‑sniping)</a:t>
-            </a:r>
-            <a:r>
-              <a:rPr lang="en-US" sz="1600" b="0" u="none" strike="noStrike">
-                <a:solidFill>
-                  <a:srgbClr val="92F7FF"/>
-                </a:solidFill>
-                <a:effectLst/>
-                <a:uFillTx/>
-                <a:latin typeface="Archivo Light"/>
-              </a:rPr>
-              <a:t> và </a:t>
-            </a:r>
-            <a:r>
-              <a:rPr lang="en-US" sz="1600" b="1" u="none" strike="noStrike">
-                <a:solidFill>
-                  <a:srgbClr val="92F7FF"/>
-                </a:solidFill>
-                <a:effectLst/>
-                <a:uFillTx/>
-                <a:latin typeface="Archivo Light"/>
-              </a:rPr>
-              <a:t>Optimistic Locking</a:t>
-            </a:r>
-            <a:r>
-              <a:rPr lang="en-US" sz="1600" b="0" u="none" strike="noStrike">
-                <a:solidFill>
-                  <a:srgbClr val="92F7FF"/>
-                </a:solidFill>
-                <a:effectLst/>
-                <a:uFillTx/>
-                <a:latin typeface="Archivo Light"/>
-              </a:rPr>
-              <a:t> để cập nhật thời gian thực và giảm tranh chấp giao dịch. </a:t>
-            </a:r>
-            <a:endParaRPr lang="en-US" sz="1600" b="0" u="none" strike="noStrike">
+            <a:endParaRPr lang="vi-VN" sz="1600">
               <a:solidFill>
-                <a:srgbClr val="FFFFFF"/>
+                <a:srgbClr val="92F7FF"/>
               </a:solidFill>
-              <a:effectLst/>
-              <a:uFillTx/>
-              <a:latin typeface="OpenSymbol"/>
+              <a:latin typeface="Archivo Light"/>
             </a:endParaRPr>
           </a:p>
           <a:p>
-            <a:pPr defTabSz="914400">
+            <a:pPr marL="342900">
               <a:lnSpc>
-                <a:spcPct val="150000"/>
+                <a:spcPct val="130000"/>
               </a:lnSpc>
-              <a:tabLst>
-                <a:tab pos="0" algn="l"/>
-              </a:tabLst>
+              <a:buFontTx/>
+              <a:buChar char="•"/>
             </a:pPr>
-            <a:endParaRPr lang="en-US" sz="1600" b="0" u="none" strike="noStrike">
+            <a:r>
+              <a:rPr lang="vi-VN" sz="1600">
+                <a:solidFill>
+                  <a:srgbClr val="92F7FF"/>
+                </a:solidFill>
+                <a:latin typeface="Archivo Light"/>
+              </a:rPr>
+              <a:t>Xây dựng hệ thống đầy đủ tính năng đấu giá</a:t>
+            </a:r>
+          </a:p>
+          <a:p>
+            <a:pPr marL="342900">
+              <a:lnSpc>
+                <a:spcPct val="130000"/>
+              </a:lnSpc>
+              <a:buFontTx/>
+              <a:buChar char="•"/>
+            </a:pPr>
+            <a:r>
+              <a:rPr lang="vi-VN" sz="1600">
+                <a:solidFill>
+                  <a:srgbClr val="92F7FF"/>
+                </a:solidFill>
+                <a:latin typeface="Archivo Light"/>
+              </a:rPr>
+              <a:t>Cập nhật thời gian thực qua WebSocket</a:t>
+            </a:r>
+            <a:endParaRPr lang="vi-VN" sz="1600" b="0">
               <a:solidFill>
-                <a:srgbClr val="FFFFFF"/>
+                <a:srgbClr val="92F7FF"/>
               </a:solidFill>
-              <a:effectLst/>
-              <a:uFillTx/>
-              <a:latin typeface="OpenSymbol"/>
+              <a:latin typeface="Archivo Light"/>
             </a:endParaRPr>
           </a:p>
           <a:p>
-            <a:pPr defTabSz="914400">
+            <a:pPr marL="342900" defTabSz="914400">
               <a:lnSpc>
-                <a:spcPct val="150000"/>
+                <a:spcPct val="130000"/>
               </a:lnSpc>
-              <a:tabLst>
-                <a:tab pos="0" algn="l"/>
-              </a:tabLst>
+              <a:buChar char="•"/>
             </a:pPr>
             <a:r>
-              <a:rPr lang="en-US" sz="1600" b="0" u="none" strike="noStrike">
+              <a:rPr lang="vi-VN" sz="1600" b="0">
                 <a:solidFill>
                   <a:srgbClr val="92F7FF"/>
                 </a:solidFill>
-                <a:effectLst/>
-                <a:uFillTx/>
                 <a:latin typeface="Archivo Light"/>
               </a:rPr>
-              <a:t>Ứng dụng: sàn đấu giá thiết bị điện tử, quản lý đơn hàng, thông báo, kiểm duyệt vi phạm, báo cáo vận hành.</a:t>
+              <a:t>Cơ chế Anti-Sniping chống canh giờ chốt</a:t>
             </a:r>
-            <a:endParaRPr lang="en-US" sz="1600" b="0" u="none" strike="noStrike">
+          </a:p>
+          <a:p>
+            <a:pPr marL="342900" defTabSz="914400">
+              <a:lnSpc>
+                <a:spcPct val="130000"/>
+              </a:lnSpc>
+              <a:buChar char="•"/>
+            </a:pPr>
+            <a:r>
+              <a:rPr lang="vi-VN" sz="1600" b="0">
+                <a:solidFill>
+                  <a:srgbClr val="92F7FF"/>
+                </a:solidFill>
+                <a:latin typeface="Archivo Light"/>
+              </a:rPr>
+              <a:t>Optimistic Locking đảm bảo nhất quán dữ liệu</a:t>
+            </a:r>
+          </a:p>
+          <a:p>
+            <a:pPr marL="342900" defTabSz="914400">
+              <a:lnSpc>
+                <a:spcPct val="130000"/>
+              </a:lnSpc>
+              <a:buChar char="•"/>
+            </a:pPr>
+            <a:r>
+              <a:rPr lang="vi-VN" sz="1600" b="0">
+                <a:solidFill>
+                  <a:srgbClr val="92F7FF"/>
+                </a:solidFill>
+                <a:latin typeface="Archivo Light"/>
+              </a:rPr>
+              <a:t>Quản lý đơn hàng, thông báo, kiểm duyệt vi phạm</a:t>
+            </a:r>
+          </a:p>
+          <a:p>
+            <a:pPr marL="342900" defTabSz="914400">
+              <a:lnSpc>
+                <a:spcPct val="130000"/>
+              </a:lnSpc>
+            </a:pPr>
+            <a:endParaRPr lang="vi-VN" sz="1600" b="0">
               <a:solidFill>
-                <a:srgbClr val="FFFFFF"/>
+                <a:srgbClr val="92F7FF"/>
               </a:solidFill>
-              <a:effectLst/>
-              <a:uFillTx/>
-              <a:latin typeface="OpenSymbol"/>
+              <a:latin typeface="Archivo Light"/>
+            </a:endParaRPr>
+          </a:p>
+          <a:p>
+            <a:pPr marL="342900" defTabSz="914400">
+              <a:lnSpc>
+                <a:spcPct val="130000"/>
+              </a:lnSpc>
+            </a:pPr>
+            <a:r>
+              <a:rPr lang="vi-VN" sz="1600" b="0">
+                <a:solidFill>
+                  <a:srgbClr val="92F7FF"/>
+                </a:solidFill>
+                <a:latin typeface="Archivo Light"/>
+              </a:rPr>
+              <a:t>Phạm vi:</a:t>
+            </a:r>
+          </a:p>
+          <a:p>
+            <a:pPr marL="342900" defTabSz="914400">
+              <a:lnSpc>
+                <a:spcPct val="130000"/>
+              </a:lnSpc>
+              <a:buChar char="•"/>
+            </a:pPr>
+            <a:r>
+              <a:rPr lang="vi-VN" sz="1600">
+                <a:solidFill>
+                  <a:srgbClr val="92F7FF"/>
+                </a:solidFill>
+                <a:latin typeface="Archivo Light"/>
+              </a:rPr>
+              <a:t>Triển khai web, mô phỏng thanh toán</a:t>
+            </a:r>
+            <a:endParaRPr lang="vi-VN" sz="1600" b="0">
+              <a:solidFill>
+                <a:srgbClr val="92F7FF"/>
+              </a:solidFill>
+              <a:latin typeface="Archivo Light"/>
+            </a:endParaRPr>
+          </a:p>
+          <a:p>
+            <a:pPr marL="342900" defTabSz="914400">
+              <a:lnSpc>
+                <a:spcPct val="130000"/>
+              </a:lnSpc>
+              <a:buChar char="•"/>
+            </a:pPr>
+            <a:r>
+              <a:rPr lang="vi-VN" sz="1600">
+                <a:solidFill>
+                  <a:srgbClr val="92F7FF"/>
+                </a:solidFill>
+                <a:latin typeface="Archivo Light"/>
+              </a:rPr>
+              <a:t>Không bao gồm: cổng thanh toán thực, ứng dụng di động</a:t>
+            </a:r>
+          </a:p>
+          <a:p>
+            <a:pPr marL="342900" defTabSz="914400">
+              <a:lnSpc>
+                <a:spcPct val="130000"/>
+              </a:lnSpc>
+              <a:buChar char="•"/>
+            </a:pPr>
+            <a:endParaRPr lang="vi-VN" sz="1600" b="0">
+              <a:solidFill>
+                <a:srgbClr val="92F7FF"/>
+              </a:solidFill>
+              <a:latin typeface="Archivo Light"/>
             </a:endParaRPr>
           </a:p>
         </p:txBody>
@@ -19605,6 +22133,18 @@
   <p:clrMapOvr>
     <a:masterClrMapping/>
   </p:clrMapOvr>
+  <mc:AlternateContent xmlns:mc="http://schemas.openxmlformats.org/markup-compatibility/2006" xmlns:p159="http://schemas.microsoft.com/office/powerpoint/2015/09/main">
+    <mc:Choice Requires="p159">
+      <p:transition xmlns:p14="http://schemas.microsoft.com/office/powerpoint/2010/main" spd="slow" p14:dur="2000">
+        <p159:morph option="byObject"/>
+      </p:transition>
+    </mc:Choice>
+    <mc:Fallback xmlns="">
+      <p:transition spd="slow">
+        <p:fade/>
+      </p:transition>
+    </mc:Fallback>
+  </mc:AlternateContent>
 </p:sld>
 </file>
 
@@ -19755,7 +22295,7 @@
         <p:spPr>
           <a:xfrm>
             <a:off x="5048280" y="1428840"/>
-            <a:ext cx="3476160" cy="1218960"/>
+            <a:ext cx="4043254" cy="1218960"/>
           </a:xfrm>
           <a:prstGeom prst="rect">
             <a:avLst/>
@@ -19779,7 +22319,7 @@
         </p:style>
         <p:txBody>
           <a:bodyPr anchor="t">
-            <a:normAutofit lnSpcReduction="10000"/>
+            <a:normAutofit/>
           </a:bodyPr>
           <a:lstStyle/>
           <a:p>
@@ -19874,245 +22414,22 @@
   <p:clrMapOvr>
     <a:masterClrMapping/>
   </p:clrMapOvr>
+  <mc:AlternateContent xmlns:mc="http://schemas.openxmlformats.org/markup-compatibility/2006" xmlns:p159="http://schemas.microsoft.com/office/powerpoint/2015/09/main">
+    <mc:Choice Requires="p159">
+      <p:transition xmlns:p14="http://schemas.microsoft.com/office/powerpoint/2010/main" spd="slow" p14:dur="2000">
+        <p159:morph option="byObject"/>
+      </p:transition>
+    </mc:Choice>
+    <mc:Fallback xmlns="">
+      <p:transition spd="slow">
+        <p:fade/>
+      </p:transition>
+    </mc:Fallback>
+  </mc:AlternateContent>
 </p:sld>
 </file>
 
 <file path=ppt/slides/slide8.xml><?xml version="1.0" encoding="utf-8"?>
-<p:sld xmlns:a="http://schemas.openxmlformats.org/drawingml/2006/main" xmlns:r="http://schemas.openxmlformats.org/officeDocument/2006/relationships" xmlns:p="http://schemas.openxmlformats.org/presentationml/2006/main">
-  <p:cSld>
-    <p:spTree>
-      <p:nvGrpSpPr>
-        <p:cNvPr id="1" name=""/>
-        <p:cNvGrpSpPr/>
-        <p:nvPr/>
-      </p:nvGrpSpPr>
-      <p:grpSpPr>
-        <a:xfrm>
-          <a:off x="0" y="0"/>
-          <a:ext cx="0" cy="0"/>
-          <a:chOff x="0" y="0"/>
-          <a:chExt cx="0" cy="0"/>
-        </a:xfrm>
-      </p:grpSpPr>
-      <p:sp>
-        <p:nvSpPr>
-          <p:cNvPr id="174" name="image_0:slide_img_majGOK.jpg"/>
-          <p:cNvSpPr/>
-          <p:nvPr/>
-        </p:nvSpPr>
-        <p:spPr>
-          <a:xfrm>
-            <a:off x="228600" y="257040"/>
-            <a:ext cx="4114440" cy="4628880"/>
-          </a:xfrm>
-          <a:prstGeom prst="roundRect">
-            <a:avLst>
-              <a:gd name="adj" fmla="val 16667"/>
-            </a:avLst>
-          </a:prstGeom>
-          <a:blipFill rotWithShape="0">
-            <a:blip r:embed="rId2"/>
-            <a:srcRect/>
-            <a:stretch/>
-          </a:blipFill>
-          <a:ln w="0">
-            <a:noFill/>
-          </a:ln>
-        </p:spPr>
-        <p:style>
-          <a:lnRef idx="0">
-            <a:scrgbClr r="0" g="0" b="0"/>
-          </a:lnRef>
-          <a:fillRef idx="0">
-            <a:scrgbClr r="0" g="0" b="0"/>
-          </a:fillRef>
-          <a:effectRef idx="0">
-            <a:scrgbClr r="0" g="0" b="0"/>
-          </a:effectRef>
-          <a:fontRef idx="minor"/>
-        </p:style>
-        <p:txBody>
-          <a:bodyPr lIns="90000" tIns="45000" rIns="90000" bIns="45000" anchor="t">
-            <a:noAutofit/>
-          </a:bodyPr>
-          <a:lstStyle/>
-          <a:p>
-            <a:endParaRPr lang="en-US" sz="1800" b="0" u="none" strike="noStrike">
-              <a:solidFill>
-                <a:srgbClr val="000000"/>
-              </a:solidFill>
-              <a:effectLst/>
-              <a:uFillTx/>
-              <a:latin typeface="OpenSymbol"/>
-            </a:endParaRPr>
-          </a:p>
-        </p:txBody>
-      </p:sp>
-      <p:sp>
-        <p:nvSpPr>
-          <p:cNvPr id="175" name="Rectangle 174"/>
-          <p:cNvSpPr/>
-          <p:nvPr/>
-        </p:nvSpPr>
-        <p:spPr>
-          <a:xfrm>
-            <a:off x="5048280" y="619200"/>
-            <a:ext cx="3476160" cy="1095120"/>
-          </a:xfrm>
-          <a:prstGeom prst="rect">
-            <a:avLst/>
-          </a:prstGeom>
-          <a:noFill/>
-          <a:ln w="0">
-            <a:noFill/>
-          </a:ln>
-        </p:spPr>
-        <p:style>
-          <a:lnRef idx="0">
-            <a:scrgbClr r="0" g="0" b="0"/>
-          </a:lnRef>
-          <a:fillRef idx="0">
-            <a:scrgbClr r="0" g="0" b="0"/>
-          </a:fillRef>
-          <a:effectRef idx="0">
-            <a:scrgbClr r="0" g="0" b="0"/>
-          </a:effectRef>
-          <a:fontRef idx="minor"/>
-        </p:style>
-        <p:txBody>
-          <a:bodyPr anchor="t">
-            <a:normAutofit/>
-          </a:bodyPr>
-          <a:lstStyle/>
-          <a:p>
-            <a:pPr defTabSz="914400">
-              <a:lnSpc>
-                <a:spcPct val="100000"/>
-              </a:lnSpc>
-              <a:tabLst>
-                <a:tab pos="0" algn="l"/>
-              </a:tabLst>
-            </a:pPr>
-            <a:r>
-              <a:rPr lang="en-US" sz="2400" b="0" u="none" strike="noStrike">
-                <a:solidFill>
-                  <a:srgbClr val="92F7FF"/>
-                </a:solidFill>
-                <a:effectLst/>
-                <a:uFillTx/>
-                <a:latin typeface="Orbitron"/>
-              </a:rPr>
-              <a:t>Kiến trúc &amp; Luồng dữ liệu (ERD, REST, WebSocket)</a:t>
-            </a:r>
-            <a:endParaRPr lang="en-US" sz="2400" b="0" u="none" strike="noStrike">
-              <a:solidFill>
-                <a:srgbClr val="FFFFFF"/>
-              </a:solidFill>
-              <a:effectLst/>
-              <a:uFillTx/>
-              <a:latin typeface="OpenSymbol"/>
-            </a:endParaRPr>
-          </a:p>
-        </p:txBody>
-      </p:sp>
-      <p:sp>
-        <p:nvSpPr>
-          <p:cNvPr id="176" name="Rectangle 175"/>
-          <p:cNvSpPr/>
-          <p:nvPr/>
-        </p:nvSpPr>
-        <p:spPr>
-          <a:xfrm>
-            <a:off x="5048280" y="1905120"/>
-            <a:ext cx="3476160" cy="2285640"/>
-          </a:xfrm>
-          <a:prstGeom prst="rect">
-            <a:avLst/>
-          </a:prstGeom>
-          <a:noFill/>
-          <a:ln w="0">
-            <a:noFill/>
-          </a:ln>
-        </p:spPr>
-        <p:style>
-          <a:lnRef idx="0">
-            <a:scrgbClr r="0" g="0" b="0"/>
-          </a:lnRef>
-          <a:fillRef idx="0">
-            <a:scrgbClr r="0" g="0" b="0"/>
-          </a:fillRef>
-          <a:effectRef idx="0">
-            <a:scrgbClr r="0" g="0" b="0"/>
-          </a:effectRef>
-          <a:fontRef idx="minor"/>
-        </p:style>
-        <p:txBody>
-          <a:bodyPr anchor="t">
-            <a:normAutofit fontScale="92500"/>
-          </a:bodyPr>
-          <a:lstStyle/>
-          <a:p>
-            <a:pPr defTabSz="914400">
-              <a:lnSpc>
-                <a:spcPct val="150000"/>
-              </a:lnSpc>
-              <a:tabLst>
-                <a:tab pos="0" algn="l"/>
-              </a:tabLst>
-            </a:pPr>
-            <a:r>
-              <a:rPr lang="en-US" sz="1600" b="0" u="none" strike="noStrike">
-                <a:solidFill>
-                  <a:srgbClr val="92F7FF"/>
-                </a:solidFill>
-                <a:effectLst/>
-                <a:uFillTx/>
-                <a:latin typeface="Archivo Light"/>
-              </a:rPr>
-              <a:t>Kiến trúc Client‑Server: Frontend (React) ↔ Backend (Spring Boot) via REST API; cập nhật tức thì bằng WebSocket; cơ chế scheduler cập nhật trạng thái &amp; tạo đơn hàng tự động. </a:t>
-            </a:r>
-            <a:r>
-              <a:rPr lang="en-US" sz="1600" b="0" i="1" u="none" strike="noStrike">
-                <a:solidFill>
-                  <a:srgbClr val="92F7FF"/>
-                </a:solidFill>
-                <a:effectLst/>
-                <a:uFillTx/>
-                <a:latin typeface="Archivo Light"/>
-              </a:rPr>
-              <a:t>ERD</a:t>
-            </a:r>
-            <a:r>
-              <a:rPr lang="en-US" sz="1600" b="0" u="none" strike="noStrike">
-                <a:solidFill>
-                  <a:srgbClr val="92F7FF"/>
-                </a:solidFill>
-                <a:effectLst/>
-                <a:uFillTx/>
-                <a:latin typeface="Archivo Light"/>
-              </a:rPr>
-              <a:t> gồm 8 thực thể chính (users, auctions, bids, orders...).</a:t>
-            </a:r>
-            <a:endParaRPr lang="en-US" sz="1600" b="0" u="none" strike="noStrike">
-              <a:solidFill>
-                <a:srgbClr val="FFFFFF"/>
-              </a:solidFill>
-              <a:effectLst/>
-              <a:uFillTx/>
-              <a:latin typeface="OpenSymbol"/>
-            </a:endParaRPr>
-          </a:p>
-        </p:txBody>
-      </p:sp>
-    </p:spTree>
-  </p:cSld>
-  <p:clrMapOvr>
-    <a:masterClrMapping/>
-  </p:clrMapOvr>
-</p:sld>
-</file>
-
-<file path=ppt/slides/slide9.xml><?xml version="1.0" encoding="utf-8"?>
 <p:sld xmlns:a="http://schemas.openxmlformats.org/drawingml/2006/main" xmlns:r="http://schemas.openxmlformats.org/officeDocument/2006/relationships" xmlns:p="http://schemas.openxmlformats.org/presentationml/2006/main">
   <p:cSld>
     <p:spTree>
@@ -20162,7 +22479,7 @@
         </p:style>
         <p:txBody>
           <a:bodyPr anchor="t">
-            <a:normAutofit fontScale="92500"/>
+            <a:normAutofit/>
           </a:bodyPr>
           <a:lstStyle/>
           <a:p>
@@ -20183,7 +22500,7 @@
                 <a:uFillTx/>
                 <a:latin typeface="Orbitron"/>
               </a:rPr>
-              <a:t>Công nghệ &amp; Công cụ (Spring Boot, React, MySQL, JWT, WebSocket)</a:t>
+              <a:t>Công nghệ &amp; Công cụ </a:t>
             </a:r>
             <a:endParaRPr lang="en-US" sz="2400" b="0" u="none" strike="noStrike">
               <a:solidFill>
@@ -20198,14 +22515,20 @@
       </p:sp>
       <p:sp>
         <p:nvSpPr>
-          <p:cNvPr id="178" name="Rectangle 177"/>
+          <p:cNvPr id="2" name="content_box">
+            <a:extLst>
+              <a:ext uri="{FF2B5EF4-FFF2-40B4-BE49-F238E27FC236}">
+                <a16:creationId xmlns:a16="http://schemas.microsoft.com/office/drawing/2014/main" id="{58B66E67-05F2-5B57-84AD-08404B870071}"/>
+              </a:ext>
+            </a:extLst>
+          </p:cNvPr>
           <p:cNvSpPr/>
           <p:nvPr/>
         </p:nvSpPr>
         <p:spPr>
           <a:xfrm>
-            <a:off x="619200" y="1905120"/>
-            <a:ext cx="7905240" cy="1066320"/>
+            <a:off x="302044" y="1124300"/>
+            <a:ext cx="6128735" cy="3042966"/>
           </a:xfrm>
           <a:prstGeom prst="rect">
             <a:avLst/>
@@ -20229,125 +22552,227 @@
         </p:style>
         <p:txBody>
           <a:bodyPr anchor="t">
-            <a:normAutofit/>
+            <a:noAutofit/>
           </a:bodyPr>
-          <a:lstStyle/>
+          <a:lstStyle>
+            <a:defPPr>
+              <a:defRPr lang="vi-VN"/>
+            </a:defPPr>
+            <a:lvl1pPr marL="0" algn="l" defTabSz="914400" rtl="0" eaLnBrk="1" latinLnBrk="0" hangingPunct="1">
+              <a:defRPr sz="1800" kern="1200">
+                <a:solidFill>
+                  <a:schemeClr val="tx1"/>
+                </a:solidFill>
+                <a:latin typeface="+mn-lt"/>
+                <a:ea typeface="+mn-ea"/>
+                <a:cs typeface="+mn-cs"/>
+              </a:defRPr>
+            </a:lvl1pPr>
+            <a:lvl2pPr marL="457200" algn="l" defTabSz="914400" rtl="0" eaLnBrk="1" latinLnBrk="0" hangingPunct="1">
+              <a:defRPr sz="1800" kern="1200">
+                <a:solidFill>
+                  <a:schemeClr val="tx1"/>
+                </a:solidFill>
+                <a:latin typeface="+mn-lt"/>
+                <a:ea typeface="+mn-ea"/>
+                <a:cs typeface="+mn-cs"/>
+              </a:defRPr>
+            </a:lvl2pPr>
+            <a:lvl3pPr marL="914400" algn="l" defTabSz="914400" rtl="0" eaLnBrk="1" latinLnBrk="0" hangingPunct="1">
+              <a:defRPr sz="1800" kern="1200">
+                <a:solidFill>
+                  <a:schemeClr val="tx1"/>
+                </a:solidFill>
+                <a:latin typeface="+mn-lt"/>
+                <a:ea typeface="+mn-ea"/>
+                <a:cs typeface="+mn-cs"/>
+              </a:defRPr>
+            </a:lvl3pPr>
+            <a:lvl4pPr marL="1371600" algn="l" defTabSz="914400" rtl="0" eaLnBrk="1" latinLnBrk="0" hangingPunct="1">
+              <a:defRPr sz="1800" kern="1200">
+                <a:solidFill>
+                  <a:schemeClr val="tx1"/>
+                </a:solidFill>
+                <a:latin typeface="+mn-lt"/>
+                <a:ea typeface="+mn-ea"/>
+                <a:cs typeface="+mn-cs"/>
+              </a:defRPr>
+            </a:lvl4pPr>
+            <a:lvl5pPr marL="1828800" algn="l" defTabSz="914400" rtl="0" eaLnBrk="1" latinLnBrk="0" hangingPunct="1">
+              <a:defRPr sz="1800" kern="1200">
+                <a:solidFill>
+                  <a:schemeClr val="tx1"/>
+                </a:solidFill>
+                <a:latin typeface="+mn-lt"/>
+                <a:ea typeface="+mn-ea"/>
+                <a:cs typeface="+mn-cs"/>
+              </a:defRPr>
+            </a:lvl5pPr>
+            <a:lvl6pPr marL="2286000" algn="l" defTabSz="914400" rtl="0" eaLnBrk="1" latinLnBrk="0" hangingPunct="1">
+              <a:defRPr sz="1800" kern="1200">
+                <a:solidFill>
+                  <a:schemeClr val="tx1"/>
+                </a:solidFill>
+                <a:latin typeface="+mn-lt"/>
+                <a:ea typeface="+mn-ea"/>
+                <a:cs typeface="+mn-cs"/>
+              </a:defRPr>
+            </a:lvl6pPr>
+            <a:lvl7pPr marL="2743200" algn="l" defTabSz="914400" rtl="0" eaLnBrk="1" latinLnBrk="0" hangingPunct="1">
+              <a:defRPr sz="1800" kern="1200">
+                <a:solidFill>
+                  <a:schemeClr val="tx1"/>
+                </a:solidFill>
+                <a:latin typeface="+mn-lt"/>
+                <a:ea typeface="+mn-ea"/>
+                <a:cs typeface="+mn-cs"/>
+              </a:defRPr>
+            </a:lvl7pPr>
+            <a:lvl8pPr marL="3200400" algn="l" defTabSz="914400" rtl="0" eaLnBrk="1" latinLnBrk="0" hangingPunct="1">
+              <a:defRPr sz="1800" kern="1200">
+                <a:solidFill>
+                  <a:schemeClr val="tx1"/>
+                </a:solidFill>
+                <a:latin typeface="+mn-lt"/>
+                <a:ea typeface="+mn-ea"/>
+                <a:cs typeface="+mn-cs"/>
+              </a:defRPr>
+            </a:lvl8pPr>
+            <a:lvl9pPr marL="3657600" algn="l" defTabSz="914400" rtl="0" eaLnBrk="1" latinLnBrk="0" hangingPunct="1">
+              <a:defRPr sz="1800" kern="1200">
+                <a:solidFill>
+                  <a:schemeClr val="tx1"/>
+                </a:solidFill>
+                <a:latin typeface="+mn-lt"/>
+                <a:ea typeface="+mn-ea"/>
+                <a:cs typeface="+mn-cs"/>
+              </a:defRPr>
+            </a:lvl9pPr>
+          </a:lstStyle>
           <a:p>
-            <a:pPr defTabSz="914400">
+            <a:pPr marL="342900" defTabSz="914400">
               <a:lnSpc>
-                <a:spcPct val="150000"/>
+                <a:spcPct val="130000"/>
               </a:lnSpc>
-              <a:tabLst>
-                <a:tab pos="0" algn="l"/>
-              </a:tabLst>
+              <a:buChar char="•"/>
             </a:pPr>
             <a:r>
-              <a:rPr lang="en-US" sz="1600" b="0" u="none" strike="noStrike">
+              <a:rPr lang="vi-VN" sz="1600" b="0">
                 <a:solidFill>
                   <a:srgbClr val="92F7FF"/>
                 </a:solidFill>
-                <a:effectLst/>
-                <a:uFillTx/>
                 <a:latin typeface="Archivo Light"/>
               </a:rPr>
-              <a:t>Ngăn xếp: </a:t>
+              <a:t>Frontend: React.js, Axios, SockJS/STOMP</a:t>
             </a:r>
+          </a:p>
+          <a:p>
+            <a:pPr marL="342900" defTabSz="914400">
+              <a:lnSpc>
+                <a:spcPct val="130000"/>
+              </a:lnSpc>
+              <a:buChar char="•"/>
+            </a:pPr>
             <a:r>
-              <a:rPr lang="en-US" sz="1600" b="0" i="1" u="none" strike="noStrike">
+              <a:rPr lang="vi-VN" sz="1600" b="0">
                 <a:solidFill>
                   <a:srgbClr val="92F7FF"/>
                 </a:solidFill>
-                <a:effectLst/>
-                <a:uFillTx/>
                 <a:latin typeface="Archivo Light"/>
               </a:rPr>
-              <a:t>React.js</a:t>
+              <a:t>Backend: Spring Boot, Spring Security, JPA/Hibernate</a:t>
             </a:r>
+          </a:p>
+          <a:p>
+            <a:pPr marL="342900" defTabSz="914400">
+              <a:lnSpc>
+                <a:spcPct val="130000"/>
+              </a:lnSpc>
+              <a:buChar char="•"/>
+            </a:pPr>
             <a:r>
-              <a:rPr lang="en-US" sz="1600" b="0" u="none" strike="noStrike">
+              <a:rPr lang="vi-VN" sz="1600" b="0">
                 <a:solidFill>
                   <a:srgbClr val="92F7FF"/>
                 </a:solidFill>
-                <a:effectLst/>
-                <a:uFillTx/>
                 <a:latin typeface="Archivo Light"/>
               </a:rPr>
-              <a:t> (client), </a:t>
+              <a:t>Database: MySQL 8.0</a:t>
             </a:r>
+          </a:p>
+          <a:p>
+            <a:pPr marL="342900" defTabSz="914400">
+              <a:lnSpc>
+                <a:spcPct val="130000"/>
+              </a:lnSpc>
+              <a:buChar char="•"/>
+            </a:pPr>
             <a:r>
-              <a:rPr lang="en-US" sz="1600" b="0" i="1" u="none" strike="noStrike">
+              <a:rPr lang="vi-VN" sz="1600" b="0">
                 <a:solidFill>
                   <a:srgbClr val="92F7FF"/>
                 </a:solidFill>
-                <a:effectLst/>
-                <a:uFillTx/>
                 <a:latin typeface="Archivo Light"/>
               </a:rPr>
-              <a:t>Spring Boot</a:t>
+              <a:t>Bảo mật: JWT, BCrypt </a:t>
             </a:r>
+            <a:endParaRPr lang="vi-VN" sz="1600">
+              <a:solidFill>
+                <a:srgbClr val="92F7FF"/>
+              </a:solidFill>
+              <a:latin typeface="Archivo Light"/>
+            </a:endParaRPr>
+          </a:p>
+          <a:p>
+            <a:pPr marL="342900" defTabSz="914400">
+              <a:lnSpc>
+                <a:spcPct val="130000"/>
+              </a:lnSpc>
+              <a:buChar char="•"/>
+            </a:pPr>
             <a:r>
-              <a:rPr lang="en-US" sz="1600" b="0" u="none" strike="noStrike">
+              <a:rPr lang="vi-VN" sz="1600" b="0">
                 <a:solidFill>
                   <a:srgbClr val="92F7FF"/>
                 </a:solidFill>
-                <a:effectLst/>
-                <a:uFillTx/>
                 <a:latin typeface="Archivo Light"/>
               </a:rPr>
-              <a:t> (server), </a:t>
+              <a:t>WebSocket (STOMP) </a:t>
             </a:r>
+          </a:p>
+          <a:p>
+            <a:pPr marL="342900" defTabSz="914400">
+              <a:lnSpc>
+                <a:spcPct val="130000"/>
+              </a:lnSpc>
+              <a:buChar char="•"/>
+            </a:pPr>
             <a:r>
-              <a:rPr lang="en-US" sz="1600" b="0" i="1" u="none" strike="noStrike">
+              <a:rPr lang="vi-VN" sz="1600" b="0">
                 <a:solidFill>
                   <a:srgbClr val="92F7FF"/>
                 </a:solidFill>
-                <a:effectLst/>
-                <a:uFillTx/>
                 <a:latin typeface="Archivo Light"/>
               </a:rPr>
-              <a:t>MySQL</a:t>
+              <a:t>Scheduler tự động cập nhật trạng thái mỗi 30 giây</a:t>
             </a:r>
+          </a:p>
+          <a:p>
+            <a:pPr marL="342900" defTabSz="914400">
+              <a:lnSpc>
+                <a:spcPct val="130000"/>
+              </a:lnSpc>
+              <a:buChar char="•"/>
+            </a:pPr>
             <a:r>
-              <a:rPr lang="en-US" sz="1600" b="0" u="none" strike="noStrike">
+              <a:rPr lang="vi-VN" sz="1600" b="0">
                 <a:solidFill>
                   <a:srgbClr val="92F7FF"/>
                 </a:solidFill>
-                <a:effectLst/>
-                <a:uFillTx/>
                 <a:latin typeface="Archivo Light"/>
               </a:rPr>
-              <a:t> (DB). Bảo mật bằng </a:t>
+              <a:t>Công cụ: VS Code, Xampp, Git</a:t>
             </a:r>
-            <a:r>
-              <a:rPr lang="en-US" sz="1600" b="1" u="none" strike="noStrike">
-                <a:solidFill>
-                  <a:srgbClr val="92F7FF"/>
-                </a:solidFill>
-                <a:effectLst/>
-                <a:uFillTx/>
-                <a:latin typeface="Archivo Light"/>
-              </a:rPr>
-              <a:t>JWT</a:t>
-            </a:r>
-            <a:r>
-              <a:rPr lang="en-US" sz="1600" b="0" u="none" strike="noStrike">
-                <a:solidFill>
-                  <a:srgbClr val="92F7FF"/>
-                </a:solidFill>
-                <a:effectLst/>
-                <a:uFillTx/>
-                <a:latin typeface="Archivo Light"/>
-              </a:rPr>
-              <a:t> và mật khẩu băm BCrypt. WebSocket (STOMP) cho realtime; scheduler chạy kiểm tra trạng thái mỗi 30s.</a:t>
-            </a:r>
-            <a:endParaRPr lang="en-US" sz="1600" b="0" u="none" strike="noStrike">
-              <a:solidFill>
-                <a:srgbClr val="FFFFFF"/>
-              </a:solidFill>
-              <a:effectLst/>
-              <a:uFillTx/>
-              <a:latin typeface="OpenSymbol"/>
-            </a:endParaRPr>
           </a:p>
         </p:txBody>
       </p:sp>
@@ -20356,6 +22781,323 @@
   <p:clrMapOvr>
     <a:masterClrMapping/>
   </p:clrMapOvr>
+  <mc:AlternateContent xmlns:mc="http://schemas.openxmlformats.org/markup-compatibility/2006" xmlns:p159="http://schemas.microsoft.com/office/powerpoint/2015/09/main">
+    <mc:Choice Requires="p159">
+      <p:transition xmlns:p14="http://schemas.microsoft.com/office/powerpoint/2010/main" spd="slow" p14:dur="2000">
+        <p159:morph option="byObject"/>
+      </p:transition>
+    </mc:Choice>
+    <mc:Fallback xmlns="">
+      <p:transition spd="slow">
+        <p:fade/>
+      </p:transition>
+    </mc:Fallback>
+  </mc:AlternateContent>
+</p:sld>
+</file>
+
+<file path=ppt/slides/slide9.xml><?xml version="1.0" encoding="utf-8"?>
+<p:sld xmlns:a="http://schemas.openxmlformats.org/drawingml/2006/main" xmlns:r="http://schemas.openxmlformats.org/officeDocument/2006/relationships" xmlns:p="http://schemas.openxmlformats.org/presentationml/2006/main">
+  <p:cSld>
+    <p:spTree>
+      <p:nvGrpSpPr>
+        <p:cNvPr id="1" name=""/>
+        <p:cNvGrpSpPr/>
+        <p:nvPr/>
+      </p:nvGrpSpPr>
+      <p:grpSpPr>
+        <a:xfrm>
+          <a:off x="0" y="0"/>
+          <a:ext cx="0" cy="0"/>
+          <a:chOff x="0" y="0"/>
+          <a:chExt cx="0" cy="0"/>
+        </a:xfrm>
+      </p:grpSpPr>
+      <p:sp>
+        <p:nvSpPr>
+          <p:cNvPr id="300" name="title"/>
+          <p:cNvSpPr/>
+          <p:nvPr/>
+        </p:nvSpPr>
+        <p:spPr>
+          <a:xfrm>
+            <a:off x="457200" y="400000"/>
+            <a:ext cx="8610840" cy="480000"/>
+          </a:xfrm>
+          <a:prstGeom prst="rect">
+            <a:avLst/>
+          </a:prstGeom>
+          <a:noFill/>
+          <a:ln w="0">
+            <a:noFill/>
+          </a:ln>
+        </p:spPr>
+        <p:style>
+          <a:lnRef idx="0">
+            <a:scrgbClr r="0" g="0" b="0"/>
+          </a:lnRef>
+          <a:fillRef idx="0">
+            <a:scrgbClr r="0" g="0" b="0"/>
+          </a:fillRef>
+          <a:effectRef idx="0">
+            <a:scrgbClr r="0" g="0" b="0"/>
+          </a:effectRef>
+          <a:fontRef idx="minor"/>
+        </p:style>
+        <p:txBody>
+          <a:bodyPr anchor="ctr">
+            <a:normAutofit/>
+          </a:bodyPr>
+          <a:lstStyle/>
+          <a:p>
+            <a:pPr algn="ctr"/>
+            <a:r>
+              <a:rPr lang="vi-VN" sz="2400" b="0">
+                <a:solidFill>
+                  <a:srgbClr val="92F7FF"/>
+                </a:solidFill>
+                <a:latin typeface="Orbitron"/>
+              </a:rPr>
+              <a:t>Use Case </a:t>
+            </a:r>
+            <a:r>
+              <a:rPr lang="en-US" sz="2400">
+                <a:solidFill>
+                  <a:srgbClr val="92F7FF"/>
+                </a:solidFill>
+                <a:latin typeface="Orbitron"/>
+              </a:rPr>
+              <a:t>&amp;</a:t>
+            </a:r>
+            <a:r>
+              <a:rPr lang="vi-VN" sz="2400">
+                <a:solidFill>
+                  <a:srgbClr val="92F7FF"/>
+                </a:solidFill>
+                <a:latin typeface="Orbitron"/>
+              </a:rPr>
+              <a:t> Vòng đời phiên đấu giá</a:t>
+            </a:r>
+            <a:r>
+              <a:rPr lang="vi-VN" sz="2400" b="0">
+                <a:solidFill>
+                  <a:srgbClr val="92F7FF"/>
+                </a:solidFill>
+                <a:latin typeface="Orbitron"/>
+              </a:rPr>
+              <a:t> </a:t>
+            </a:r>
+          </a:p>
+        </p:txBody>
+      </p:sp>
+      <p:sp>
+        <p:nvSpPr>
+          <p:cNvPr id="302" name="lbl_uc"/>
+          <p:cNvSpPr/>
+          <p:nvPr/>
+        </p:nvSpPr>
+        <p:spPr>
+          <a:xfrm>
+            <a:off x="457200" y="4668065"/>
+            <a:ext cx="4200000" cy="280000"/>
+          </a:xfrm>
+          <a:prstGeom prst="rect">
+            <a:avLst/>
+          </a:prstGeom>
+          <a:noFill/>
+          <a:ln w="0">
+            <a:noFill/>
+          </a:ln>
+        </p:spPr>
+        <p:style>
+          <a:lnRef idx="0">
+            <a:scrgbClr r="0" g="0" b="0"/>
+          </a:lnRef>
+          <a:fillRef idx="0">
+            <a:scrgbClr r="0" g="0" b="0"/>
+          </a:fillRef>
+          <a:effectRef idx="0">
+            <a:scrgbClr r="0" g="0" b="0"/>
+          </a:effectRef>
+          <a:fontRef idx="minor"/>
+        </p:style>
+        <p:txBody>
+          <a:bodyPr anchor="ctr">
+            <a:normAutofit/>
+          </a:bodyPr>
+          <a:lstStyle/>
+          <a:p>
+            <a:pPr algn="ctr"/>
+            <a:r>
+              <a:rPr lang="vi-VN" sz="1100" b="1">
+                <a:solidFill>
+                  <a:srgbClr val="92F7FF"/>
+                </a:solidFill>
+                <a:latin typeface="Archivo Light"/>
+              </a:rPr>
+              <a:t>Lược đồ Use Case</a:t>
+            </a:r>
+          </a:p>
+        </p:txBody>
+      </p:sp>
+      <p:sp>
+        <p:nvSpPr>
+          <p:cNvPr id="304" name="lbl_lc"/>
+          <p:cNvSpPr/>
+          <p:nvPr/>
+        </p:nvSpPr>
+        <p:spPr>
+          <a:xfrm>
+            <a:off x="4904931" y="4660570"/>
+            <a:ext cx="4100000" cy="280000"/>
+          </a:xfrm>
+          <a:prstGeom prst="rect">
+            <a:avLst/>
+          </a:prstGeom>
+          <a:noFill/>
+          <a:ln w="0">
+            <a:noFill/>
+          </a:ln>
+        </p:spPr>
+        <p:style>
+          <a:lnRef idx="0">
+            <a:scrgbClr r="0" g="0" b="0"/>
+          </a:lnRef>
+          <a:fillRef idx="0">
+            <a:scrgbClr r="0" g="0" b="0"/>
+          </a:fillRef>
+          <a:effectRef idx="0">
+            <a:scrgbClr r="0" g="0" b="0"/>
+          </a:effectRef>
+          <a:fontRef idx="minor"/>
+        </p:style>
+        <p:txBody>
+          <a:bodyPr anchor="ctr">
+            <a:normAutofit/>
+          </a:bodyPr>
+          <a:lstStyle/>
+          <a:p>
+            <a:pPr algn="ctr"/>
+            <a:r>
+              <a:rPr lang="vi-VN" sz="1100" b="1">
+                <a:solidFill>
+                  <a:srgbClr val="92F7FF"/>
+                </a:solidFill>
+                <a:latin typeface="Archivo Light"/>
+              </a:rPr>
+              <a:t>Vòng đời phiên đấu giá</a:t>
+            </a:r>
+          </a:p>
+        </p:txBody>
+      </p:sp>
+      <p:pic>
+        <p:nvPicPr>
+          <p:cNvPr id="1027" name="Picture 3">
+            <a:extLst>
+              <a:ext uri="{FF2B5EF4-FFF2-40B4-BE49-F238E27FC236}">
+                <a16:creationId xmlns:a16="http://schemas.microsoft.com/office/drawing/2014/main" id="{6A27FB7A-F6CA-A571-AC72-6D677BA47C76}"/>
+              </a:ext>
+            </a:extLst>
+          </p:cNvPr>
+          <p:cNvPicPr>
+            <a:picLocks noChangeAspect="1" noChangeArrowheads="1"/>
+          </p:cNvPicPr>
+          <p:nvPr/>
+        </p:nvPicPr>
+        <p:blipFill>
+          <a:blip r:embed="rId2">
+            <a:extLst>
+              <a:ext uri="{28A0092B-C50C-407E-A947-70E740481C1C}">
+                <a14:useLocalDpi xmlns:a14="http://schemas.microsoft.com/office/drawing/2010/main" val="0"/>
+              </a:ext>
+            </a:extLst>
+          </a:blip>
+          <a:srcRect/>
+          <a:stretch>
+            <a:fillRect/>
+          </a:stretch>
+        </p:blipFill>
+        <p:spPr bwMode="auto">
+          <a:xfrm>
+            <a:off x="5592506" y="949998"/>
+            <a:ext cx="2591579" cy="3730001"/>
+          </a:xfrm>
+          <a:prstGeom prst="rect">
+            <a:avLst/>
+          </a:prstGeom>
+          <a:noFill/>
+          <a:ln>
+            <a:noFill/>
+          </a:ln>
+          <a:extLst>
+            <a:ext uri="{909E8E84-426E-40DD-AFC4-6F175D3DCCD1}">
+              <a14:hiddenFill xmlns:a14="http://schemas.microsoft.com/office/drawing/2010/main">
+                <a:solidFill>
+                  <a:srgbClr val="FFFFFF"/>
+                </a:solidFill>
+              </a14:hiddenFill>
+            </a:ext>
+            <a:ext uri="{91240B29-F687-4F45-9708-019B960494DF}">
+              <a14:hiddenLine xmlns:a14="http://schemas.microsoft.com/office/drawing/2010/main" w="9525">
+                <a:solidFill>
+                  <a:srgbClr val="000000"/>
+                </a:solidFill>
+                <a:miter lim="800000"/>
+                <a:headEnd/>
+                <a:tailEnd/>
+              </a14:hiddenLine>
+            </a:ext>
+          </a:extLst>
+        </p:spPr>
+      </p:pic>
+      <p:pic>
+        <p:nvPicPr>
+          <p:cNvPr id="3" name="Picture 2">
+            <a:extLst>
+              <a:ext uri="{FF2B5EF4-FFF2-40B4-BE49-F238E27FC236}">
+                <a16:creationId xmlns:a16="http://schemas.microsoft.com/office/drawing/2014/main" id="{A801AF30-A831-DB6B-05AB-6EA4DCE7A39E}"/>
+              </a:ext>
+            </a:extLst>
+          </p:cNvPr>
+          <p:cNvPicPr>
+            <a:picLocks noChangeAspect="1"/>
+          </p:cNvPicPr>
+          <p:nvPr/>
+        </p:nvPicPr>
+        <p:blipFill>
+          <a:blip r:embed="rId3"/>
+          <a:srcRect l="6867" t="2477"/>
+          <a:stretch>
+            <a:fillRect/>
+          </a:stretch>
+        </p:blipFill>
+        <p:spPr>
+          <a:xfrm>
+            <a:off x="872200" y="949998"/>
+            <a:ext cx="3682443" cy="3730001"/>
+          </a:xfrm>
+          <a:prstGeom prst="rect">
+            <a:avLst/>
+          </a:prstGeom>
+        </p:spPr>
+      </p:pic>
+    </p:spTree>
+  </p:cSld>
+  <p:clrMapOvr>
+    <a:masterClrMapping/>
+  </p:clrMapOvr>
+  <mc:AlternateContent xmlns:mc="http://schemas.openxmlformats.org/markup-compatibility/2006" xmlns:p159="http://schemas.microsoft.com/office/powerpoint/2015/09/main">
+    <mc:Choice Requires="p159">
+      <p:transition xmlns:p14="http://schemas.microsoft.com/office/powerpoint/2010/main" spd="slow" p14:dur="2000">
+        <p159:morph option="byObject"/>
+      </p:transition>
+    </mc:Choice>
+    <mc:Fallback xmlns="">
+      <p:transition spd="slow">
+        <p:fade/>
+      </p:transition>
+    </mc:Fallback>
+  </mc:AlternateContent>
 </p:sld>
 </file>
 
@@ -20531,4 +23273,299 @@
   <a:objectDefaults/>
   <a:extraClrSchemeLst/>
 </a:theme>
+</file>
+
+<file path=ppt/theme/theme2.xml><?xml version="1.0" encoding="utf-8"?>
+<a:theme xmlns:a="http://schemas.openxmlformats.org/drawingml/2006/main" name="Office Theme">
+  <a:themeElements>
+    <a:clrScheme name="Office">
+      <a:dk1>
+        <a:sysClr val="windowText" lastClr="000000"/>
+      </a:dk1>
+      <a:lt1>
+        <a:sysClr val="window" lastClr="FFFFFF"/>
+      </a:lt1>
+      <a:dk2>
+        <a:srgbClr val="44546A"/>
+      </a:dk2>
+      <a:lt2>
+        <a:srgbClr val="E7E6E6"/>
+      </a:lt2>
+      <a:accent1>
+        <a:srgbClr val="4472C4"/>
+      </a:accent1>
+      <a:accent2>
+        <a:srgbClr val="ED7D31"/>
+      </a:accent2>
+      <a:accent3>
+        <a:srgbClr val="A5A5A5"/>
+      </a:accent3>
+      <a:accent4>
+        <a:srgbClr val="FFC000"/>
+      </a:accent4>
+      <a:accent5>
+        <a:srgbClr val="5B9BD5"/>
+      </a:accent5>
+      <a:accent6>
+        <a:srgbClr val="70AD47"/>
+      </a:accent6>
+      <a:hlink>
+        <a:srgbClr val="0563C1"/>
+      </a:hlink>
+      <a:folHlink>
+        <a:srgbClr val="954F72"/>
+      </a:folHlink>
+    </a:clrScheme>
+    <a:fontScheme name="Office">
+      <a:majorFont>
+        <a:latin typeface="Calibri Light" panose="020F0302020204030204"/>
+        <a:ea typeface=""/>
+        <a:cs typeface=""/>
+        <a:font script="Jpan" typeface="游ゴシック Light"/>
+        <a:font script="Hang" typeface="맑은 고딕"/>
+        <a:font script="Hans" typeface="等线 Light"/>
+        <a:font script="Hant" typeface="新細明體"/>
+        <a:font script="Arab" typeface="Times New Roman"/>
+        <a:font script="Hebr" typeface="Times New Roman"/>
+        <a:font script="Thai" typeface="Angsana New"/>
+        <a:font script="Ethi" typeface="Nyala"/>
+        <a:font script="Beng" typeface="Vrinda"/>
+        <a:font script="Gujr" typeface="Shruti"/>
+        <a:font script="Khmr" typeface="MoolBoran"/>
+        <a:font script="Knda" typeface="Tunga"/>
+        <a:font script="Guru" typeface="Raavi"/>
+        <a:font script="Cans" typeface="Euphemia"/>
+        <a:font script="Cher" typeface="Plantagenet Cherokee"/>
+        <a:font script="Yiii" typeface="Microsoft Yi Baiti"/>
+        <a:font script="Tibt" typeface="Microsoft Himalaya"/>
+        <a:font script="Thaa" typeface="MV Boli"/>
+        <a:font script="Deva" typeface="Mangal"/>
+        <a:font script="Telu" typeface="Gautami"/>
+        <a:font script="Taml" typeface="Latha"/>
+        <a:font script="Syrc" typeface="Estrangelo Edessa"/>
+        <a:font script="Orya" typeface="Kalinga"/>
+        <a:font script="Mlym" typeface="Kartika"/>
+        <a:font script="Laoo" typeface="DokChampa"/>
+        <a:font script="Sinh" typeface="Iskoola Pota"/>
+        <a:font script="Mong" typeface="Mongolian Baiti"/>
+        <a:font script="Viet" typeface="Times New Roman"/>
+        <a:font script="Uigh" typeface="Microsoft Uighur"/>
+        <a:font script="Geor" typeface="Sylfaen"/>
+        <a:font script="Armn" typeface="Arial"/>
+        <a:font script="Bugi" typeface="Leelawadee UI"/>
+        <a:font script="Bopo" typeface="Microsoft JhengHei"/>
+        <a:font script="Java" typeface="Javanese Text"/>
+        <a:font script="Lisu" typeface="Segoe UI"/>
+        <a:font script="Mymr" typeface="Myanmar Text"/>
+        <a:font script="Nkoo" typeface="Ebrima"/>
+        <a:font script="Olck" typeface="Nirmala UI"/>
+        <a:font script="Osma" typeface="Ebrima"/>
+        <a:font script="Phag" typeface="Phagspa"/>
+        <a:font script="Syrn" typeface="Estrangelo Edessa"/>
+        <a:font script="Syrj" typeface="Estrangelo Edessa"/>
+        <a:font script="Syre" typeface="Estrangelo Edessa"/>
+        <a:font script="Sora" typeface="Nirmala UI"/>
+        <a:font script="Tale" typeface="Microsoft Tai Le"/>
+        <a:font script="Talu" typeface="Microsoft New Tai Lue"/>
+        <a:font script="Tfng" typeface="Ebrima"/>
+      </a:majorFont>
+      <a:minorFont>
+        <a:latin typeface="Calibri" panose="020F0502020204030204"/>
+        <a:ea typeface=""/>
+        <a:cs typeface=""/>
+        <a:font script="Jpan" typeface="游ゴシック"/>
+        <a:font script="Hang" typeface="맑은 고딕"/>
+        <a:font script="Hans" typeface="等线"/>
+        <a:font script="Hant" typeface="新細明體"/>
+        <a:font script="Arab" typeface="Arial"/>
+        <a:font script="Hebr" typeface="Arial"/>
+        <a:font script="Thai" typeface="Cordia New"/>
+        <a:font script="Ethi" typeface="Nyala"/>
+        <a:font script="Beng" typeface="Vrinda"/>
+        <a:font script="Gujr" typeface="Shruti"/>
+        <a:font script="Khmr" typeface="DaunPenh"/>
+        <a:font script="Knda" typeface="Tunga"/>
+        <a:font script="Guru" typeface="Raavi"/>
+        <a:font script="Cans" typeface="Euphemia"/>
+        <a:font script="Cher" typeface="Plantagenet Cherokee"/>
+        <a:font script="Yiii" typeface="Microsoft Yi Baiti"/>
+        <a:font script="Tibt" typeface="Microsoft Himalaya"/>
+        <a:font script="Thaa" typeface="MV Boli"/>
+        <a:font script="Deva" typeface="Mangal"/>
+        <a:font script="Telu" typeface="Gautami"/>
+        <a:font script="Taml" typeface="Latha"/>
+        <a:font script="Syrc" typeface="Estrangelo Edessa"/>
+        <a:font script="Orya" typeface="Kalinga"/>
+        <a:font script="Mlym" typeface="Kartika"/>
+        <a:font script="Laoo" typeface="DokChampa"/>
+        <a:font script="Sinh" typeface="Iskoola Pota"/>
+        <a:font script="Mong" typeface="Mongolian Baiti"/>
+        <a:font script="Viet" typeface="Arial"/>
+        <a:font script="Uigh" typeface="Microsoft Uighur"/>
+        <a:font script="Geor" typeface="Sylfaen"/>
+        <a:font script="Armn" typeface="Arial"/>
+        <a:font script="Bugi" typeface="Leelawadee UI"/>
+        <a:font script="Bopo" typeface="Microsoft JhengHei"/>
+        <a:font script="Java" typeface="Javanese Text"/>
+        <a:font script="Lisu" typeface="Segoe UI"/>
+        <a:font script="Mymr" typeface="Myanmar Text"/>
+        <a:font script="Nkoo" typeface="Ebrima"/>
+        <a:font script="Olck" typeface="Nirmala UI"/>
+        <a:font script="Osma" typeface="Ebrima"/>
+        <a:font script="Phag" typeface="Phagspa"/>
+        <a:font script="Syrn" typeface="Estrangelo Edessa"/>
+        <a:font script="Syrj" typeface="Estrangelo Edessa"/>
+        <a:font script="Syre" typeface="Estrangelo Edessa"/>
+        <a:font script="Sora" typeface="Nirmala UI"/>
+        <a:font script="Tale" typeface="Microsoft Tai Le"/>
+        <a:font script="Talu" typeface="Microsoft New Tai Lue"/>
+        <a:font script="Tfng" typeface="Ebrima"/>
+      </a:minorFont>
+    </a:fontScheme>
+    <a:fmtScheme name="Office">
+      <a:fillStyleLst>
+        <a:solidFill>
+          <a:schemeClr val="phClr"/>
+        </a:solidFill>
+        <a:gradFill rotWithShape="1">
+          <a:gsLst>
+            <a:gs pos="0">
+              <a:schemeClr val="phClr">
+                <a:lumMod val="110000"/>
+                <a:satMod val="105000"/>
+                <a:tint val="67000"/>
+              </a:schemeClr>
+            </a:gs>
+            <a:gs pos="50000">
+              <a:schemeClr val="phClr">
+                <a:lumMod val="105000"/>
+                <a:satMod val="103000"/>
+                <a:tint val="73000"/>
+              </a:schemeClr>
+            </a:gs>
+            <a:gs pos="100000">
+              <a:schemeClr val="phClr">
+                <a:lumMod val="105000"/>
+                <a:satMod val="109000"/>
+                <a:tint val="81000"/>
+              </a:schemeClr>
+            </a:gs>
+          </a:gsLst>
+          <a:lin ang="5400000" scaled="0"/>
+        </a:gradFill>
+        <a:gradFill rotWithShape="1">
+          <a:gsLst>
+            <a:gs pos="0">
+              <a:schemeClr val="phClr">
+                <a:satMod val="103000"/>
+                <a:lumMod val="102000"/>
+                <a:tint val="94000"/>
+              </a:schemeClr>
+            </a:gs>
+            <a:gs pos="50000">
+              <a:schemeClr val="phClr">
+                <a:satMod val="110000"/>
+                <a:lumMod val="100000"/>
+                <a:shade val="100000"/>
+              </a:schemeClr>
+            </a:gs>
+            <a:gs pos="100000">
+              <a:schemeClr val="phClr">
+                <a:lumMod val="99000"/>
+                <a:satMod val="120000"/>
+                <a:shade val="78000"/>
+              </a:schemeClr>
+            </a:gs>
+          </a:gsLst>
+          <a:lin ang="5400000" scaled="0"/>
+        </a:gradFill>
+      </a:fillStyleLst>
+      <a:lnStyleLst>
+        <a:ln w="6350" cap="flat" cmpd="sng" algn="ctr">
+          <a:solidFill>
+            <a:schemeClr val="phClr"/>
+          </a:solidFill>
+          <a:prstDash val="solid"/>
+          <a:miter lim="800000"/>
+        </a:ln>
+        <a:ln w="12700" cap="flat" cmpd="sng" algn="ctr">
+          <a:solidFill>
+            <a:schemeClr val="phClr"/>
+          </a:solidFill>
+          <a:prstDash val="solid"/>
+          <a:miter lim="800000"/>
+        </a:ln>
+        <a:ln w="19050" cap="flat" cmpd="sng" algn="ctr">
+          <a:solidFill>
+            <a:schemeClr val="phClr"/>
+          </a:solidFill>
+          <a:prstDash val="solid"/>
+          <a:miter lim="800000"/>
+        </a:ln>
+      </a:lnStyleLst>
+      <a:effectStyleLst>
+        <a:effectStyle>
+          <a:effectLst/>
+        </a:effectStyle>
+        <a:effectStyle>
+          <a:effectLst/>
+        </a:effectStyle>
+        <a:effectStyle>
+          <a:effectLst>
+            <a:outerShdw blurRad="57150" dist="19050" dir="5400000" algn="ctr" rotWithShape="0">
+              <a:srgbClr val="000000">
+                <a:alpha val="63000"/>
+              </a:srgbClr>
+            </a:outerShdw>
+          </a:effectLst>
+        </a:effectStyle>
+      </a:effectStyleLst>
+      <a:bgFillStyleLst>
+        <a:solidFill>
+          <a:schemeClr val="phClr"/>
+        </a:solidFill>
+        <a:solidFill>
+          <a:schemeClr val="phClr">
+            <a:tint val="95000"/>
+            <a:satMod val="170000"/>
+          </a:schemeClr>
+        </a:solidFill>
+        <a:gradFill rotWithShape="1">
+          <a:gsLst>
+            <a:gs pos="0">
+              <a:schemeClr val="phClr">
+                <a:tint val="93000"/>
+                <a:satMod val="150000"/>
+                <a:shade val="98000"/>
+                <a:lumMod val="102000"/>
+              </a:schemeClr>
+            </a:gs>
+            <a:gs pos="50000">
+              <a:schemeClr val="phClr">
+                <a:tint val="98000"/>
+                <a:satMod val="130000"/>
+                <a:shade val="90000"/>
+                <a:lumMod val="103000"/>
+              </a:schemeClr>
+            </a:gs>
+            <a:gs pos="100000">
+              <a:schemeClr val="phClr">
+                <a:shade val="63000"/>
+                <a:satMod val="120000"/>
+              </a:schemeClr>
+            </a:gs>
+          </a:gsLst>
+          <a:lin ang="5400000" scaled="0"/>
+        </a:gradFill>
+      </a:bgFillStyleLst>
+    </a:fmtScheme>
+  </a:themeElements>
+  <a:objectDefaults/>
+  <a:extraClrSchemeLst/>
+  <a:extLst>
+    <a:ext uri="{05A4C25C-085E-4340-85A3-A5531E510DB2}">
+      <thm15:themeFamily xmlns:thm15="http://schemas.microsoft.com/office/thememl/2012/main" name="Office Theme" id="{62F939B6-93AF-4DB8-9C6B-D6C7DFDC589F}" vid="{4A3C46E8-61CC-4603-A589-7422A47A8E4A}"/>
+    </a:ext>
+  </a:extLst>
+</a:theme>
 </file>
--- a/docs/110122127-TruongNguyenToNguyen-Báo cáo-Khóa luận TN.pptx
+++ b/docs/110122127-TruongNguyenToNguyen-Báo cáo-Khóa luận TN.pptx
@@ -5,7 +5,7 @@
     <p:sldMasterId id="2147483648" r:id="rId1"/>
   </p:sldMasterIdLst>
   <p:notesMasterIdLst>
-    <p:notesMasterId r:id="rId18"/>
+    <p:notesMasterId r:id="rId17"/>
   </p:notesMasterIdLst>
   <p:sldIdLst>
     <p:sldId id="256" r:id="rId2"/>
@@ -17,13 +17,12 @@
     <p:sldId id="262" r:id="rId8"/>
     <p:sldId id="264" r:id="rId9"/>
     <p:sldId id="261" r:id="rId10"/>
-    <p:sldId id="270" r:id="rId11"/>
-    <p:sldId id="271" r:id="rId12"/>
-    <p:sldId id="272" r:id="rId13"/>
-    <p:sldId id="274" r:id="rId14"/>
-    <p:sldId id="275" r:id="rId15"/>
-    <p:sldId id="265" r:id="rId16"/>
-    <p:sldId id="269" r:id="rId17"/>
+    <p:sldId id="271" r:id="rId11"/>
+    <p:sldId id="272" r:id="rId12"/>
+    <p:sldId id="274" r:id="rId13"/>
+    <p:sldId id="275" r:id="rId14"/>
+    <p:sldId id="265" r:id="rId15"/>
+    <p:sldId id="269" r:id="rId16"/>
   </p:sldIdLst>
   <p:sldSz cx="9144000" cy="5143500" type="screen16x9"/>
   <p:notesSz cx="6858000" cy="9144000"/>
@@ -136,7 +135,6 @@
             <p14:sldId id="262"/>
             <p14:sldId id="264"/>
             <p14:sldId id="261"/>
-            <p14:sldId id="270"/>
             <p14:sldId id="271"/>
             <p14:sldId id="272"/>
             <p14:sldId id="274"/>
@@ -236,7 +234,7 @@
           <a:p>
             <a:fld id="{D48BCE06-DC01-4404-BB88-82118F689A3E}" type="datetimeFigureOut">
               <a:rPr lang="vi-VN" smtClean="0"/>
-              <a:t>06/07/2026</a:t>
+              <a:t>22/07/2026</a:t>
             </a:fld>
             <a:endParaRPr lang="vi-VN"/>
           </a:p>
@@ -569,7 +567,7 @@
           <a:p>
             <a:fld id="{0C184B33-0608-452E-AA1F-2691FC844A4A}" type="slidenum">
               <a:rPr lang="vi-VN" smtClean="0"/>
-              <a:t>11</a:t>
+              <a:t>10</a:t>
             </a:fld>
             <a:endParaRPr lang="vi-VN"/>
           </a:p>
@@ -653,7 +651,7 @@
           <a:p>
             <a:fld id="{0C184B33-0608-452E-AA1F-2691FC844A4A}" type="slidenum">
               <a:rPr lang="vi-VN" smtClean="0"/>
-              <a:t>12</a:t>
+              <a:t>11</a:t>
             </a:fld>
             <a:endParaRPr lang="vi-VN"/>
           </a:p>
@@ -1781,6 +1779,60 @@
           <a:chExt cx="0" cy="0"/>
         </a:xfrm>
       </p:grpSpPr>
+      <p:sp>
+        <p:nvSpPr>
+          <p:cNvPr id="2" name="Flowchart: Connector 1">
+            <a:extLst>
+              <a:ext uri="{FF2B5EF4-FFF2-40B4-BE49-F238E27FC236}">
+                <a16:creationId xmlns:a16="http://schemas.microsoft.com/office/drawing/2014/main" id="{0F78E1EA-18F5-B18F-0E1B-690C79193CA0}"/>
+              </a:ext>
+            </a:extLst>
+          </p:cNvPr>
+          <p:cNvSpPr/>
+          <p:nvPr/>
+        </p:nvSpPr>
+        <p:spPr>
+          <a:xfrm>
+            <a:off x="104140" y="81280"/>
+            <a:ext cx="953473" cy="962409"/>
+          </a:xfrm>
+          <a:prstGeom prst="flowChartConnector">
+            <a:avLst/>
+          </a:prstGeom>
+          <a:solidFill>
+            <a:schemeClr val="tx1"/>
+          </a:solidFill>
+          <a:ln>
+            <a:solidFill>
+              <a:schemeClr val="tx1"/>
+            </a:solidFill>
+          </a:ln>
+        </p:spPr>
+        <p:style>
+          <a:lnRef idx="2">
+            <a:schemeClr val="accent1">
+              <a:shade val="15000"/>
+            </a:schemeClr>
+          </a:lnRef>
+          <a:fillRef idx="1">
+            <a:schemeClr val="accent1"/>
+          </a:fillRef>
+          <a:effectRef idx="0">
+            <a:schemeClr val="accent1"/>
+          </a:effectRef>
+          <a:fontRef idx="minor">
+            <a:schemeClr val="lt1"/>
+          </a:fontRef>
+        </p:style>
+        <p:txBody>
+          <a:bodyPr rtlCol="0" anchor="ctr"/>
+          <a:lstStyle/>
+          <a:p>
+            <a:pPr algn="ctr"/>
+            <a:endParaRPr lang="vi-VN"/>
+          </a:p>
+        </p:txBody>
+      </p:sp>
       <p:grpSp>
         <p:nvGrpSpPr>
           <p:cNvPr id="8" name="Google Shape;154;p32"/>
@@ -18417,10 +18469,10 @@
       </p:sp>
       <p:pic>
         <p:nvPicPr>
-          <p:cNvPr id="4" name="Picture 3">
+          <p:cNvPr id="7" name="Picture 6">
             <a:extLst>
               <a:ext uri="{FF2B5EF4-FFF2-40B4-BE49-F238E27FC236}">
-                <a16:creationId xmlns:a16="http://schemas.microsoft.com/office/drawing/2014/main" id="{E8AB30A2-8D32-0258-A80C-69742DB430D2}"/>
+                <a16:creationId xmlns:a16="http://schemas.microsoft.com/office/drawing/2014/main" id="{D5AC3439-FD53-87B1-3987-8A5777E4B7CF}"/>
               </a:ext>
             </a:extLst>
           </p:cNvPr>
@@ -18443,8 +18495,8 @@
         </p:blipFill>
         <p:spPr>
           <a:xfrm>
-            <a:off x="120866" y="174455"/>
-            <a:ext cx="839310" cy="839310"/>
+            <a:off x="78312" y="59920"/>
+            <a:ext cx="1005127" cy="1005127"/>
           </a:xfrm>
           <a:prstGeom prst="rect">
             <a:avLst/>
@@ -18533,69 +18585,190 @@
                 </a:solidFill>
                 <a:latin typeface="Orbitron"/>
               </a:rPr>
-              <a:t>Cơ sở dữ liệu (ERD)</a:t>
+              <a:t>Sơ đồ luồng Đặt giá</a:t>
+            </a:r>
+          </a:p>
+        </p:txBody>
+      </p:sp>
+      <p:sp>
+        <p:nvSpPr>
+          <p:cNvPr id="302" name="lbl_bf"/>
+          <p:cNvSpPr/>
+          <p:nvPr/>
+        </p:nvSpPr>
+        <p:spPr>
+          <a:xfrm>
+            <a:off x="300116" y="4655000"/>
+            <a:ext cx="3800000" cy="280000"/>
+          </a:xfrm>
+          <a:prstGeom prst="rect">
+            <a:avLst/>
+          </a:prstGeom>
+          <a:noFill/>
+          <a:ln w="0">
+            <a:noFill/>
+          </a:ln>
+        </p:spPr>
+        <p:style>
+          <a:lnRef idx="0">
+            <a:scrgbClr r="0" g="0" b="0"/>
+          </a:lnRef>
+          <a:fillRef idx="0">
+            <a:scrgbClr r="0" g="0" b="0"/>
+          </a:fillRef>
+          <a:effectRef idx="0">
+            <a:scrgbClr r="0" g="0" b="0"/>
+          </a:effectRef>
+          <a:fontRef idx="minor"/>
+        </p:style>
+        <p:txBody>
+          <a:bodyPr anchor="ctr">
+            <a:normAutofit/>
+          </a:bodyPr>
+          <a:lstStyle/>
+          <a:p>
+            <a:pPr algn="ctr"/>
+            <a:r>
+              <a:rPr lang="en-US" sz="1100" b="1">
+                <a:solidFill>
+                  <a:srgbClr val="92F7FF"/>
+                </a:solidFill>
+                <a:latin typeface="Archivo Light"/>
+              </a:rPr>
+              <a:t>S</a:t>
+            </a:r>
+            <a:r>
+              <a:rPr lang="vi-VN" sz="1100" b="1">
+                <a:solidFill>
+                  <a:srgbClr val="92F7FF"/>
+                </a:solidFill>
+                <a:latin typeface="Archivo Light"/>
+              </a:rPr>
+              <a:t>ơ đồ hoạt động</a:t>
+            </a:r>
+          </a:p>
+        </p:txBody>
+      </p:sp>
+      <p:sp>
+        <p:nvSpPr>
+          <p:cNvPr id="304" name="lbl_bs"/>
+          <p:cNvSpPr/>
+          <p:nvPr/>
+        </p:nvSpPr>
+        <p:spPr>
+          <a:xfrm>
+            <a:off x="3763522" y="4655000"/>
+            <a:ext cx="4600000" cy="280000"/>
+          </a:xfrm>
+          <a:prstGeom prst="rect">
+            <a:avLst/>
+          </a:prstGeom>
+          <a:noFill/>
+          <a:ln w="0">
+            <a:noFill/>
+          </a:ln>
+        </p:spPr>
+        <p:style>
+          <a:lnRef idx="0">
+            <a:scrgbClr r="0" g="0" b="0"/>
+          </a:lnRef>
+          <a:fillRef idx="0">
+            <a:scrgbClr r="0" g="0" b="0"/>
+          </a:fillRef>
+          <a:effectRef idx="0">
+            <a:scrgbClr r="0" g="0" b="0"/>
+          </a:effectRef>
+          <a:fontRef idx="minor"/>
+        </p:style>
+        <p:txBody>
+          <a:bodyPr anchor="ctr">
+            <a:normAutofit/>
+          </a:bodyPr>
+          <a:lstStyle/>
+          <a:p>
+            <a:pPr algn="ctr"/>
+            <a:r>
+              <a:rPr lang="vi-VN" sz="1100" b="1">
+                <a:solidFill>
+                  <a:srgbClr val="92F7FF"/>
+                </a:solidFill>
+                <a:latin typeface="Archivo Light"/>
+              </a:rPr>
+              <a:t>Sơ đồ tuần tự</a:t>
             </a:r>
           </a:p>
         </p:txBody>
       </p:sp>
       <p:pic>
         <p:nvPicPr>
-          <p:cNvPr id="2050" name="Picture 2">
+          <p:cNvPr id="3" name="Picture 2">
             <a:extLst>
               <a:ext uri="{FF2B5EF4-FFF2-40B4-BE49-F238E27FC236}">
-                <a16:creationId xmlns:a16="http://schemas.microsoft.com/office/drawing/2014/main" id="{B17C0491-DA17-359B-17AE-E5211FC4924F}"/>
+                <a16:creationId xmlns:a16="http://schemas.microsoft.com/office/drawing/2014/main" id="{544330EF-01EE-D553-FDDC-08DD984F3D9C}"/>
               </a:ext>
             </a:extLst>
           </p:cNvPr>
           <p:cNvPicPr>
-            <a:picLocks noChangeAspect="1" noChangeArrowheads="1"/>
+            <a:picLocks noChangeAspect="1"/>
           </p:cNvPicPr>
           <p:nvPr/>
         </p:nvPicPr>
         <p:blipFill>
-          <a:blip r:embed="rId2">
+          <a:blip r:embed="rId3" cstate="print">
             <a:extLst>
               <a:ext uri="{28A0092B-C50C-407E-A947-70E740481C1C}">
                 <a14:useLocalDpi xmlns:a14="http://schemas.microsoft.com/office/drawing/2010/main" val="0"/>
               </a:ext>
             </a:extLst>
           </a:blip>
-          <a:srcRect/>
           <a:stretch>
             <a:fillRect/>
           </a:stretch>
         </p:blipFill>
-        <p:spPr bwMode="auto">
+        <p:spPr>
           <a:xfrm>
-            <a:off x="787079" y="899895"/>
-            <a:ext cx="7592992" cy="4152773"/>
+            <a:off x="1326629" y="978986"/>
+            <a:ext cx="1925468" cy="3654083"/>
           </a:xfrm>
           <a:prstGeom prst="rect">
             <a:avLst/>
           </a:prstGeom>
-          <a:noFill/>
-          <a:ln>
-            <a:noFill/>
-          </a:ln>
-          <a:extLst>
-            <a:ext uri="{909E8E84-426E-40DD-AFC4-6F175D3DCCD1}">
-              <a14:hiddenFill xmlns:a14="http://schemas.microsoft.com/office/drawing/2010/main">
-                <a:solidFill>
-                  <a:srgbClr val="FFFFFF"/>
-                </a:solidFill>
-              </a14:hiddenFill>
-            </a:ext>
-            <a:ext uri="{91240B29-F687-4F45-9708-019B960494DF}">
-              <a14:hiddenLine xmlns:a14="http://schemas.microsoft.com/office/drawing/2010/main" w="9525">
-                <a:solidFill>
-                  <a:srgbClr val="000000"/>
-                </a:solidFill>
-                <a:miter lim="800000"/>
-                <a:headEnd/>
-                <a:tailEnd/>
-              </a14:hiddenLine>
-            </a:ext>
-          </a:extLst>
+        </p:spPr>
+      </p:pic>
+      <p:pic>
+        <p:nvPicPr>
+          <p:cNvPr id="5" name="Picture 4">
+            <a:extLst>
+              <a:ext uri="{FF2B5EF4-FFF2-40B4-BE49-F238E27FC236}">
+                <a16:creationId xmlns:a16="http://schemas.microsoft.com/office/drawing/2014/main" id="{E14C55B8-12A2-25DC-59D0-A34DDAAAB994}"/>
+              </a:ext>
+            </a:extLst>
+          </p:cNvPr>
+          <p:cNvPicPr>
+            <a:picLocks noChangeAspect="1"/>
+          </p:cNvPicPr>
+          <p:nvPr/>
+        </p:nvPicPr>
+        <p:blipFill>
+          <a:blip r:embed="rId4" cstate="print">
+            <a:extLst>
+              <a:ext uri="{28A0092B-C50C-407E-A947-70E740481C1C}">
+                <a14:useLocalDpi xmlns:a14="http://schemas.microsoft.com/office/drawing/2010/main" val="0"/>
+              </a:ext>
+            </a:extLst>
+          </a:blip>
+          <a:stretch>
+            <a:fillRect/>
+          </a:stretch>
+        </p:blipFill>
+        <p:spPr>
+          <a:xfrm>
+            <a:off x="4309673" y="1000917"/>
+            <a:ext cx="3507698" cy="3654083"/>
+          </a:xfrm>
+          <a:prstGeom prst="rect">
+            <a:avLst/>
+          </a:prstGeom>
         </p:spPr>
       </p:pic>
     </p:spTree>
@@ -18680,7 +18853,7 @@
                 </a:solidFill>
                 <a:latin typeface="Orbitron"/>
               </a:rPr>
-              <a:t>Sơ đồ luồng Đặt giá</a:t>
+              <a:t>Sơ đồ luồng Mua ngay</a:t>
             </a:r>
           </a:p>
         </p:txBody>
@@ -18693,7 +18866,7 @@
         </p:nvSpPr>
         <p:spPr>
           <a:xfrm>
-            <a:off x="-374441" y="4633069"/>
+            <a:off x="263331" y="4687170"/>
             <a:ext cx="3800000" cy="280000"/>
           </a:xfrm>
           <a:prstGeom prst="rect">
@@ -18724,22 +18897,13 @@
           <a:p>
             <a:pPr algn="ctr"/>
             <a:r>
-              <a:rPr lang="en-US" sz="1100" b="1">
+              <a:rPr lang="vi-VN" sz="1100" b="1">
                 <a:solidFill>
                   <a:srgbClr val="92F7FF"/>
                 </a:solidFill>
                 <a:latin typeface="Archivo Light"/>
               </a:rPr>
-              <a:t>S</a:t>
-            </a:r>
-            <a:r>
-              <a:rPr lang="vi-VN" sz="1100" b="1">
-                <a:solidFill>
-                  <a:srgbClr val="92F7FF"/>
-                </a:solidFill>
-                <a:latin typeface="Archivo Light"/>
-              </a:rPr>
-              <a:t>ơ đồ hoạt động</a:t>
+              <a:t>Sơ đồ hoạt động</a:t>
             </a:r>
           </a:p>
         </p:txBody>
@@ -18752,7 +18916,7 @@
         </p:nvSpPr>
         <p:spPr>
           <a:xfrm>
-            <a:off x="3596124" y="4655000"/>
+            <a:off x="4162635" y="4687170"/>
             <a:ext cx="4600000" cy="280000"/>
           </a:xfrm>
           <a:prstGeom prst="rect">
@@ -18796,122 +18960,74 @@
       </p:sp>
       <p:pic>
         <p:nvPicPr>
-          <p:cNvPr id="3074" name="Picture 2">
+          <p:cNvPr id="3" name="Picture 2">
             <a:extLst>
               <a:ext uri="{FF2B5EF4-FFF2-40B4-BE49-F238E27FC236}">
-                <a16:creationId xmlns:a16="http://schemas.microsoft.com/office/drawing/2014/main" id="{EEC18215-F2D9-7316-BDA9-09EC109F4C01}"/>
+                <a16:creationId xmlns:a16="http://schemas.microsoft.com/office/drawing/2014/main" id="{FE3F3100-72FF-F902-03E7-0AE28FB35020}"/>
               </a:ext>
             </a:extLst>
           </p:cNvPr>
           <p:cNvPicPr>
-            <a:picLocks noChangeAspect="1" noChangeArrowheads="1"/>
+            <a:picLocks noChangeAspect="1"/>
           </p:cNvPicPr>
           <p:nvPr/>
         </p:nvPicPr>
         <p:blipFill>
-          <a:blip r:embed="rId3">
+          <a:blip r:embed="rId3" cstate="print">
             <a:extLst>
               <a:ext uri="{28A0092B-C50C-407E-A947-70E740481C1C}">
                 <a14:useLocalDpi xmlns:a14="http://schemas.microsoft.com/office/drawing/2010/main" val="0"/>
               </a:ext>
             </a:extLst>
           </a:blip>
-          <a:srcRect/>
           <a:stretch>
             <a:fillRect/>
           </a:stretch>
         </p:blipFill>
-        <p:spPr bwMode="auto">
+        <p:spPr>
           <a:xfrm>
-            <a:off x="585710" y="853199"/>
-            <a:ext cx="1879698" cy="3776801"/>
+            <a:off x="4463331" y="1080327"/>
+            <a:ext cx="3800000" cy="3606843"/>
           </a:xfrm>
           <a:prstGeom prst="rect">
             <a:avLst/>
           </a:prstGeom>
-          <a:noFill/>
-          <a:ln>
-            <a:noFill/>
-          </a:ln>
-          <a:extLst>
-            <a:ext uri="{909E8E84-426E-40DD-AFC4-6F175D3DCCD1}">
-              <a14:hiddenFill xmlns:a14="http://schemas.microsoft.com/office/drawing/2010/main">
-                <a:solidFill>
-                  <a:srgbClr val="FFFFFF"/>
-                </a:solidFill>
-              </a14:hiddenFill>
-            </a:ext>
-            <a:ext uri="{91240B29-F687-4F45-9708-019B960494DF}">
-              <a14:hiddenLine xmlns:a14="http://schemas.microsoft.com/office/drawing/2010/main" w="9525">
-                <a:solidFill>
-                  <a:srgbClr val="000000"/>
-                </a:solidFill>
-                <a:miter lim="800000"/>
-                <a:headEnd/>
-                <a:tailEnd/>
-              </a14:hiddenLine>
-            </a:ext>
-          </a:extLst>
         </p:spPr>
       </p:pic>
       <p:pic>
         <p:nvPicPr>
-          <p:cNvPr id="3075" name="Picture 3">
+          <p:cNvPr id="5" name="Picture 4">
             <a:extLst>
               <a:ext uri="{FF2B5EF4-FFF2-40B4-BE49-F238E27FC236}">
-                <a16:creationId xmlns:a16="http://schemas.microsoft.com/office/drawing/2014/main" id="{F1DCCE3F-74D2-F220-C39D-E64F4CFE7970}"/>
+                <a16:creationId xmlns:a16="http://schemas.microsoft.com/office/drawing/2014/main" id="{EFBCAE3C-AC00-66A1-501E-8F83245782EC}"/>
               </a:ext>
             </a:extLst>
           </p:cNvPr>
           <p:cNvPicPr>
-            <a:picLocks noChangeAspect="1" noChangeArrowheads="1"/>
+            <a:picLocks noChangeAspect="1"/>
           </p:cNvPicPr>
           <p:nvPr/>
         </p:nvPicPr>
         <p:blipFill>
-          <a:blip r:embed="rId4">
+          <a:blip r:embed="rId4" cstate="print">
             <a:extLst>
               <a:ext uri="{28A0092B-C50C-407E-A947-70E740481C1C}">
                 <a14:useLocalDpi xmlns:a14="http://schemas.microsoft.com/office/drawing/2010/main" val="0"/>
               </a:ext>
             </a:extLst>
           </a:blip>
-          <a:srcRect/>
           <a:stretch>
             <a:fillRect/>
           </a:stretch>
         </p:blipFill>
-        <p:spPr bwMode="auto">
+        <p:spPr>
           <a:xfrm>
-            <a:off x="3177200" y="1489417"/>
-            <a:ext cx="5437848" cy="3165583"/>
+            <a:off x="762635" y="765368"/>
+            <a:ext cx="2900696" cy="3921802"/>
           </a:xfrm>
           <a:prstGeom prst="rect">
             <a:avLst/>
           </a:prstGeom>
-          <a:noFill/>
-          <a:ln>
-            <a:noFill/>
-          </a:ln>
-          <a:extLst>
-            <a:ext uri="{909E8E84-426E-40DD-AFC4-6F175D3DCCD1}">
-              <a14:hiddenFill xmlns:a14="http://schemas.microsoft.com/office/drawing/2010/main">
-                <a:solidFill>
-                  <a:srgbClr val="FFFFFF"/>
-                </a:solidFill>
-              </a14:hiddenFill>
-            </a:ext>
-            <a:ext uri="{91240B29-F687-4F45-9708-019B960494DF}">
-              <a14:hiddenLine xmlns:a14="http://schemas.microsoft.com/office/drawing/2010/main" w="9525">
-                <a:solidFill>
-                  <a:srgbClr val="000000"/>
-                </a:solidFill>
-                <a:miter lim="800000"/>
-                <a:headEnd/>
-                <a:tailEnd/>
-              </a14:hiddenLine>
-            </a:ext>
-          </a:extLst>
         </p:spPr>
       </p:pic>
     </p:spTree>
@@ -18935,313 +19051,6 @@
 </file>
 
 <file path=ppt/slides/slide12.xml><?xml version="1.0" encoding="utf-8"?>
-<p:sld xmlns:a="http://schemas.openxmlformats.org/drawingml/2006/main" xmlns:r="http://schemas.openxmlformats.org/officeDocument/2006/relationships" xmlns:p="http://schemas.openxmlformats.org/presentationml/2006/main">
-  <p:cSld>
-    <p:spTree>
-      <p:nvGrpSpPr>
-        <p:cNvPr id="1" name=""/>
-        <p:cNvGrpSpPr/>
-        <p:nvPr/>
-      </p:nvGrpSpPr>
-      <p:grpSpPr>
-        <a:xfrm>
-          <a:off x="0" y="0"/>
-          <a:ext cx="0" cy="0"/>
-          <a:chOff x="0" y="0"/>
-          <a:chExt cx="0" cy="0"/>
-        </a:xfrm>
-      </p:grpSpPr>
-      <p:sp>
-        <p:nvSpPr>
-          <p:cNvPr id="300" name="title"/>
-          <p:cNvSpPr/>
-          <p:nvPr/>
-        </p:nvSpPr>
-        <p:spPr>
-          <a:xfrm>
-            <a:off x="457200" y="400000"/>
-            <a:ext cx="8610840" cy="480000"/>
-          </a:xfrm>
-          <a:prstGeom prst="rect">
-            <a:avLst/>
-          </a:prstGeom>
-          <a:noFill/>
-          <a:ln w="0">
-            <a:noFill/>
-          </a:ln>
-        </p:spPr>
-        <p:style>
-          <a:lnRef idx="0">
-            <a:scrgbClr r="0" g="0" b="0"/>
-          </a:lnRef>
-          <a:fillRef idx="0">
-            <a:scrgbClr r="0" g="0" b="0"/>
-          </a:fillRef>
-          <a:effectRef idx="0">
-            <a:scrgbClr r="0" g="0" b="0"/>
-          </a:effectRef>
-          <a:fontRef idx="minor"/>
-        </p:style>
-        <p:txBody>
-          <a:bodyPr anchor="ctr">
-            <a:normAutofit/>
-          </a:bodyPr>
-          <a:lstStyle/>
-          <a:p>
-            <a:pPr algn="ctr"/>
-            <a:r>
-              <a:rPr lang="vi-VN" sz="2400" b="0">
-                <a:solidFill>
-                  <a:srgbClr val="92F7FF"/>
-                </a:solidFill>
-                <a:latin typeface="Orbitron"/>
-              </a:rPr>
-              <a:t>Sơ đồ luồng Mua ngay</a:t>
-            </a:r>
-          </a:p>
-        </p:txBody>
-      </p:sp>
-      <p:sp>
-        <p:nvSpPr>
-          <p:cNvPr id="302" name="lbl_bf"/>
-          <p:cNvSpPr/>
-          <p:nvPr/>
-        </p:nvSpPr>
-        <p:spPr>
-          <a:xfrm>
-            <a:off x="6974" y="4687170"/>
-            <a:ext cx="3800000" cy="280000"/>
-          </a:xfrm>
-          <a:prstGeom prst="rect">
-            <a:avLst/>
-          </a:prstGeom>
-          <a:noFill/>
-          <a:ln w="0">
-            <a:noFill/>
-          </a:ln>
-        </p:spPr>
-        <p:style>
-          <a:lnRef idx="0">
-            <a:scrgbClr r="0" g="0" b="0"/>
-          </a:lnRef>
-          <a:fillRef idx="0">
-            <a:scrgbClr r="0" g="0" b="0"/>
-          </a:fillRef>
-          <a:effectRef idx="0">
-            <a:scrgbClr r="0" g="0" b="0"/>
-          </a:effectRef>
-          <a:fontRef idx="minor"/>
-        </p:style>
-        <p:txBody>
-          <a:bodyPr anchor="ctr">
-            <a:normAutofit/>
-          </a:bodyPr>
-          <a:lstStyle/>
-          <a:p>
-            <a:pPr algn="ctr"/>
-            <a:r>
-              <a:rPr lang="vi-VN" sz="1100" b="1">
-                <a:solidFill>
-                  <a:srgbClr val="92F7FF"/>
-                </a:solidFill>
-                <a:latin typeface="Archivo Light"/>
-              </a:rPr>
-              <a:t>Sơ đồ hoạt động</a:t>
-            </a:r>
-          </a:p>
-        </p:txBody>
-      </p:sp>
-      <p:sp>
-        <p:nvSpPr>
-          <p:cNvPr id="304" name="lbl_bs"/>
-          <p:cNvSpPr/>
-          <p:nvPr/>
-        </p:nvSpPr>
-        <p:spPr>
-          <a:xfrm>
-            <a:off x="3936323" y="4687170"/>
-            <a:ext cx="4600000" cy="280000"/>
-          </a:xfrm>
-          <a:prstGeom prst="rect">
-            <a:avLst/>
-          </a:prstGeom>
-          <a:noFill/>
-          <a:ln w="0">
-            <a:noFill/>
-          </a:ln>
-        </p:spPr>
-        <p:style>
-          <a:lnRef idx="0">
-            <a:scrgbClr r="0" g="0" b="0"/>
-          </a:lnRef>
-          <a:fillRef idx="0">
-            <a:scrgbClr r="0" g="0" b="0"/>
-          </a:fillRef>
-          <a:effectRef idx="0">
-            <a:scrgbClr r="0" g="0" b="0"/>
-          </a:effectRef>
-          <a:fontRef idx="minor"/>
-        </p:style>
-        <p:txBody>
-          <a:bodyPr anchor="ctr">
-            <a:normAutofit/>
-          </a:bodyPr>
-          <a:lstStyle/>
-          <a:p>
-            <a:pPr algn="ctr"/>
-            <a:r>
-              <a:rPr lang="vi-VN" sz="1100" b="1">
-                <a:solidFill>
-                  <a:srgbClr val="92F7FF"/>
-                </a:solidFill>
-                <a:latin typeface="Archivo Light"/>
-              </a:rPr>
-              <a:t>Sơ đồ tuần tự</a:t>
-            </a:r>
-          </a:p>
-        </p:txBody>
-      </p:sp>
-      <p:pic>
-        <p:nvPicPr>
-          <p:cNvPr id="4098" name="Picture 2">
-            <a:extLst>
-              <a:ext uri="{FF2B5EF4-FFF2-40B4-BE49-F238E27FC236}">
-                <a16:creationId xmlns:a16="http://schemas.microsoft.com/office/drawing/2014/main" id="{A849432A-B6F1-51F8-D373-592602C07893}"/>
-              </a:ext>
-            </a:extLst>
-          </p:cNvPr>
-          <p:cNvPicPr>
-            <a:picLocks noChangeAspect="1" noChangeArrowheads="1"/>
-          </p:cNvPicPr>
-          <p:nvPr/>
-        </p:nvPicPr>
-        <p:blipFill>
-          <a:blip r:embed="rId3">
-            <a:extLst>
-              <a:ext uri="{28A0092B-C50C-407E-A947-70E740481C1C}">
-                <a14:useLocalDpi xmlns:a14="http://schemas.microsoft.com/office/drawing/2010/main" val="0"/>
-              </a:ext>
-            </a:extLst>
-          </a:blip>
-          <a:srcRect/>
-          <a:stretch>
-            <a:fillRect/>
-          </a:stretch>
-        </p:blipFill>
-        <p:spPr bwMode="auto">
-          <a:xfrm>
-            <a:off x="359764" y="1004734"/>
-            <a:ext cx="3094420" cy="3633687"/>
-          </a:xfrm>
-          <a:prstGeom prst="rect">
-            <a:avLst/>
-          </a:prstGeom>
-          <a:noFill/>
-          <a:ln>
-            <a:noFill/>
-          </a:ln>
-          <a:extLst>
-            <a:ext uri="{909E8E84-426E-40DD-AFC4-6F175D3DCCD1}">
-              <a14:hiddenFill xmlns:a14="http://schemas.microsoft.com/office/drawing/2010/main">
-                <a:solidFill>
-                  <a:srgbClr val="FFFFFF"/>
-                </a:solidFill>
-              </a14:hiddenFill>
-            </a:ext>
-            <a:ext uri="{91240B29-F687-4F45-9708-019B960494DF}">
-              <a14:hiddenLine xmlns:a14="http://schemas.microsoft.com/office/drawing/2010/main" w="9525">
-                <a:solidFill>
-                  <a:srgbClr val="000000"/>
-                </a:solidFill>
-                <a:miter lim="800000"/>
-                <a:headEnd/>
-                <a:tailEnd/>
-              </a14:hiddenLine>
-            </a:ext>
-          </a:extLst>
-        </p:spPr>
-      </p:pic>
-      <p:pic>
-        <p:nvPicPr>
-          <p:cNvPr id="4101" name="Picture 5">
-            <a:extLst>
-              <a:ext uri="{FF2B5EF4-FFF2-40B4-BE49-F238E27FC236}">
-                <a16:creationId xmlns:a16="http://schemas.microsoft.com/office/drawing/2014/main" id="{28E08795-69BF-D349-8A79-B569C9A3624F}"/>
-              </a:ext>
-            </a:extLst>
-          </p:cNvPr>
-          <p:cNvPicPr>
-            <a:picLocks noChangeAspect="1" noChangeArrowheads="1"/>
-          </p:cNvPicPr>
-          <p:nvPr/>
-        </p:nvPicPr>
-        <p:blipFill>
-          <a:blip r:embed="rId4">
-            <a:extLst>
-              <a:ext uri="{28A0092B-C50C-407E-A947-70E740481C1C}">
-                <a14:useLocalDpi xmlns:a14="http://schemas.microsoft.com/office/drawing/2010/main" val="0"/>
-              </a:ext>
-            </a:extLst>
-          </a:blip>
-          <a:srcRect b="4588"/>
-          <a:stretch>
-            <a:fillRect/>
-          </a:stretch>
-        </p:blipFill>
-        <p:spPr bwMode="auto">
-          <a:xfrm>
-            <a:off x="3688410" y="963156"/>
-            <a:ext cx="5095826" cy="3675265"/>
-          </a:xfrm>
-          <a:prstGeom prst="rect">
-            <a:avLst/>
-          </a:prstGeom>
-          <a:noFill/>
-          <a:ln>
-            <a:noFill/>
-          </a:ln>
-          <a:extLst>
-            <a:ext uri="{909E8E84-426E-40DD-AFC4-6F175D3DCCD1}">
-              <a14:hiddenFill xmlns:a14="http://schemas.microsoft.com/office/drawing/2010/main">
-                <a:solidFill>
-                  <a:srgbClr val="FFFFFF"/>
-                </a:solidFill>
-              </a14:hiddenFill>
-            </a:ext>
-            <a:ext uri="{91240B29-F687-4F45-9708-019B960494DF}">
-              <a14:hiddenLine xmlns:a14="http://schemas.microsoft.com/office/drawing/2010/main" w="9525">
-                <a:solidFill>
-                  <a:srgbClr val="000000"/>
-                </a:solidFill>
-                <a:miter lim="800000"/>
-                <a:headEnd/>
-                <a:tailEnd/>
-              </a14:hiddenLine>
-            </a:ext>
-          </a:extLst>
-        </p:spPr>
-      </p:pic>
-    </p:spTree>
-  </p:cSld>
-  <p:clrMapOvr>
-    <a:masterClrMapping/>
-  </p:clrMapOvr>
-  <mc:AlternateContent xmlns:mc="http://schemas.openxmlformats.org/markup-compatibility/2006" xmlns:p159="http://schemas.microsoft.com/office/powerpoint/2015/09/main">
-    <mc:Choice Requires="p159">
-      <p:transition xmlns:p14="http://schemas.microsoft.com/office/powerpoint/2010/main" spd="slow" p14:dur="2000">
-        <p159:morph option="byObject"/>
-      </p:transition>
-    </mc:Choice>
-    <mc:Fallback xmlns="">
-      <p:transition spd="slow">
-        <p:fade/>
-      </p:transition>
-    </mc:Fallback>
-  </mc:AlternateContent>
-</p:sld>
-</file>
-
-<file path=ppt/slides/slide13.xml><?xml version="1.0" encoding="utf-8"?>
 <p:sld xmlns:a="http://schemas.openxmlformats.org/drawingml/2006/main" xmlns:r="http://schemas.openxmlformats.org/officeDocument/2006/relationships" xmlns:p="http://schemas.openxmlformats.org/presentationml/2006/main">
   <p:cSld>
     <p:spTree>
@@ -19492,7 +19301,7 @@
 </p:sld>
 </file>
 
-<file path=ppt/slides/slide14.xml><?xml version="1.0" encoding="utf-8"?>
+<file path=ppt/slides/slide13.xml><?xml version="1.0" encoding="utf-8"?>
 <p:sld xmlns:a="http://schemas.openxmlformats.org/drawingml/2006/main" xmlns:r="http://schemas.openxmlformats.org/officeDocument/2006/relationships" xmlns:p="http://schemas.openxmlformats.org/presentationml/2006/main">
   <p:cSld>
     <p:spTree>
@@ -19734,10 +19543,11 @@
             </a:lvl9pPr>
           </a:lstStyle>
           <a:p>
-            <a:pPr marL="342900" defTabSz="914400">
+            <a:pPr marL="628650" indent="-285750" defTabSz="914400">
               <a:lnSpc>
                 <a:spcPct val="130000"/>
               </a:lnSpc>
+              <a:buFont typeface="Arial" panose="020B0604020202020204" pitchFamily="34" charset="0"/>
               <a:buChar char="•"/>
             </a:pPr>
             <a:r>
@@ -19747,14 +19557,15 @@
                 </a:solidFill>
                 <a:latin typeface="Archivo Light"/>
               </a:rPr>
-              <a:t>Giao diện đầy đủ cho người dùng và admin</a:t>
+              <a:t>Giao diện đầy đủ cho người dùng và quản trị viên</a:t>
             </a:r>
           </a:p>
           <a:p>
-            <a:pPr marL="342900" defTabSz="914400">
+            <a:pPr marL="628650" indent="-285750" defTabSz="914400">
               <a:lnSpc>
                 <a:spcPct val="130000"/>
               </a:lnSpc>
+              <a:buFont typeface="Arial" panose="020B0604020202020204" pitchFamily="34" charset="0"/>
               <a:buChar char="•"/>
             </a:pPr>
             <a:r>
@@ -19774,10 +19585,11 @@
             </a:endParaRPr>
           </a:p>
           <a:p>
-            <a:pPr marL="342900" defTabSz="914400">
+            <a:pPr marL="628650" indent="-285750">
               <a:lnSpc>
                 <a:spcPct val="130000"/>
               </a:lnSpc>
+              <a:buFont typeface="Arial" panose="020B0604020202020204" pitchFamily="34" charset="0"/>
               <a:buChar char="•"/>
             </a:pPr>
             <a:r>
@@ -19787,8 +19599,83 @@
                 </a:solidFill>
                 <a:latin typeface="Archivo Light"/>
               </a:rPr>
-              <a:t>Hạn chế: chưa tích hợp cổng thanh toán thực</a:t>
+              <a:t>Hạn chế: </a:t>
             </a:r>
+            <a:r>
+              <a:rPr lang="vi-VN" sz="1600">
+                <a:solidFill>
+                  <a:schemeClr val="tx2">
+                    <a:lumMod val="60000"/>
+                    <a:lumOff val="40000"/>
+                  </a:schemeClr>
+                </a:solidFill>
+                <a:latin typeface="Archivo"/>
+              </a:rPr>
+              <a:t>Đã tích hợp VNPay ở môi trường </a:t>
+            </a:r>
+            <a:r>
+              <a:rPr lang="en-US" sz="1600">
+                <a:solidFill>
+                  <a:schemeClr val="tx2">
+                    <a:lumMod val="60000"/>
+                    <a:lumOff val="40000"/>
+                  </a:schemeClr>
+                </a:solidFill>
+                <a:latin typeface="Archivo"/>
+              </a:rPr>
+              <a:t>thử nghiệm</a:t>
+            </a:r>
+            <a:r>
+              <a:rPr lang="vi-VN" sz="1600">
+                <a:solidFill>
+                  <a:schemeClr val="tx2">
+                    <a:lumMod val="60000"/>
+                    <a:lumOff val="40000"/>
+                  </a:schemeClr>
+                </a:solidFill>
+                <a:latin typeface="Archivo"/>
+              </a:rPr>
+              <a:t>, chưa triển khai với tài khoản </a:t>
+            </a:r>
+            <a:r>
+              <a:rPr lang="en-US" sz="1600">
+                <a:solidFill>
+                  <a:schemeClr val="tx2">
+                    <a:lumMod val="60000"/>
+                    <a:lumOff val="40000"/>
+                  </a:schemeClr>
+                </a:solidFill>
+                <a:latin typeface="Archivo"/>
+              </a:rPr>
+              <a:t>đối tác kinh doanh </a:t>
+            </a:r>
+            <a:r>
+              <a:rPr lang="vi-VN" sz="1600">
+                <a:solidFill>
+                  <a:schemeClr val="tx2">
+                    <a:lumMod val="60000"/>
+                    <a:lumOff val="40000"/>
+                  </a:schemeClr>
+                </a:solidFill>
+                <a:latin typeface="Archivo"/>
+              </a:rPr>
+              <a:t>(merchant) thật; chưa tích hợp thêm cổng thanh toán MoMo.</a:t>
+            </a:r>
+          </a:p>
+          <a:p>
+            <a:pPr marL="628650" indent="-285750" defTabSz="914400">
+              <a:lnSpc>
+                <a:spcPct val="130000"/>
+              </a:lnSpc>
+              <a:buFont typeface="Arial" panose="020B0604020202020204" pitchFamily="34" charset="0"/>
+              <a:buChar char="•"/>
+            </a:pPr>
+            <a:endParaRPr lang="vi-VN" sz="1600" b="0">
+              <a:solidFill>
+                <a:srgbClr val="92F7FF"/>
+              </a:solidFill>
+              <a:latin typeface="Archivo Light"/>
+            </a:endParaRPr>
           </a:p>
         </p:txBody>
       </p:sp>
@@ -19817,7 +19704,7 @@
 </p:sld>
 </file>
 
-<file path=ppt/slides/slide15.xml><?xml version="1.0" encoding="utf-8"?>
+<file path=ppt/slides/slide14.xml><?xml version="1.0" encoding="utf-8"?>
 <p:sld xmlns:a="http://schemas.openxmlformats.org/drawingml/2006/main" xmlns:r="http://schemas.openxmlformats.org/officeDocument/2006/relationships" xmlns:p="http://schemas.openxmlformats.org/presentationml/2006/main">
   <p:cSld>
     <p:spTree>
@@ -19915,7 +19802,7 @@
         </p:nvSpPr>
         <p:spPr>
           <a:xfrm>
-            <a:off x="352046" y="2023709"/>
+            <a:off x="619200" y="1490309"/>
             <a:ext cx="7615226" cy="2938034"/>
           </a:xfrm>
           <a:prstGeom prst="rect">
@@ -20038,55 +19925,289 @@
             </a:lvl9pPr>
           </a:lstStyle>
           <a:p>
-            <a:pPr marL="342900" defTabSz="914400">
-              <a:lnSpc>
-                <a:spcPct val="130000"/>
-              </a:lnSpc>
+            <a:pPr marL="285750" lvl="0" indent="-285750" algn="just">
+              <a:buFont typeface="Arial" panose="020B0604020202020204" pitchFamily="34" charset="0"/>
               <a:buChar char="•"/>
             </a:pPr>
             <a:r>
-              <a:rPr lang="vi-VN" sz="1600" b="0">
-                <a:solidFill>
-                  <a:srgbClr val="92F7FF"/>
-                </a:solidFill>
-                <a:latin typeface="Archivo Light"/>
+              <a:rPr lang="vi-VN" sz="1600">
+                <a:solidFill>
+                  <a:schemeClr val="tx2">
+                    <a:lumMod val="60000"/>
+                    <a:lumOff val="40000"/>
+                  </a:schemeClr>
+                </a:solidFill>
+                <a:latin typeface="Archivo"/>
               </a:rPr>
-              <a:t>Tích hợp thanh toán bằng ví điện tử/ngân hàng</a:t>
+              <a:t>Chuyển tích hợp VNPay từ môi trường </a:t>
+            </a:r>
+            <a:r>
+              <a:rPr lang="en-US" sz="1600">
+                <a:solidFill>
+                  <a:schemeClr val="tx2">
+                    <a:lumMod val="60000"/>
+                    <a:lumOff val="40000"/>
+                  </a:schemeClr>
+                </a:solidFill>
+                <a:latin typeface="Archivo"/>
+              </a:rPr>
+              <a:t>thử nghiệm</a:t>
+            </a:r>
+            <a:r>
+              <a:rPr lang="vi-VN" sz="1600">
+                <a:solidFill>
+                  <a:schemeClr val="tx2">
+                    <a:lumMod val="60000"/>
+                    <a:lumOff val="40000"/>
+                  </a:schemeClr>
+                </a:solidFill>
+                <a:latin typeface="Archivo"/>
+              </a:rPr>
+              <a:t> sang tài khoản </a:t>
+            </a:r>
+            <a:r>
+              <a:rPr lang="en-US" sz="1600">
+                <a:solidFill>
+                  <a:schemeClr val="tx2">
+                    <a:lumMod val="60000"/>
+                    <a:lumOff val="40000"/>
+                  </a:schemeClr>
+                </a:solidFill>
+                <a:latin typeface="Archivo"/>
+              </a:rPr>
+              <a:t>đối tác kinh doanh</a:t>
+            </a:r>
+            <a:r>
+              <a:rPr lang="vi-VN" sz="1600">
+                <a:solidFill>
+                  <a:schemeClr val="tx2">
+                    <a:lumMod val="60000"/>
+                    <a:lumOff val="40000"/>
+                  </a:schemeClr>
+                </a:solidFill>
+                <a:latin typeface="Archivo"/>
+              </a:rPr>
+              <a:t> thật; bổ sung tích hợp cổng thanh toán MoMo.</a:t>
             </a:r>
           </a:p>
           <a:p>
-            <a:pPr marL="342900" defTabSz="914400">
-              <a:lnSpc>
-                <a:spcPct val="130000"/>
-              </a:lnSpc>
+            <a:pPr marL="285750" lvl="0" indent="-285750" algn="just">
+              <a:buFont typeface="Arial" panose="020B0604020202020204" pitchFamily="34" charset="0"/>
               <a:buChar char="•"/>
             </a:pPr>
             <a:r>
-              <a:rPr lang="vi-VN" sz="1600" b="0">
-                <a:solidFill>
-                  <a:srgbClr val="92F7FF"/>
-                </a:solidFill>
-                <a:latin typeface="Archivo Light"/>
+              <a:rPr lang="vi-VN" sz="1600">
+                <a:solidFill>
+                  <a:schemeClr val="tx2">
+                    <a:lumMod val="60000"/>
+                    <a:lumOff val="40000"/>
+                  </a:schemeClr>
+                </a:solidFill>
+                <a:latin typeface="Archivo"/>
               </a:rPr>
-              <a:t>Thêm tính năng trò chuyện trực tiếp giữa người dùng</a:t>
+              <a:t>Bổ sung tính năng chat trực tiếp giữa người mua và người bán</a:t>
             </a:r>
+            <a:r>
+              <a:rPr lang="en-US" sz="1600">
+                <a:solidFill>
+                  <a:schemeClr val="tx2">
+                    <a:lumMod val="60000"/>
+                    <a:lumOff val="40000"/>
+                  </a:schemeClr>
+                </a:solidFill>
+                <a:latin typeface="Archivo"/>
+              </a:rPr>
+              <a:t>.</a:t>
+            </a:r>
+            <a:endParaRPr lang="vi-VN" sz="1600">
+              <a:solidFill>
+                <a:schemeClr val="tx2">
+                  <a:lumMod val="60000"/>
+                  <a:lumOff val="40000"/>
+                </a:schemeClr>
+              </a:solidFill>
+              <a:latin typeface="Archivo"/>
+            </a:endParaRPr>
           </a:p>
           <a:p>
-            <a:pPr marL="342900" defTabSz="914400">
-              <a:lnSpc>
-                <a:spcPct val="130000"/>
-              </a:lnSpc>
+            <a:pPr marL="285750" lvl="0" indent="-285750" algn="just">
+              <a:buFont typeface="Arial" panose="020B0604020202020204" pitchFamily="34" charset="0"/>
               <a:buChar char="•"/>
             </a:pPr>
             <a:r>
-              <a:rPr lang="vi-VN" sz="1600" b="0">
-                <a:solidFill>
-                  <a:srgbClr val="92F7FF"/>
-                </a:solidFill>
-                <a:latin typeface="Archivo Light"/>
+              <a:rPr lang="vi-VN" sz="1600">
+                <a:solidFill>
+                  <a:schemeClr val="tx2">
+                    <a:lumMod val="60000"/>
+                    <a:lumOff val="40000"/>
+                  </a:schemeClr>
+                </a:solidFill>
+                <a:latin typeface="Archivo"/>
               </a:rPr>
-              <a:t>Phát triển ứng dụng di động</a:t>
+              <a:t>Tích hợp tính năng </a:t>
             </a:r>
+            <a:r>
+              <a:rPr lang="en-US" sz="1600">
+                <a:solidFill>
+                  <a:schemeClr val="tx2">
+                    <a:lumMod val="60000"/>
+                    <a:lumOff val="40000"/>
+                  </a:schemeClr>
+                </a:solidFill>
+                <a:latin typeface="Archivo"/>
+              </a:rPr>
+              <a:t>đánh giá</a:t>
+            </a:r>
+            <a:r>
+              <a:rPr lang="vi-VN" sz="1600">
+                <a:solidFill>
+                  <a:schemeClr val="tx2">
+                    <a:lumMod val="60000"/>
+                    <a:lumOff val="40000"/>
+                  </a:schemeClr>
+                </a:solidFill>
+                <a:latin typeface="Archivo"/>
+              </a:rPr>
+              <a:t> sau mỗi giao dịch hoàn thành, </a:t>
+            </a:r>
+            <a:r>
+              <a:rPr lang="en-US" sz="1600">
+                <a:solidFill>
+                  <a:schemeClr val="tx2">
+                    <a:lumMod val="60000"/>
+                    <a:lumOff val="40000"/>
+                  </a:schemeClr>
+                </a:solidFill>
+                <a:latin typeface="Archivo"/>
+              </a:rPr>
+              <a:t>đồng thời tích hợp tính điểm tín nhiệm dựa trên các đánh giá.</a:t>
+            </a:r>
+            <a:endParaRPr lang="vi-VN" sz="1600">
+              <a:solidFill>
+                <a:schemeClr val="tx2">
+                  <a:lumMod val="60000"/>
+                  <a:lumOff val="40000"/>
+                </a:schemeClr>
+              </a:solidFill>
+              <a:latin typeface="Archivo"/>
+            </a:endParaRPr>
+          </a:p>
+          <a:p>
+            <a:pPr marL="285750" lvl="0" indent="-285750" algn="just">
+              <a:buFont typeface="Arial" panose="020B0604020202020204" pitchFamily="34" charset="0"/>
+              <a:buChar char="•"/>
+            </a:pPr>
+            <a:r>
+              <a:rPr lang="vi-VN" sz="1600">
+                <a:solidFill>
+                  <a:schemeClr val="tx2">
+                    <a:lumMod val="60000"/>
+                    <a:lumOff val="40000"/>
+                  </a:schemeClr>
+                </a:solidFill>
+                <a:latin typeface="Archivo"/>
+              </a:rPr>
+              <a:t>Tối ưu hiệu năng truy vấn cơ sở dữ liệu bằng JOIN FETCH, caching (Redis) khi mở rộng quy mô</a:t>
+            </a:r>
+            <a:r>
+              <a:rPr lang="en-US" sz="1600">
+                <a:solidFill>
+                  <a:schemeClr val="tx2">
+                    <a:lumMod val="60000"/>
+                    <a:lumOff val="40000"/>
+                  </a:schemeClr>
+                </a:solidFill>
+                <a:latin typeface="Archivo"/>
+              </a:rPr>
+              <a:t>.</a:t>
+            </a:r>
+            <a:endParaRPr lang="vi-VN" sz="1600">
+              <a:solidFill>
+                <a:schemeClr val="tx2">
+                  <a:lumMod val="60000"/>
+                  <a:lumOff val="40000"/>
+                </a:schemeClr>
+              </a:solidFill>
+              <a:latin typeface="Archivo"/>
+            </a:endParaRPr>
+          </a:p>
+          <a:p>
+            <a:pPr marL="285750" lvl="0" indent="-285750" algn="just">
+              <a:buFont typeface="Arial" panose="020B0604020202020204" pitchFamily="34" charset="0"/>
+              <a:buChar char="•"/>
+            </a:pPr>
+            <a:r>
+              <a:rPr lang="vi-VN" sz="1600">
+                <a:solidFill>
+                  <a:schemeClr val="tx2">
+                    <a:lumMod val="60000"/>
+                    <a:lumOff val="40000"/>
+                  </a:schemeClr>
+                </a:solidFill>
+                <a:latin typeface="Archivo"/>
+              </a:rPr>
+              <a:t>Thực hiện kiểm thử tải để đánh giá khả năng chịu tải khi có nhiều người dùng đặt giá đồng thời</a:t>
+            </a:r>
+            <a:r>
+              <a:rPr lang="en-US" sz="1600">
+                <a:solidFill>
+                  <a:schemeClr val="tx2">
+                    <a:lumMod val="60000"/>
+                    <a:lumOff val="40000"/>
+                  </a:schemeClr>
+                </a:solidFill>
+                <a:latin typeface="Archivo"/>
+              </a:rPr>
+              <a:t>.</a:t>
+            </a:r>
+            <a:endParaRPr lang="vi-VN" sz="1600">
+              <a:solidFill>
+                <a:schemeClr val="tx2">
+                  <a:lumMod val="60000"/>
+                  <a:lumOff val="40000"/>
+                </a:schemeClr>
+              </a:solidFill>
+              <a:latin typeface="Archivo"/>
+            </a:endParaRPr>
+          </a:p>
+          <a:p>
+            <a:pPr marL="285750" lvl="0" indent="-285750" algn="just">
+              <a:buFont typeface="Arial" panose="020B0604020202020204" pitchFamily="34" charset="0"/>
+              <a:buChar char="•"/>
+            </a:pPr>
+            <a:r>
+              <a:rPr lang="vi-VN" sz="1600">
+                <a:solidFill>
+                  <a:schemeClr val="tx2">
+                    <a:lumMod val="60000"/>
+                    <a:lumOff val="40000"/>
+                  </a:schemeClr>
+                </a:solidFill>
+                <a:latin typeface="Archivo"/>
+              </a:rPr>
+              <a:t>Phát triển ứng dụng di động (mobile app) để tăng khả năng tiếp cận người dùng</a:t>
+            </a:r>
+            <a:r>
+              <a:rPr lang="en-US" sz="1600">
+                <a:solidFill>
+                  <a:schemeClr val="tx2">
+                    <a:lumMod val="60000"/>
+                    <a:lumOff val="40000"/>
+                  </a:schemeClr>
+                </a:solidFill>
+                <a:latin typeface="Archivo"/>
+              </a:rPr>
+              <a:t>.</a:t>
+            </a:r>
+            <a:endParaRPr lang="vi-VN" sz="1600">
+              <a:solidFill>
+                <a:schemeClr val="tx2">
+                  <a:lumMod val="60000"/>
+                  <a:lumOff val="40000"/>
+                </a:schemeClr>
+              </a:solidFill>
+              <a:latin typeface="Archivo"/>
+            </a:endParaRPr>
           </a:p>
         </p:txBody>
       </p:sp>
@@ -20110,7 +20231,7 @@
 </p:sld>
 </file>
 
-<file path=ppt/slides/slide16.xml><?xml version="1.0" encoding="utf-8"?>
+<file path=ppt/slides/slide15.xml><?xml version="1.0" encoding="utf-8"?>
 <p:sld xmlns:a="http://schemas.openxmlformats.org/drawingml/2006/main" xmlns:r="http://schemas.openxmlformats.org/officeDocument/2006/relationships" xmlns:p="http://schemas.openxmlformats.org/presentationml/2006/main">
   <p:cSld>
     <p:spTree>
@@ -20349,7 +20470,7 @@
                 </a:solidFill>
                 <a:latin typeface="Archivo Light"/>
               </a:rPr>
-              <a:t>GVHD: Ths. Ngô Thanh Huy</a:t>
+              <a:t>GVHD: ThS. Ngô Thanh Huy</a:t>
             </a:r>
           </a:p>
           <a:p>
@@ -20701,10 +20822,11 @@
             </a:r>
           </a:p>
           <a:p>
-            <a:pPr marL="342900" algn="just" defTabSz="914400">
+            <a:pPr marL="628650" indent="-285750" algn="just" defTabSz="914400">
               <a:lnSpc>
                 <a:spcPct val="130000"/>
               </a:lnSpc>
+              <a:buFont typeface="Arial" panose="020B0604020202020204" pitchFamily="34" charset="0"/>
               <a:buChar char="•"/>
             </a:pPr>
             <a:r>
@@ -20718,10 +20840,11 @@
             </a:r>
           </a:p>
           <a:p>
-            <a:pPr marL="342900" algn="just" defTabSz="914400">
+            <a:pPr marL="628650" indent="-285750" algn="just" defTabSz="914400">
               <a:lnSpc>
                 <a:spcPct val="130000"/>
               </a:lnSpc>
+              <a:buFont typeface="Arial" panose="020B0604020202020204" pitchFamily="34" charset="0"/>
               <a:buChar char="•"/>
             </a:pPr>
             <a:r>
@@ -20735,10 +20858,11 @@
             </a:r>
           </a:p>
           <a:p>
-            <a:pPr marL="342900" algn="just" defTabSz="914400">
+            <a:pPr marL="628650" indent="-285750" algn="just" defTabSz="914400">
               <a:lnSpc>
                 <a:spcPct val="130000"/>
               </a:lnSpc>
+              <a:buFont typeface="Arial" panose="020B0604020202020204" pitchFamily="34" charset="0"/>
               <a:buChar char="•"/>
             </a:pPr>
             <a:r>
@@ -20750,6 +20874,30 @@
               </a:rPr>
               <a:t>Quản lý đơn hàng, thông báo, kiểm duyệt</a:t>
             </a:r>
+          </a:p>
+          <a:p>
+            <a:pPr marL="628650" indent="-285750" algn="just" defTabSz="914400">
+              <a:lnSpc>
+                <a:spcPct val="130000"/>
+              </a:lnSpc>
+              <a:buFont typeface="Arial" panose="020B0604020202020204" pitchFamily="34" charset="0"/>
+              <a:buChar char="•"/>
+            </a:pPr>
+            <a:r>
+              <a:rPr lang="vi-VN" sz="1400">
+                <a:solidFill>
+                  <a:srgbClr val="92F7FF"/>
+                </a:solidFill>
+                <a:latin typeface="Archivo Light"/>
+              </a:rPr>
+              <a:t>Nạp tiền vào ví và rút tiền về tài khoản ngân hàng</a:t>
+            </a:r>
+            <a:endParaRPr lang="vi-VN" sz="1400" b="0">
+              <a:solidFill>
+                <a:srgbClr val="92F7FF"/>
+              </a:solidFill>
+              <a:latin typeface="Archivo Light"/>
+            </a:endParaRPr>
           </a:p>
         </p:txBody>
       </p:sp>
@@ -21602,10 +21750,11 @@
             </a:lvl9pPr>
           </a:lstStyle>
           <a:p>
-            <a:pPr marL="342900" defTabSz="914400">
+            <a:pPr marL="628650" indent="-285750" defTabSz="914400">
               <a:lnSpc>
                 <a:spcPct val="130000"/>
               </a:lnSpc>
+              <a:buFont typeface="Arial" panose="020B0604020202020204" pitchFamily="34" charset="0"/>
               <a:buChar char="•"/>
             </a:pPr>
             <a:r>
@@ -21619,10 +21768,11 @@
             </a:r>
           </a:p>
           <a:p>
-            <a:pPr marL="342900" defTabSz="914400">
+            <a:pPr marL="628650" indent="-285750" defTabSz="914400">
               <a:lnSpc>
                 <a:spcPct val="130000"/>
               </a:lnSpc>
+              <a:buFont typeface="Arial" panose="020B0604020202020204" pitchFamily="34" charset="0"/>
               <a:buChar char="•"/>
             </a:pPr>
             <a:r>
@@ -21636,10 +21786,11 @@
             </a:r>
           </a:p>
           <a:p>
-            <a:pPr marL="342900" defTabSz="914400">
+            <a:pPr marL="628650" indent="-285750" defTabSz="914400">
               <a:lnSpc>
                 <a:spcPct val="130000"/>
               </a:lnSpc>
+              <a:buFont typeface="Arial" panose="020B0604020202020204" pitchFamily="34" charset="0"/>
               <a:buChar char="•"/>
             </a:pPr>
             <a:r>
@@ -21653,10 +21804,11 @@
             </a:r>
           </a:p>
           <a:p>
-            <a:pPr marL="342900" defTabSz="914400">
+            <a:pPr marL="628650" indent="-285750" defTabSz="914400">
               <a:lnSpc>
                 <a:spcPct val="130000"/>
               </a:lnSpc>
+              <a:buFont typeface="Arial" panose="020B0604020202020204" pitchFamily="34" charset="0"/>
               <a:buChar char="•"/>
             </a:pPr>
             <a:r>
@@ -21670,10 +21822,11 @@
             </a:r>
           </a:p>
           <a:p>
-            <a:pPr marL="342900" defTabSz="914400">
+            <a:pPr marL="628650" indent="-285750" defTabSz="914400">
               <a:lnSpc>
                 <a:spcPct val="130000"/>
               </a:lnSpc>
+              <a:buFont typeface="Arial" panose="020B0604020202020204" pitchFamily="34" charset="0"/>
               <a:buChar char="•"/>
             </a:pPr>
             <a:r>
@@ -21831,7 +21984,7 @@
         </p:style>
         <p:txBody>
           <a:bodyPr anchor="t">
-            <a:normAutofit/>
+            <a:normAutofit lnSpcReduction="10000"/>
           </a:bodyPr>
           <a:lstStyle>
             <a:defPPr>
@@ -21951,11 +22104,11 @@
             </a:endParaRPr>
           </a:p>
           <a:p>
-            <a:pPr marL="342900">
+            <a:pPr marL="628650" indent="-285750">
               <a:lnSpc>
                 <a:spcPct val="130000"/>
               </a:lnSpc>
-              <a:buFontTx/>
+              <a:buFont typeface="Arial" panose="020B0604020202020204" pitchFamily="34" charset="0"/>
               <a:buChar char="•"/>
             </a:pPr>
             <a:r>
@@ -21969,11 +22122,11 @@
             </a:r>
           </a:p>
           <a:p>
-            <a:pPr marL="342900">
+            <a:pPr marL="628650" indent="-285750">
               <a:lnSpc>
                 <a:spcPct val="130000"/>
               </a:lnSpc>
-              <a:buFontTx/>
+              <a:buFont typeface="Arial" panose="020B0604020202020204" pitchFamily="34" charset="0"/>
               <a:buChar char="•"/>
             </a:pPr>
             <a:r>
@@ -21993,10 +22146,11 @@
             </a:endParaRPr>
           </a:p>
           <a:p>
-            <a:pPr marL="342900" defTabSz="914400">
+            <a:pPr marL="628650" indent="-285750" defTabSz="914400">
               <a:lnSpc>
                 <a:spcPct val="130000"/>
               </a:lnSpc>
+              <a:buFont typeface="Arial" panose="020B0604020202020204" pitchFamily="34" charset="0"/>
               <a:buChar char="•"/>
             </a:pPr>
             <a:r>
@@ -22010,10 +22164,11 @@
             </a:r>
           </a:p>
           <a:p>
-            <a:pPr marL="342900" defTabSz="914400">
+            <a:pPr marL="628650" indent="-285750" defTabSz="914400">
               <a:lnSpc>
                 <a:spcPct val="130000"/>
               </a:lnSpc>
+              <a:buFont typeface="Arial" panose="020B0604020202020204" pitchFamily="34" charset="0"/>
               <a:buChar char="•"/>
             </a:pPr>
             <a:r>
@@ -22027,10 +22182,11 @@
             </a:r>
           </a:p>
           <a:p>
-            <a:pPr marL="342900" defTabSz="914400">
+            <a:pPr marL="628650" indent="-285750" defTabSz="914400">
               <a:lnSpc>
                 <a:spcPct val="130000"/>
               </a:lnSpc>
+              <a:buFont typeface="Arial" panose="020B0604020202020204" pitchFamily="34" charset="0"/>
               <a:buChar char="•"/>
             </a:pPr>
             <a:r>
@@ -22073,10 +22229,11 @@
             </a:r>
           </a:p>
           <a:p>
-            <a:pPr marL="342900" defTabSz="914400">
+            <a:pPr marL="628650" indent="-285750">
               <a:lnSpc>
                 <a:spcPct val="130000"/>
               </a:lnSpc>
+              <a:buFont typeface="Arial" panose="020B0604020202020204" pitchFamily="34" charset="0"/>
               <a:buChar char="•"/>
             </a:pPr>
             <a:r>
@@ -22086,20 +22243,27 @@
                 </a:solidFill>
                 <a:latin typeface="Archivo Light"/>
               </a:rPr>
-              <a:t>Triển khai web, mô phỏng thanh toán</a:t>
+              <a:t>Triển khai web, </a:t>
             </a:r>
-            <a:endParaRPr lang="vi-VN" sz="1600" b="0">
-              <a:solidFill>
-                <a:srgbClr val="92F7FF"/>
-              </a:solidFill>
-              <a:latin typeface="Archivo Light"/>
-            </a:endParaRPr>
+            <a:r>
+              <a:rPr lang="vi-VN" sz="1600">
+                <a:solidFill>
+                  <a:schemeClr val="tx2">
+                    <a:lumMod val="60000"/>
+                    <a:lumOff val="40000"/>
+                  </a:schemeClr>
+                </a:solidFill>
+                <a:latin typeface="Archivo"/>
+              </a:rPr>
+              <a:t>nạp tiền và thanh toán đơn hàng được tích hợp qua cổng thanh toán VNPay ở môi trường thử nghiệm </a:t>
+            </a:r>
           </a:p>
           <a:p>
-            <a:pPr marL="342900" defTabSz="914400">
+            <a:pPr marL="628650" indent="-285750">
               <a:lnSpc>
                 <a:spcPct val="130000"/>
               </a:lnSpc>
+              <a:buFont typeface="Arial" panose="020B0604020202020204" pitchFamily="34" charset="0"/>
               <a:buChar char="•"/>
             </a:pPr>
             <a:r>
@@ -22109,7 +22273,7 @@
                 </a:solidFill>
                 <a:latin typeface="Archivo Light"/>
               </a:rPr>
-              <a:t>Không bao gồm: cổng thanh toán thực, ứng dụng di động</a:t>
+              <a:t>Không bao gồm: ứng dụng di động</a:t>
             </a:r>
           </a:p>
           <a:p>
@@ -22650,10 +22814,11 @@
             </a:lvl9pPr>
           </a:lstStyle>
           <a:p>
-            <a:pPr marL="342900" defTabSz="914400">
+            <a:pPr marL="628650" indent="-285750" defTabSz="914400">
               <a:lnSpc>
                 <a:spcPct val="130000"/>
               </a:lnSpc>
+              <a:buFont typeface="Arial" panose="020B0604020202020204" pitchFamily="34" charset="0"/>
               <a:buChar char="•"/>
             </a:pPr>
             <a:r>
@@ -22667,10 +22832,11 @@
             </a:r>
           </a:p>
           <a:p>
-            <a:pPr marL="342900" defTabSz="914400">
+            <a:pPr marL="628650" indent="-285750" defTabSz="914400">
               <a:lnSpc>
                 <a:spcPct val="130000"/>
               </a:lnSpc>
+              <a:buFont typeface="Arial" panose="020B0604020202020204" pitchFamily="34" charset="0"/>
               <a:buChar char="•"/>
             </a:pPr>
             <a:r>
@@ -22684,10 +22850,11 @@
             </a:r>
           </a:p>
           <a:p>
-            <a:pPr marL="342900" defTabSz="914400">
+            <a:pPr marL="628650" indent="-285750" defTabSz="914400">
               <a:lnSpc>
                 <a:spcPct val="130000"/>
               </a:lnSpc>
+              <a:buFont typeface="Arial" panose="020B0604020202020204" pitchFamily="34" charset="0"/>
               <a:buChar char="•"/>
             </a:pPr>
             <a:r>
@@ -22701,10 +22868,11 @@
             </a:r>
           </a:p>
           <a:p>
-            <a:pPr marL="342900" defTabSz="914400">
+            <a:pPr marL="628650" indent="-285750" defTabSz="914400">
               <a:lnSpc>
                 <a:spcPct val="130000"/>
               </a:lnSpc>
+              <a:buFont typeface="Arial" panose="020B0604020202020204" pitchFamily="34" charset="0"/>
               <a:buChar char="•"/>
             </a:pPr>
             <a:r>
@@ -22724,10 +22892,11 @@
             </a:endParaRPr>
           </a:p>
           <a:p>
-            <a:pPr marL="342900" defTabSz="914400">
+            <a:pPr marL="628650" indent="-285750" defTabSz="914400">
               <a:lnSpc>
                 <a:spcPct val="130000"/>
               </a:lnSpc>
+              <a:buFont typeface="Arial" panose="020B0604020202020204" pitchFamily="34" charset="0"/>
               <a:buChar char="•"/>
             </a:pPr>
             <a:r>
@@ -22741,10 +22910,11 @@
             </a:r>
           </a:p>
           <a:p>
-            <a:pPr marL="342900" defTabSz="914400">
+            <a:pPr marL="628650" indent="-285750" defTabSz="914400">
               <a:lnSpc>
                 <a:spcPct val="130000"/>
               </a:lnSpc>
+              <a:buFont typeface="Arial" panose="020B0604020202020204" pitchFamily="34" charset="0"/>
               <a:buChar char="•"/>
             </a:pPr>
             <a:r>
@@ -22754,14 +22924,15 @@
                 </a:solidFill>
                 <a:latin typeface="Archivo Light"/>
               </a:rPr>
-              <a:t>Scheduler tự động cập nhật trạng thái mỗi 30 giây</a:t>
+              <a:t>Scheduler tự động cập nhật trạng thái </a:t>
             </a:r>
           </a:p>
           <a:p>
-            <a:pPr marL="342900" defTabSz="914400">
+            <a:pPr marL="628650" indent="-285750" defTabSz="914400">
               <a:lnSpc>
                 <a:spcPct val="130000"/>
               </a:lnSpc>
+              <a:buFont typeface="Arial" panose="020B0604020202020204" pitchFamily="34" charset="0"/>
               <a:buChar char="•"/>
             </a:pPr>
             <a:r>
@@ -22992,70 +23163,10 @@
       </p:sp>
       <p:pic>
         <p:nvPicPr>
-          <p:cNvPr id="1027" name="Picture 3">
+          <p:cNvPr id="4" name="Picture 3">
             <a:extLst>
               <a:ext uri="{FF2B5EF4-FFF2-40B4-BE49-F238E27FC236}">
-                <a16:creationId xmlns:a16="http://schemas.microsoft.com/office/drawing/2014/main" id="{6A27FB7A-F6CA-A571-AC72-6D677BA47C76}"/>
-              </a:ext>
-            </a:extLst>
-          </p:cNvPr>
-          <p:cNvPicPr>
-            <a:picLocks noChangeAspect="1" noChangeArrowheads="1"/>
-          </p:cNvPicPr>
-          <p:nvPr/>
-        </p:nvPicPr>
-        <p:blipFill>
-          <a:blip r:embed="rId2">
-            <a:extLst>
-              <a:ext uri="{28A0092B-C50C-407E-A947-70E740481C1C}">
-                <a14:useLocalDpi xmlns:a14="http://schemas.microsoft.com/office/drawing/2010/main" val="0"/>
-              </a:ext>
-            </a:extLst>
-          </a:blip>
-          <a:srcRect/>
-          <a:stretch>
-            <a:fillRect/>
-          </a:stretch>
-        </p:blipFill>
-        <p:spPr bwMode="auto">
-          <a:xfrm>
-            <a:off x="5592506" y="949998"/>
-            <a:ext cx="2591579" cy="3730001"/>
-          </a:xfrm>
-          <a:prstGeom prst="rect">
-            <a:avLst/>
-          </a:prstGeom>
-          <a:noFill/>
-          <a:ln>
-            <a:noFill/>
-          </a:ln>
-          <a:extLst>
-            <a:ext uri="{909E8E84-426E-40DD-AFC4-6F175D3DCCD1}">
-              <a14:hiddenFill xmlns:a14="http://schemas.microsoft.com/office/drawing/2010/main">
-                <a:solidFill>
-                  <a:srgbClr val="FFFFFF"/>
-                </a:solidFill>
-              </a14:hiddenFill>
-            </a:ext>
-            <a:ext uri="{91240B29-F687-4F45-9708-019B960494DF}">
-              <a14:hiddenLine xmlns:a14="http://schemas.microsoft.com/office/drawing/2010/main" w="9525">
-                <a:solidFill>
-                  <a:srgbClr val="000000"/>
-                </a:solidFill>
-                <a:miter lim="800000"/>
-                <a:headEnd/>
-                <a:tailEnd/>
-              </a14:hiddenLine>
-            </a:ext>
-          </a:extLst>
-        </p:spPr>
-      </p:pic>
-      <p:pic>
-        <p:nvPicPr>
-          <p:cNvPr id="3" name="Picture 2">
-            <a:extLst>
-              <a:ext uri="{FF2B5EF4-FFF2-40B4-BE49-F238E27FC236}">
-                <a16:creationId xmlns:a16="http://schemas.microsoft.com/office/drawing/2014/main" id="{A801AF30-A831-DB6B-05AB-6EA4DCE7A39E}"/>
+                <a16:creationId xmlns:a16="http://schemas.microsoft.com/office/drawing/2014/main" id="{34C7D474-1575-E59C-3783-928E5294F90B}"/>
               </a:ext>
             </a:extLst>
           </p:cNvPr>
@@ -23065,16 +23176,57 @@
           <p:nvPr/>
         </p:nvPicPr>
         <p:blipFill>
-          <a:blip r:embed="rId3"/>
-          <a:srcRect l="6867" t="2477"/>
+          <a:blip r:embed="rId2" cstate="print">
+            <a:extLst>
+              <a:ext uri="{28A0092B-C50C-407E-A947-70E740481C1C}">
+                <a14:useLocalDpi xmlns:a14="http://schemas.microsoft.com/office/drawing/2010/main" val="0"/>
+              </a:ext>
+            </a:extLst>
+          </a:blip>
           <a:stretch>
             <a:fillRect/>
           </a:stretch>
         </p:blipFill>
         <p:spPr>
           <a:xfrm>
-            <a:off x="872200" y="949998"/>
-            <a:ext cx="3682443" cy="3730001"/>
+            <a:off x="824823" y="880000"/>
+            <a:ext cx="3832377" cy="3819088"/>
+          </a:xfrm>
+          <a:prstGeom prst="rect">
+            <a:avLst/>
+          </a:prstGeom>
+        </p:spPr>
+      </p:pic>
+      <p:pic>
+        <p:nvPicPr>
+          <p:cNvPr id="6" name="Picture 5">
+            <a:extLst>
+              <a:ext uri="{FF2B5EF4-FFF2-40B4-BE49-F238E27FC236}">
+                <a16:creationId xmlns:a16="http://schemas.microsoft.com/office/drawing/2014/main" id="{780E7D85-5818-B144-59EF-AE643578E81A}"/>
+              </a:ext>
+            </a:extLst>
+          </p:cNvPr>
+          <p:cNvPicPr>
+            <a:picLocks noChangeAspect="1"/>
+          </p:cNvPicPr>
+          <p:nvPr/>
+        </p:nvPicPr>
+        <p:blipFill>
+          <a:blip r:embed="rId3">
+            <a:extLst>
+              <a:ext uri="{28A0092B-C50C-407E-A947-70E740481C1C}">
+                <a14:useLocalDpi xmlns:a14="http://schemas.microsoft.com/office/drawing/2010/main" val="0"/>
+              </a:ext>
+            </a:extLst>
+          </a:blip>
+          <a:stretch>
+            <a:fillRect/>
+          </a:stretch>
+        </p:blipFill>
+        <p:spPr>
+          <a:xfrm>
+            <a:off x="5461819" y="881462"/>
+            <a:ext cx="2801602" cy="3779108"/>
           </a:xfrm>
           <a:prstGeom prst="rect">
             <a:avLst/>
